--- a/paper/ppt/MutBench_Defense_v4.pptx
+++ b/paper/ppt/MutBench_Defense_v4.pptx
@@ -3165,7 +3165,7 @@
       </p:sp>
       <p:pic>
         <p:nvPicPr>
-          <p:cNvPr id="3" name="Picture 2" descr="knu_symbol_white.png"/>
+          <p:cNvPr id="3" name="Picture 2" descr="knu_emblem_official.jpg"/>
           <p:cNvPicPr>
             <a:picLocks noChangeAspect="1"/>
           </p:cNvPicPr>
@@ -3229,40 +3229,6 @@
         </p:nvSpPr>
         <p:spPr>
           <a:xfrm>
-            <a:off x="1280160" y="548640"/>
-            <a:ext cx="4572000" cy="274320"/>
-          </a:xfrm>
-          <a:prstGeom prst="rect">
-            <a:avLst/>
-          </a:prstGeom>
-          <a:noFill/>
-        </p:spPr>
-        <p:txBody>
-          <a:bodyPr wrap="square" anchor="t"/>
-          <a:lstStyle/>
-          <a:p>
-            <a:pPr algn="l">
-              <a:defRPr sz="1400" b="0">
-                <a:solidFill>
-                  <a:srgbClr val="FFFFFF"/>
-                </a:solidFill>
-                <a:latin typeface="Calibri"/>
-              </a:defRPr>
-            </a:pPr>
-            <a:r>
-              <a:t>PhD Dissertation Defense</a:t>
-            </a:r>
-          </a:p>
-        </p:txBody>
-      </p:sp>
-      <p:sp>
-        <p:nvSpPr>
-          <p:cNvPr id="6" name="TextBox 5"/>
-          <p:cNvSpPr txBox="1"/>
-          <p:nvPr/>
-        </p:nvSpPr>
-        <p:spPr>
-          <a:xfrm>
             <a:off x="548640" y="1280160"/>
             <a:ext cx="10972800" cy="1463040"/>
           </a:xfrm>
@@ -3302,39 +3268,15 @@
           </a:p>
         </p:txBody>
       </p:sp>
-      <p:pic>
-        <p:nvPicPr>
-          <p:cNvPr id="7" name="Picture 6" descr="knu_emblem_official.jpg"/>
-          <p:cNvPicPr>
-            <a:picLocks noChangeAspect="1"/>
-          </p:cNvPicPr>
-          <p:nvPr/>
-        </p:nvPicPr>
-        <p:blipFill>
-          <a:blip r:embed="rId3"/>
-          <a:stretch>
-            <a:fillRect/>
-          </a:stretch>
-        </p:blipFill>
-        <p:spPr>
-          <a:xfrm>
-            <a:off x="548640" y="3383280"/>
-            <a:ext cx="640080" cy="640080"/>
-          </a:xfrm>
-          <a:prstGeom prst="rect">
-            <a:avLst/>
-          </a:prstGeom>
-        </p:spPr>
-      </p:pic>
-      <p:sp>
-        <p:nvSpPr>
-          <p:cNvPr id="8" name="TextBox 7"/>
-          <p:cNvSpPr txBox="1"/>
-          <p:nvPr/>
-        </p:nvSpPr>
-        <p:spPr>
-          <a:xfrm>
-            <a:off x="1371600" y="3474720"/>
+      <p:sp>
+        <p:nvSpPr>
+          <p:cNvPr id="6" name="TextBox 5"/>
+          <p:cNvSpPr txBox="1"/>
+          <p:nvPr/>
+        </p:nvSpPr>
+        <p:spPr>
+          <a:xfrm>
+            <a:off x="548640" y="3474720"/>
             <a:ext cx="10058400" cy="365760"/>
           </a:xfrm>
           <a:prstGeom prst="rect">
@@ -3362,13 +3304,13 @@
       </p:sp>
       <p:sp>
         <p:nvSpPr>
-          <p:cNvPr id="9" name="TextBox 8"/>
-          <p:cNvSpPr txBox="1"/>
-          <p:nvPr/>
-        </p:nvSpPr>
-        <p:spPr>
-          <a:xfrm>
-            <a:off x="1371600" y="3886200"/>
+          <p:cNvPr id="7" name="TextBox 6"/>
+          <p:cNvSpPr txBox="1"/>
+          <p:nvPr/>
+        </p:nvSpPr>
+        <p:spPr>
+          <a:xfrm>
+            <a:off x="548640" y="3886200"/>
             <a:ext cx="10058400" cy="320040"/>
           </a:xfrm>
           <a:prstGeom prst="rect">
@@ -3396,99 +3338,7 @@
       </p:sp>
       <p:sp>
         <p:nvSpPr>
-          <p:cNvPr id="10" name="Rounded Rectangle 9"/>
-          <p:cNvSpPr/>
-          <p:nvPr/>
-        </p:nvSpPr>
-        <p:spPr>
-          <a:xfrm>
-            <a:off x="548640" y="4663440"/>
-            <a:ext cx="11064240" cy="1371600"/>
-          </a:xfrm>
-          <a:prstGeom prst="roundRect">
-            <a:avLst/>
-          </a:prstGeom>
-          <a:solidFill>
-            <a:srgbClr val="F8F9FA"/>
-          </a:solidFill>
-          <a:ln w="12700">
-            <a:solidFill>
-              <a:srgbClr val="E0E0E0"/>
-            </a:solidFill>
-          </a:ln>
-        </p:spPr>
-        <p:style>
-          <a:lnRef idx="1">
-            <a:schemeClr val="accent1"/>
-          </a:lnRef>
-          <a:fillRef idx="3">
-            <a:schemeClr val="accent1"/>
-          </a:fillRef>
-          <a:effectRef idx="2">
-            <a:schemeClr val="accent1"/>
-          </a:effectRef>
-          <a:fontRef idx="minor">
-            <a:schemeClr val="lt1"/>
-          </a:fontRef>
-        </p:style>
-        <p:txBody>
-          <a:bodyPr rtlCol="0" anchor="ctr"/>
-          <a:lstStyle/>
-          <a:p>
-            <a:pPr algn="ctr"/>
-          </a:p>
-        </p:txBody>
-      </p:sp>
-      <p:sp>
-        <p:nvSpPr>
-          <p:cNvPr id="11" name="TextBox 10"/>
-          <p:cNvSpPr txBox="1"/>
-          <p:nvPr/>
-        </p:nvSpPr>
-        <p:spPr>
-          <a:xfrm>
-            <a:off x="822960" y="4754880"/>
-            <a:ext cx="10515600" cy="1097280"/>
-          </a:xfrm>
-          <a:prstGeom prst="rect">
-            <a:avLst/>
-          </a:prstGeom>
-          <a:noFill/>
-        </p:spPr>
-        <p:txBody>
-          <a:bodyPr wrap="square" anchor="ctr"/>
-          <a:lstStyle/>
-          <a:p>
-            <a:pPr algn="ctr">
-              <a:defRPr sz="1600" b="0">
-                <a:solidFill>
-                  <a:srgbClr val="1B2A4A"/>
-                </a:solidFill>
-                <a:latin typeface="Calibri"/>
-              </a:defRPr>
-            </a:pPr>
-            <a:r>
-              <a:t>9 RNA pathogens    |    2,544 evaluations    |    9 scoring x 39 detection methods</a:t>
-            </a:r>
-          </a:p>
-          <a:p>
-            <a:pPr algn="ctr">
-              <a:defRPr sz="1600" b="0">
-                <a:solidFill>
-                  <a:srgbClr val="1B2A4A"/>
-                </a:solidFill>
-                <a:latin typeface="Calibri"/>
-              </a:defRPr>
-            </a:pPr>
-            <a:r>
-              <a:t>3-layer ground truth    |    Two-way ANOVA    |    PAHD adaptive algorithm</a:t>
-            </a:r>
-          </a:p>
-        </p:txBody>
-      </p:sp>
-      <p:sp>
-        <p:nvSpPr>
-          <p:cNvPr id="12" name="Rectangle 11"/>
+          <p:cNvPr id="8" name="Rectangle 7"/>
           <p:cNvSpPr/>
           <p:nvPr/>
         </p:nvSpPr>
@@ -3626,7 +3476,7 @@
       </p:sp>
       <p:pic>
         <p:nvPicPr>
-          <p:cNvPr id="4" name="Picture 3" descr="knu_symbol_white.png"/>
+          <p:cNvPr id="4" name="Picture 3" descr="knu_emblem_official.jpg"/>
           <p:cNvPicPr>
             <a:picLocks noChangeAspect="1"/>
           </p:cNvPicPr>
@@ -3733,8 +3583,8 @@
         </p:nvSpPr>
         <p:spPr>
           <a:xfrm>
-            <a:off x="11430000" y="6528816"/>
-            <a:ext cx="640080" cy="310896"/>
+            <a:off x="10789920" y="6528816"/>
+            <a:ext cx="1280160" cy="310896"/>
           </a:xfrm>
           <a:prstGeom prst="rect">
             <a:avLst/>
@@ -3754,7 +3604,7 @@
               </a:defRPr>
             </a:pPr>
             <a:r>
-              <a:t>10</a:t>
+              <a:t>—— 10</a:t>
             </a:r>
           </a:p>
         </p:txBody>
@@ -5680,7 +5530,7 @@
       </p:sp>
       <p:pic>
         <p:nvPicPr>
-          <p:cNvPr id="4" name="Picture 3" descr="knu_symbol_white.png"/>
+          <p:cNvPr id="4" name="Picture 3" descr="knu_emblem_official.jpg"/>
           <p:cNvPicPr>
             <a:picLocks noChangeAspect="1"/>
           </p:cNvPicPr>
@@ -5787,8 +5637,8 @@
         </p:nvSpPr>
         <p:spPr>
           <a:xfrm>
-            <a:off x="11430000" y="6528816"/>
-            <a:ext cx="640080" cy="310896"/>
+            <a:off x="10789920" y="6528816"/>
+            <a:ext cx="1280160" cy="310896"/>
           </a:xfrm>
           <a:prstGeom prst="rect">
             <a:avLst/>
@@ -5808,7 +5658,7 @@
               </a:defRPr>
             </a:pPr>
             <a:r>
-              <a:t>11</a:t>
+              <a:t>—— 11</a:t>
             </a:r>
           </a:p>
         </p:txBody>
@@ -8092,7 +7942,7 @@
       </p:sp>
       <p:pic>
         <p:nvPicPr>
-          <p:cNvPr id="4" name="Picture 3" descr="knu_symbol_white.png"/>
+          <p:cNvPr id="4" name="Picture 3" descr="knu_emblem_official.jpg"/>
           <p:cNvPicPr>
             <a:picLocks noChangeAspect="1"/>
           </p:cNvPicPr>
@@ -8199,8 +8049,8 @@
         </p:nvSpPr>
         <p:spPr>
           <a:xfrm>
-            <a:off x="11430000" y="6528816"/>
-            <a:ext cx="640080" cy="310896"/>
+            <a:off x="10789920" y="6528816"/>
+            <a:ext cx="1280160" cy="310896"/>
           </a:xfrm>
           <a:prstGeom prst="rect">
             <a:avLst/>
@@ -8220,7 +8070,7 @@
               </a:defRPr>
             </a:pPr>
             <a:r>
-              <a:t>12</a:t>
+              <a:t>—— 12</a:t>
             </a:r>
           </a:p>
         </p:txBody>
@@ -10338,7 +10188,7 @@
       </p:sp>
       <p:pic>
         <p:nvPicPr>
-          <p:cNvPr id="4" name="Picture 3" descr="knu_symbol_white.png"/>
+          <p:cNvPr id="4" name="Picture 3" descr="knu_emblem_official.jpg"/>
           <p:cNvPicPr>
             <a:picLocks noChangeAspect="1"/>
           </p:cNvPicPr>
@@ -10445,8 +10295,8 @@
         </p:nvSpPr>
         <p:spPr>
           <a:xfrm>
-            <a:off x="11430000" y="6528816"/>
-            <a:ext cx="640080" cy="310896"/>
+            <a:off x="10789920" y="6528816"/>
+            <a:ext cx="1280160" cy="310896"/>
           </a:xfrm>
           <a:prstGeom prst="rect">
             <a:avLst/>
@@ -10466,7 +10316,7 @@
               </a:defRPr>
             </a:pPr>
             <a:r>
-              <a:t>13</a:t>
+              <a:t>—— 13</a:t>
             </a:r>
           </a:p>
         </p:txBody>
@@ -11009,7 +10859,7 @@
       </p:sp>
       <p:pic>
         <p:nvPicPr>
-          <p:cNvPr id="4" name="Picture 3" descr="knu_symbol_white.png"/>
+          <p:cNvPr id="4" name="Picture 3" descr="knu_emblem_official.jpg"/>
           <p:cNvPicPr>
             <a:picLocks noChangeAspect="1"/>
           </p:cNvPicPr>
@@ -11116,8 +10966,8 @@
         </p:nvSpPr>
         <p:spPr>
           <a:xfrm>
-            <a:off x="11430000" y="6528816"/>
-            <a:ext cx="640080" cy="310896"/>
+            <a:off x="10789920" y="6528816"/>
+            <a:ext cx="1280160" cy="310896"/>
           </a:xfrm>
           <a:prstGeom prst="rect">
             <a:avLst/>
@@ -11137,7 +10987,7 @@
               </a:defRPr>
             </a:pPr>
             <a:r>
-              <a:t>14</a:t>
+              <a:t>—— 14</a:t>
             </a:r>
           </a:p>
         </p:txBody>
@@ -11966,7 +11816,7 @@
       </p:sp>
       <p:pic>
         <p:nvPicPr>
-          <p:cNvPr id="4" name="Picture 3" descr="knu_symbol_white.png"/>
+          <p:cNvPr id="4" name="Picture 3" descr="knu_emblem_official.jpg"/>
           <p:cNvPicPr>
             <a:picLocks noChangeAspect="1"/>
           </p:cNvPicPr>
@@ -12073,8 +11923,8 @@
         </p:nvSpPr>
         <p:spPr>
           <a:xfrm>
-            <a:off x="11430000" y="6528816"/>
-            <a:ext cx="640080" cy="310896"/>
+            <a:off x="10789920" y="6528816"/>
+            <a:ext cx="1280160" cy="310896"/>
           </a:xfrm>
           <a:prstGeom prst="rect">
             <a:avLst/>
@@ -12094,7 +11944,7 @@
               </a:defRPr>
             </a:pPr>
             <a:r>
-              <a:t>15</a:t>
+              <a:t>—— 15</a:t>
             </a:r>
           </a:p>
         </p:txBody>
@@ -12811,7 +12661,7 @@
       </p:sp>
       <p:pic>
         <p:nvPicPr>
-          <p:cNvPr id="4" name="Picture 3" descr="knu_symbol_white.png"/>
+          <p:cNvPr id="4" name="Picture 3" descr="knu_emblem_official.jpg"/>
           <p:cNvPicPr>
             <a:picLocks noChangeAspect="1"/>
           </p:cNvPicPr>
@@ -12918,8 +12768,8 @@
         </p:nvSpPr>
         <p:spPr>
           <a:xfrm>
-            <a:off x="11430000" y="6528816"/>
-            <a:ext cx="640080" cy="310896"/>
+            <a:off x="10789920" y="6528816"/>
+            <a:ext cx="1280160" cy="310896"/>
           </a:xfrm>
           <a:prstGeom prst="rect">
             <a:avLst/>
@@ -12939,7 +12789,7 @@
               </a:defRPr>
             </a:pPr>
             <a:r>
-              <a:t>16</a:t>
+              <a:t>—— 16</a:t>
             </a:r>
           </a:p>
         </p:txBody>
@@ -13639,7 +13489,7 @@
       </p:sp>
       <p:pic>
         <p:nvPicPr>
-          <p:cNvPr id="4" name="Picture 3" descr="knu_symbol_white.png"/>
+          <p:cNvPr id="4" name="Picture 3" descr="knu_emblem_official.jpg"/>
           <p:cNvPicPr>
             <a:picLocks noChangeAspect="1"/>
           </p:cNvPicPr>
@@ -13746,8 +13596,8 @@
         </p:nvSpPr>
         <p:spPr>
           <a:xfrm>
-            <a:off x="11430000" y="6528816"/>
-            <a:ext cx="640080" cy="310896"/>
+            <a:off x="10789920" y="6528816"/>
+            <a:ext cx="1280160" cy="310896"/>
           </a:xfrm>
           <a:prstGeom prst="rect">
             <a:avLst/>
@@ -13767,7 +13617,7 @@
               </a:defRPr>
             </a:pPr>
             <a:r>
-              <a:t>17</a:t>
+              <a:t>—— 17</a:t>
             </a:r>
           </a:p>
         </p:txBody>
@@ -14769,7 +14619,7 @@
       </p:sp>
       <p:pic>
         <p:nvPicPr>
-          <p:cNvPr id="4" name="Picture 3" descr="knu_symbol_white.png"/>
+          <p:cNvPr id="4" name="Picture 3" descr="knu_emblem_official.jpg"/>
           <p:cNvPicPr>
             <a:picLocks noChangeAspect="1"/>
           </p:cNvPicPr>
@@ -14876,8 +14726,8 @@
         </p:nvSpPr>
         <p:spPr>
           <a:xfrm>
-            <a:off x="11430000" y="6528816"/>
-            <a:ext cx="640080" cy="310896"/>
+            <a:off x="10789920" y="6528816"/>
+            <a:ext cx="1280160" cy="310896"/>
           </a:xfrm>
           <a:prstGeom prst="rect">
             <a:avLst/>
@@ -14897,7 +14747,7 @@
               </a:defRPr>
             </a:pPr>
             <a:r>
-              <a:t>18</a:t>
+              <a:t>—— 18</a:t>
             </a:r>
           </a:p>
         </p:txBody>
@@ -16098,7 +15948,7 @@
       </p:sp>
       <p:pic>
         <p:nvPicPr>
-          <p:cNvPr id="4" name="Picture 3" descr="knu_symbol_white.png"/>
+          <p:cNvPr id="4" name="Picture 3" descr="knu_emblem_official.jpg"/>
           <p:cNvPicPr>
             <a:picLocks noChangeAspect="1"/>
           </p:cNvPicPr>
@@ -16205,8 +16055,8 @@
         </p:nvSpPr>
         <p:spPr>
           <a:xfrm>
-            <a:off x="11430000" y="6528816"/>
-            <a:ext cx="640080" cy="310896"/>
+            <a:off x="10789920" y="6528816"/>
+            <a:ext cx="1280160" cy="310896"/>
           </a:xfrm>
           <a:prstGeom prst="rect">
             <a:avLst/>
@@ -16226,7 +16076,7 @@
               </a:defRPr>
             </a:pPr>
             <a:r>
-              <a:t>19</a:t>
+              <a:t>—— 19</a:t>
             </a:r>
           </a:p>
         </p:txBody>
@@ -16597,7 +16447,7 @@
       </p:sp>
       <p:pic>
         <p:nvPicPr>
-          <p:cNvPr id="4" name="Picture 3" descr="knu_symbol_white.png"/>
+          <p:cNvPr id="4" name="Picture 3" descr="knu_emblem_official.jpg"/>
           <p:cNvPicPr>
             <a:picLocks noChangeAspect="1"/>
           </p:cNvPicPr>
@@ -16704,8 +16554,8 @@
         </p:nvSpPr>
         <p:spPr>
           <a:xfrm>
-            <a:off x="11430000" y="6528816"/>
-            <a:ext cx="640080" cy="310896"/>
+            <a:off x="10789920" y="6528816"/>
+            <a:ext cx="1280160" cy="310896"/>
           </a:xfrm>
           <a:prstGeom prst="rect">
             <a:avLst/>
@@ -16725,23 +16575,23 @@
               </a:defRPr>
             </a:pPr>
             <a:r>
-              <a:t>2</a:t>
-            </a:r>
-          </a:p>
-        </p:txBody>
-      </p:sp>
-      <p:sp>
-        <p:nvSpPr>
-          <p:cNvPr id="8" name="Rectangle 7"/>
+              <a:t>—— 2</a:t>
+            </a:r>
+          </a:p>
+        </p:txBody>
+      </p:sp>
+      <p:sp>
+        <p:nvSpPr>
+          <p:cNvPr id="8" name="Rounded Rectangle 7"/>
           <p:cNvSpPr/>
           <p:nvPr/>
         </p:nvSpPr>
         <p:spPr>
           <a:xfrm>
-            <a:off x="548640" y="1005840"/>
-            <a:ext cx="109728" cy="731520"/>
-          </a:xfrm>
-          <a:prstGeom prst="rect">
+            <a:off x="1097280" y="1143000"/>
+            <a:ext cx="502920" cy="502920"/>
+          </a:xfrm>
+          <a:prstGeom prst="roundRect">
             <a:avLst/>
           </a:prstGeom>
           <a:solidFill>
@@ -16766,49 +16616,6 @@
           </a:fontRef>
         </p:style>
         <p:txBody>
-          <a:bodyPr rtlCol="0" anchor="ctr"/>
-          <a:lstStyle/>
-          <a:p>
-            <a:pPr algn="ctr"/>
-          </a:p>
-        </p:txBody>
-      </p:sp>
-      <p:sp>
-        <p:nvSpPr>
-          <p:cNvPr id="9" name="Rounded Rectangle 8"/>
-          <p:cNvSpPr/>
-          <p:nvPr/>
-        </p:nvSpPr>
-        <p:spPr>
-          <a:xfrm>
-            <a:off x="822960" y="1097280"/>
-            <a:ext cx="502920" cy="502920"/>
-          </a:xfrm>
-          <a:prstGeom prst="roundRect">
-            <a:avLst/>
-          </a:prstGeom>
-          <a:solidFill>
-            <a:srgbClr val="1B2A4A"/>
-          </a:solidFill>
-          <a:ln>
-            <a:noFill/>
-          </a:ln>
-        </p:spPr>
-        <p:style>
-          <a:lnRef idx="1">
-            <a:schemeClr val="accent1"/>
-          </a:lnRef>
-          <a:fillRef idx="3">
-            <a:schemeClr val="accent1"/>
-          </a:fillRef>
-          <a:effectRef idx="2">
-            <a:schemeClr val="accent1"/>
-          </a:effectRef>
-          <a:fontRef idx="minor">
-            <a:schemeClr val="lt1"/>
-          </a:fontRef>
-        </p:style>
-        <p:txBody>
           <a:bodyPr rtlCol="0" anchor="ctr" wrap="square"/>
           <a:lstStyle/>
           <a:p>
@@ -16828,14 +16635,48 @@
       </p:sp>
       <p:sp>
         <p:nvSpPr>
+          <p:cNvPr id="9" name="TextBox 8"/>
+          <p:cNvSpPr txBox="1"/>
+          <p:nvPr/>
+        </p:nvSpPr>
+        <p:spPr>
+          <a:xfrm>
+            <a:off x="1828800" y="1115568"/>
+            <a:ext cx="5029200" cy="365760"/>
+          </a:xfrm>
+          <a:prstGeom prst="rect">
+            <a:avLst/>
+          </a:prstGeom>
+          <a:noFill/>
+        </p:spPr>
+        <p:txBody>
+          <a:bodyPr wrap="square" anchor="t"/>
+          <a:lstStyle/>
+          <a:p>
+            <a:pPr algn="l">
+              <a:defRPr sz="1700" b="1">
+                <a:solidFill>
+                  <a:srgbClr val="1B2A4A"/>
+                </a:solidFill>
+                <a:latin typeface="Calibri"/>
+              </a:defRPr>
+            </a:pPr>
+            <a:r>
+              <a:t>Introduction</a:t>
+            </a:r>
+          </a:p>
+        </p:txBody>
+      </p:sp>
+      <p:sp>
+        <p:nvSpPr>
           <p:cNvPr id="10" name="TextBox 9"/>
           <p:cNvSpPr txBox="1"/>
           <p:nvPr/>
         </p:nvSpPr>
         <p:spPr>
           <a:xfrm>
-            <a:off x="1508760" y="1051560"/>
-            <a:ext cx="3657600" cy="365760"/>
+            <a:off x="1828800" y="1490472"/>
+            <a:ext cx="7315200" cy="320040"/>
           </a:xfrm>
           <a:prstGeom prst="rect">
             <a:avLst/>
@@ -16847,40 +16688,6 @@
           <a:lstStyle/>
           <a:p>
             <a:pPr algn="l">
-              <a:defRPr sz="1700" b="1">
-                <a:solidFill>
-                  <a:srgbClr val="1B2A4A"/>
-                </a:solidFill>
-                <a:latin typeface="Calibri"/>
-              </a:defRPr>
-            </a:pPr>
-            <a:r>
-              <a:t>Introduction</a:t>
-            </a:r>
-          </a:p>
-        </p:txBody>
-      </p:sp>
-      <p:sp>
-        <p:nvSpPr>
-          <p:cNvPr id="11" name="TextBox 10"/>
-          <p:cNvSpPr txBox="1"/>
-          <p:nvPr/>
-        </p:nvSpPr>
-        <p:spPr>
-          <a:xfrm>
-            <a:off x="1508760" y="1417320"/>
-            <a:ext cx="4572000" cy="320040"/>
-          </a:xfrm>
-          <a:prstGeom prst="rect">
-            <a:avLst/>
-          </a:prstGeom>
-          <a:noFill/>
-        </p:spPr>
-        <p:txBody>
-          <a:bodyPr wrap="square" anchor="t"/>
-          <a:lstStyle/>
-          <a:p>
-            <a:pPr algn="l">
               <a:defRPr sz="1100" b="0">
                 <a:solidFill>
                   <a:srgbClr val="333333"/>
@@ -16889,57 +16696,23 @@
               </a:defRPr>
             </a:pPr>
             <a:r>
-              <a:t>Prior work, biology background, problem definition</a:t>
-            </a:r>
-          </a:p>
-        </p:txBody>
-      </p:sp>
-      <p:sp>
-        <p:nvSpPr>
-          <p:cNvPr id="12" name="TextBox 11"/>
-          <p:cNvSpPr txBox="1"/>
-          <p:nvPr/>
-        </p:nvSpPr>
-        <p:spPr>
-          <a:xfrm>
-            <a:off x="6217920" y="1188720"/>
-            <a:ext cx="1097280" cy="365760"/>
-          </a:xfrm>
-          <a:prstGeom prst="rect">
-            <a:avLst/>
-          </a:prstGeom>
-          <a:noFill/>
-        </p:spPr>
-        <p:txBody>
-          <a:bodyPr wrap="square" anchor="ctr"/>
-          <a:lstStyle/>
-          <a:p>
-            <a:pPr algn="l">
-              <a:defRPr sz="1000" b="0">
-                <a:solidFill>
-                  <a:srgbClr val="888888"/>
-                </a:solidFill>
-                <a:latin typeface="Calibri"/>
-              </a:defRPr>
-            </a:pPr>
-            <a:r>
-              <a:t>S3 - S9</a:t>
-            </a:r>
-          </a:p>
-        </p:txBody>
-      </p:sp>
-      <p:sp>
-        <p:nvSpPr>
-          <p:cNvPr id="13" name="Rectangle 12"/>
+              <a:t>Prior work, biology background, problem definition    (S3 – S9)</a:t>
+            </a:r>
+          </a:p>
+        </p:txBody>
+      </p:sp>
+      <p:sp>
+        <p:nvSpPr>
+          <p:cNvPr id="11" name="Rounded Rectangle 10"/>
           <p:cNvSpPr/>
           <p:nvPr/>
         </p:nvSpPr>
         <p:spPr>
           <a:xfrm>
-            <a:off x="548640" y="1874520"/>
-            <a:ext cx="109728" cy="731520"/>
-          </a:xfrm>
-          <a:prstGeom prst="rect">
+            <a:off x="1097280" y="2011680"/>
+            <a:ext cx="502920" cy="502920"/>
+          </a:xfrm>
+          <a:prstGeom prst="roundRect">
             <a:avLst/>
           </a:prstGeom>
           <a:solidFill>
@@ -16964,10 +16737,88 @@
           </a:fontRef>
         </p:style>
         <p:txBody>
-          <a:bodyPr rtlCol="0" anchor="ctr"/>
-          <a:lstStyle/>
-          <a:p>
-            <a:pPr algn="ctr"/>
+          <a:bodyPr rtlCol="0" anchor="ctr" wrap="square"/>
+          <a:lstStyle/>
+          <a:p>
+            <a:pPr algn="ctr">
+              <a:defRPr sz="1800" b="1">
+                <a:solidFill>
+                  <a:srgbClr val="FFFFFF"/>
+                </a:solidFill>
+                <a:latin typeface="Calibri"/>
+              </a:defRPr>
+            </a:pPr>
+            <a:r>
+              <a:t>2</a:t>
+            </a:r>
+          </a:p>
+        </p:txBody>
+      </p:sp>
+      <p:sp>
+        <p:nvSpPr>
+          <p:cNvPr id="12" name="TextBox 11"/>
+          <p:cNvSpPr txBox="1"/>
+          <p:nvPr/>
+        </p:nvSpPr>
+        <p:spPr>
+          <a:xfrm>
+            <a:off x="1828800" y="1984248"/>
+            <a:ext cx="5029200" cy="365760"/>
+          </a:xfrm>
+          <a:prstGeom prst="rect">
+            <a:avLst/>
+          </a:prstGeom>
+          <a:noFill/>
+        </p:spPr>
+        <p:txBody>
+          <a:bodyPr wrap="square" anchor="t"/>
+          <a:lstStyle/>
+          <a:p>
+            <a:pPr algn="l">
+              <a:defRPr sz="1700" b="1">
+                <a:solidFill>
+                  <a:srgbClr val="1B2A4A"/>
+                </a:solidFill>
+                <a:latin typeface="Calibri"/>
+              </a:defRPr>
+            </a:pPr>
+            <a:r>
+              <a:t>MutBench Framework</a:t>
+            </a:r>
+          </a:p>
+        </p:txBody>
+      </p:sp>
+      <p:sp>
+        <p:nvSpPr>
+          <p:cNvPr id="13" name="TextBox 12"/>
+          <p:cNvSpPr txBox="1"/>
+          <p:nvPr/>
+        </p:nvSpPr>
+        <p:spPr>
+          <a:xfrm>
+            <a:off x="1828800" y="2359152"/>
+            <a:ext cx="7315200" cy="320040"/>
+          </a:xfrm>
+          <a:prstGeom prst="rect">
+            <a:avLst/>
+          </a:prstGeom>
+          <a:noFill/>
+        </p:spPr>
+        <p:txBody>
+          <a:bodyPr wrap="square" anchor="t"/>
+          <a:lstStyle/>
+          <a:p>
+            <a:pPr algn="l">
+              <a:defRPr sz="1100" b="0">
+                <a:solidFill>
+                  <a:srgbClr val="333333"/>
+                </a:solidFill>
+                <a:latin typeface="Calibri"/>
+              </a:defRPr>
+            </a:pPr>
+            <a:r>
+              <a:t>Pipeline, scoring/detection, 3-layer ground truth, MCC    (S10 – S15)</a:t>
+            </a:r>
           </a:p>
         </p:txBody>
       </p:sp>
@@ -16979,165 +16830,10 @@
         </p:nvSpPr>
         <p:spPr>
           <a:xfrm>
-            <a:off x="822960" y="1965960"/>
+            <a:off x="1097280" y="2880360"/>
             <a:ext cx="502920" cy="502920"/>
           </a:xfrm>
           <a:prstGeom prst="roundRect">
-            <a:avLst/>
-          </a:prstGeom>
-          <a:solidFill>
-            <a:srgbClr val="0D7377"/>
-          </a:solidFill>
-          <a:ln>
-            <a:noFill/>
-          </a:ln>
-        </p:spPr>
-        <p:style>
-          <a:lnRef idx="1">
-            <a:schemeClr val="accent1"/>
-          </a:lnRef>
-          <a:fillRef idx="3">
-            <a:schemeClr val="accent1"/>
-          </a:fillRef>
-          <a:effectRef idx="2">
-            <a:schemeClr val="accent1"/>
-          </a:effectRef>
-          <a:fontRef idx="minor">
-            <a:schemeClr val="lt1"/>
-          </a:fontRef>
-        </p:style>
-        <p:txBody>
-          <a:bodyPr rtlCol="0" anchor="ctr" wrap="square"/>
-          <a:lstStyle/>
-          <a:p>
-            <a:pPr algn="ctr">
-              <a:defRPr sz="1800" b="1">
-                <a:solidFill>
-                  <a:srgbClr val="FFFFFF"/>
-                </a:solidFill>
-                <a:latin typeface="Calibri"/>
-              </a:defRPr>
-            </a:pPr>
-            <a:r>
-              <a:t>2</a:t>
-            </a:r>
-          </a:p>
-        </p:txBody>
-      </p:sp>
-      <p:sp>
-        <p:nvSpPr>
-          <p:cNvPr id="15" name="TextBox 14"/>
-          <p:cNvSpPr txBox="1"/>
-          <p:nvPr/>
-        </p:nvSpPr>
-        <p:spPr>
-          <a:xfrm>
-            <a:off x="1508760" y="1920240"/>
-            <a:ext cx="3657600" cy="365760"/>
-          </a:xfrm>
-          <a:prstGeom prst="rect">
-            <a:avLst/>
-          </a:prstGeom>
-          <a:noFill/>
-        </p:spPr>
-        <p:txBody>
-          <a:bodyPr wrap="square" anchor="t"/>
-          <a:lstStyle/>
-          <a:p>
-            <a:pPr algn="l">
-              <a:defRPr sz="1700" b="1">
-                <a:solidFill>
-                  <a:srgbClr val="0D7377"/>
-                </a:solidFill>
-                <a:latin typeface="Calibri"/>
-              </a:defRPr>
-            </a:pPr>
-            <a:r>
-              <a:t>MutBench Framework</a:t>
-            </a:r>
-          </a:p>
-        </p:txBody>
-      </p:sp>
-      <p:sp>
-        <p:nvSpPr>
-          <p:cNvPr id="16" name="TextBox 15"/>
-          <p:cNvSpPr txBox="1"/>
-          <p:nvPr/>
-        </p:nvSpPr>
-        <p:spPr>
-          <a:xfrm>
-            <a:off x="1508760" y="2286000"/>
-            <a:ext cx="4572000" cy="320040"/>
-          </a:xfrm>
-          <a:prstGeom prst="rect">
-            <a:avLst/>
-          </a:prstGeom>
-          <a:noFill/>
-        </p:spPr>
-        <p:txBody>
-          <a:bodyPr wrap="square" anchor="t"/>
-          <a:lstStyle/>
-          <a:p>
-            <a:pPr algn="l">
-              <a:defRPr sz="1100" b="0">
-                <a:solidFill>
-                  <a:srgbClr val="333333"/>
-                </a:solidFill>
-                <a:latin typeface="Calibri"/>
-              </a:defRPr>
-            </a:pPr>
-            <a:r>
-              <a:t>Pipeline, scoring/detection, 3-layer ground truth, MCC</a:t>
-            </a:r>
-          </a:p>
-        </p:txBody>
-      </p:sp>
-      <p:sp>
-        <p:nvSpPr>
-          <p:cNvPr id="17" name="TextBox 16"/>
-          <p:cNvSpPr txBox="1"/>
-          <p:nvPr/>
-        </p:nvSpPr>
-        <p:spPr>
-          <a:xfrm>
-            <a:off x="6217920" y="2057400"/>
-            <a:ext cx="1097280" cy="365760"/>
-          </a:xfrm>
-          <a:prstGeom prst="rect">
-            <a:avLst/>
-          </a:prstGeom>
-          <a:noFill/>
-        </p:spPr>
-        <p:txBody>
-          <a:bodyPr wrap="square" anchor="ctr"/>
-          <a:lstStyle/>
-          <a:p>
-            <a:pPr algn="l">
-              <a:defRPr sz="1000" b="0">
-                <a:solidFill>
-                  <a:srgbClr val="888888"/>
-                </a:solidFill>
-                <a:latin typeface="Calibri"/>
-              </a:defRPr>
-            </a:pPr>
-            <a:r>
-              <a:t>S10 - S15</a:t>
-            </a:r>
-          </a:p>
-        </p:txBody>
-      </p:sp>
-      <p:sp>
-        <p:nvSpPr>
-          <p:cNvPr id="18" name="Rectangle 17"/>
-          <p:cNvSpPr/>
-          <p:nvPr/>
-        </p:nvSpPr>
-        <p:spPr>
-          <a:xfrm>
-            <a:off x="548640" y="2743200"/>
-            <a:ext cx="109728" cy="731520"/>
-          </a:xfrm>
-          <a:prstGeom prst="rect">
             <a:avLst/>
           </a:prstGeom>
           <a:solidFill>
@@ -17162,49 +16858,6 @@
           </a:fontRef>
         </p:style>
         <p:txBody>
-          <a:bodyPr rtlCol="0" anchor="ctr"/>
-          <a:lstStyle/>
-          <a:p>
-            <a:pPr algn="ctr"/>
-          </a:p>
-        </p:txBody>
-      </p:sp>
-      <p:sp>
-        <p:nvSpPr>
-          <p:cNvPr id="19" name="Rounded Rectangle 18"/>
-          <p:cNvSpPr/>
-          <p:nvPr/>
-        </p:nvSpPr>
-        <p:spPr>
-          <a:xfrm>
-            <a:off x="822960" y="2834640"/>
-            <a:ext cx="502920" cy="502920"/>
-          </a:xfrm>
-          <a:prstGeom prst="roundRect">
-            <a:avLst/>
-          </a:prstGeom>
-          <a:solidFill>
-            <a:srgbClr val="2E7D32"/>
-          </a:solidFill>
-          <a:ln>
-            <a:noFill/>
-          </a:ln>
-        </p:spPr>
-        <p:style>
-          <a:lnRef idx="1">
-            <a:schemeClr val="accent1"/>
-          </a:lnRef>
-          <a:fillRef idx="3">
-            <a:schemeClr val="accent1"/>
-          </a:fillRef>
-          <a:effectRef idx="2">
-            <a:schemeClr val="accent1"/>
-          </a:effectRef>
-          <a:fontRef idx="minor">
-            <a:schemeClr val="lt1"/>
-          </a:fontRef>
-        </p:style>
-        <p:txBody>
           <a:bodyPr rtlCol="0" anchor="ctr" wrap="square"/>
           <a:lstStyle/>
           <a:p>
@@ -17224,14 +16877,14 @@
       </p:sp>
       <p:sp>
         <p:nvSpPr>
-          <p:cNvPr id="20" name="TextBox 19"/>
-          <p:cNvSpPr txBox="1"/>
-          <p:nvPr/>
-        </p:nvSpPr>
-        <p:spPr>
-          <a:xfrm>
-            <a:off x="1508760" y="2788920"/>
-            <a:ext cx="3657600" cy="365760"/>
+          <p:cNvPr id="15" name="TextBox 14"/>
+          <p:cNvSpPr txBox="1"/>
+          <p:nvPr/>
+        </p:nvSpPr>
+        <p:spPr>
+          <a:xfrm>
+            <a:off x="1828800" y="2852928"/>
+            <a:ext cx="5029200" cy="365760"/>
           </a:xfrm>
           <a:prstGeom prst="rect">
             <a:avLst/>
@@ -17245,7 +16898,7 @@
             <a:pPr algn="l">
               <a:defRPr sz="1700" b="1">
                 <a:solidFill>
-                  <a:srgbClr val="2E7D32"/>
+                  <a:srgbClr val="1B2A4A"/>
                 </a:solidFill>
                 <a:latin typeface="Calibri"/>
               </a:defRPr>
@@ -17258,14 +16911,14 @@
       </p:sp>
       <p:sp>
         <p:nvSpPr>
-          <p:cNvPr id="21" name="TextBox 20"/>
-          <p:cNvSpPr txBox="1"/>
-          <p:nvPr/>
-        </p:nvSpPr>
-        <p:spPr>
-          <a:xfrm>
-            <a:off x="1508760" y="3154680"/>
-            <a:ext cx="4572000" cy="320040"/>
+          <p:cNvPr id="16" name="TextBox 15"/>
+          <p:cNvSpPr txBox="1"/>
+          <p:nvPr/>
+        </p:nvSpPr>
+        <p:spPr>
+          <a:xfrm>
+            <a:off x="1828800" y="3227832"/>
+            <a:ext cx="7315200" cy="320040"/>
           </a:xfrm>
           <a:prstGeom prst="rect">
             <a:avLst/>
@@ -17285,57 +16938,23 @@
               </a:defRPr>
             </a:pPr>
             <a:r>
-              <a:t>Method comparison, sensitivity, synthetic vs real gap</a:t>
-            </a:r>
-          </a:p>
-        </p:txBody>
-      </p:sp>
-      <p:sp>
-        <p:nvSpPr>
-          <p:cNvPr id="22" name="TextBox 21"/>
-          <p:cNvSpPr txBox="1"/>
-          <p:nvPr/>
-        </p:nvSpPr>
-        <p:spPr>
-          <a:xfrm>
-            <a:off x="6217920" y="2926080"/>
-            <a:ext cx="1097280" cy="365760"/>
-          </a:xfrm>
-          <a:prstGeom prst="rect">
-            <a:avLst/>
-          </a:prstGeom>
-          <a:noFill/>
-        </p:spPr>
-        <p:txBody>
-          <a:bodyPr wrap="square" anchor="ctr"/>
-          <a:lstStyle/>
-          <a:p>
-            <a:pPr algn="l">
-              <a:defRPr sz="1000" b="0">
-                <a:solidFill>
-                  <a:srgbClr val="888888"/>
-                </a:solidFill>
-                <a:latin typeface="Calibri"/>
-              </a:defRPr>
-            </a:pPr>
-            <a:r>
-              <a:t>S16 - S19</a:t>
-            </a:r>
-          </a:p>
-        </p:txBody>
-      </p:sp>
-      <p:sp>
-        <p:nvSpPr>
-          <p:cNvPr id="23" name="Rectangle 22"/>
+              <a:t>Method comparison, sensitivity, synthetic vs real gap    (S16 – S19)</a:t>
+            </a:r>
+          </a:p>
+        </p:txBody>
+      </p:sp>
+      <p:sp>
+        <p:nvSpPr>
+          <p:cNvPr id="17" name="Rounded Rectangle 16"/>
           <p:cNvSpPr/>
           <p:nvPr/>
         </p:nvSpPr>
         <p:spPr>
           <a:xfrm>
-            <a:off x="548640" y="3611880"/>
-            <a:ext cx="109728" cy="731520"/>
-          </a:xfrm>
-          <a:prstGeom prst="rect">
+            <a:off x="1097280" y="3749040"/>
+            <a:ext cx="502920" cy="502920"/>
+          </a:xfrm>
+          <a:prstGeom prst="roundRect">
             <a:avLst/>
           </a:prstGeom>
           <a:solidFill>
@@ -17360,49 +16979,6 @@
           </a:fontRef>
         </p:style>
         <p:txBody>
-          <a:bodyPr rtlCol="0" anchor="ctr"/>
-          <a:lstStyle/>
-          <a:p>
-            <a:pPr algn="ctr"/>
-          </a:p>
-        </p:txBody>
-      </p:sp>
-      <p:sp>
-        <p:nvSpPr>
-          <p:cNvPr id="24" name="Rounded Rectangle 23"/>
-          <p:cNvSpPr/>
-          <p:nvPr/>
-        </p:nvSpPr>
-        <p:spPr>
-          <a:xfrm>
-            <a:off x="822960" y="3703320"/>
-            <a:ext cx="502920" cy="502920"/>
-          </a:xfrm>
-          <a:prstGeom prst="roundRect">
-            <a:avLst/>
-          </a:prstGeom>
-          <a:solidFill>
-            <a:srgbClr val="E65100"/>
-          </a:solidFill>
-          <a:ln>
-            <a:noFill/>
-          </a:ln>
-        </p:spPr>
-        <p:style>
-          <a:lnRef idx="1">
-            <a:schemeClr val="accent1"/>
-          </a:lnRef>
-          <a:fillRef idx="3">
-            <a:schemeClr val="accent1"/>
-          </a:fillRef>
-          <a:effectRef idx="2">
-            <a:schemeClr val="accent1"/>
-          </a:effectRef>
-          <a:fontRef idx="minor">
-            <a:schemeClr val="lt1"/>
-          </a:fontRef>
-        </p:style>
-        <p:txBody>
           <a:bodyPr rtlCol="0" anchor="ctr" wrap="square"/>
           <a:lstStyle/>
           <a:p>
@@ -17422,14 +16998,14 @@
       </p:sp>
       <p:sp>
         <p:nvSpPr>
-          <p:cNvPr id="25" name="TextBox 24"/>
-          <p:cNvSpPr txBox="1"/>
-          <p:nvPr/>
-        </p:nvSpPr>
-        <p:spPr>
-          <a:xfrm>
-            <a:off x="1508760" y="3657600"/>
-            <a:ext cx="3657600" cy="365760"/>
+          <p:cNvPr id="18" name="TextBox 17"/>
+          <p:cNvSpPr txBox="1"/>
+          <p:nvPr/>
+        </p:nvSpPr>
+        <p:spPr>
+          <a:xfrm>
+            <a:off x="1828800" y="3721608"/>
+            <a:ext cx="5029200" cy="365760"/>
           </a:xfrm>
           <a:prstGeom prst="rect">
             <a:avLst/>
@@ -17443,7 +17019,7 @@
             <a:pPr algn="l">
               <a:defRPr sz="1700" b="1">
                 <a:solidFill>
-                  <a:srgbClr val="E65100"/>
+                  <a:srgbClr val="1B2A4A"/>
                 </a:solidFill>
                 <a:latin typeface="Calibri"/>
               </a:defRPr>
@@ -17456,14 +17032,14 @@
       </p:sp>
       <p:sp>
         <p:nvSpPr>
-          <p:cNvPr id="26" name="TextBox 25"/>
-          <p:cNvSpPr txBox="1"/>
-          <p:nvPr/>
-        </p:nvSpPr>
-        <p:spPr>
-          <a:xfrm>
-            <a:off x="1508760" y="4023360"/>
-            <a:ext cx="4572000" cy="320040"/>
+          <p:cNvPr id="19" name="TextBox 18"/>
+          <p:cNvSpPr txBox="1"/>
+          <p:nvPr/>
+        </p:nvSpPr>
+        <p:spPr>
+          <a:xfrm>
+            <a:off x="1828800" y="4096512"/>
+            <a:ext cx="7315200" cy="320040"/>
           </a:xfrm>
           <a:prstGeom prst="rect">
             <a:avLst/>
@@ -17483,57 +17059,23 @@
               </a:defRPr>
             </a:pPr>
             <a:r>
-              <a:t>ANOVA, per-pathogen best, Friedman, LOPO, ESM-2</a:t>
-            </a:r>
-          </a:p>
-        </p:txBody>
-      </p:sp>
-      <p:sp>
-        <p:nvSpPr>
-          <p:cNvPr id="27" name="TextBox 26"/>
-          <p:cNvSpPr txBox="1"/>
-          <p:nvPr/>
-        </p:nvSpPr>
-        <p:spPr>
-          <a:xfrm>
-            <a:off x="6217920" y="3794760"/>
-            <a:ext cx="1097280" cy="365760"/>
-          </a:xfrm>
-          <a:prstGeom prst="rect">
-            <a:avLst/>
-          </a:prstGeom>
-          <a:noFill/>
-        </p:spPr>
-        <p:txBody>
-          <a:bodyPr wrap="square" anchor="ctr"/>
-          <a:lstStyle/>
-          <a:p>
-            <a:pPr algn="l">
-              <a:defRPr sz="1000" b="0">
-                <a:solidFill>
-                  <a:srgbClr val="888888"/>
-                </a:solidFill>
-                <a:latin typeface="Calibri"/>
-              </a:defRPr>
-            </a:pPr>
-            <a:r>
-              <a:t>S20 - S25</a:t>
-            </a:r>
-          </a:p>
-        </p:txBody>
-      </p:sp>
-      <p:sp>
-        <p:nvSpPr>
-          <p:cNvPr id="28" name="Rectangle 27"/>
+              <a:t>ANOVA, per-pathogen best, Friedman, LOPO, ESM-2    (S20 – S25)</a:t>
+            </a:r>
+          </a:p>
+        </p:txBody>
+      </p:sp>
+      <p:sp>
+        <p:nvSpPr>
+          <p:cNvPr id="20" name="Rounded Rectangle 19"/>
           <p:cNvSpPr/>
           <p:nvPr/>
         </p:nvSpPr>
         <p:spPr>
           <a:xfrm>
-            <a:off x="548640" y="4480560"/>
-            <a:ext cx="109728" cy="731520"/>
-          </a:xfrm>
-          <a:prstGeom prst="rect">
+            <a:off x="1097280" y="4617720"/>
+            <a:ext cx="502920" cy="502920"/>
+          </a:xfrm>
+          <a:prstGeom prst="roundRect">
             <a:avLst/>
           </a:prstGeom>
           <a:solidFill>
@@ -17558,49 +17100,6 @@
           </a:fontRef>
         </p:style>
         <p:txBody>
-          <a:bodyPr rtlCol="0" anchor="ctr"/>
-          <a:lstStyle/>
-          <a:p>
-            <a:pPr algn="ctr"/>
-          </a:p>
-        </p:txBody>
-      </p:sp>
-      <p:sp>
-        <p:nvSpPr>
-          <p:cNvPr id="29" name="Rounded Rectangle 28"/>
-          <p:cNvSpPr/>
-          <p:nvPr/>
-        </p:nvSpPr>
-        <p:spPr>
-          <a:xfrm>
-            <a:off x="822960" y="4572000"/>
-            <a:ext cx="502920" cy="502920"/>
-          </a:xfrm>
-          <a:prstGeom prst="roundRect">
-            <a:avLst/>
-          </a:prstGeom>
-          <a:solidFill>
-            <a:srgbClr val="6A1B9A"/>
-          </a:solidFill>
-          <a:ln>
-            <a:noFill/>
-          </a:ln>
-        </p:spPr>
-        <p:style>
-          <a:lnRef idx="1">
-            <a:schemeClr val="accent1"/>
-          </a:lnRef>
-          <a:fillRef idx="3">
-            <a:schemeClr val="accent1"/>
-          </a:fillRef>
-          <a:effectRef idx="2">
-            <a:schemeClr val="accent1"/>
-          </a:effectRef>
-          <a:fontRef idx="minor">
-            <a:schemeClr val="lt1"/>
-          </a:fontRef>
-        </p:style>
-        <p:txBody>
           <a:bodyPr rtlCol="0" anchor="ctr" wrap="square"/>
           <a:lstStyle/>
           <a:p>
@@ -17620,14 +17119,14 @@
       </p:sp>
       <p:sp>
         <p:nvSpPr>
-          <p:cNvPr id="30" name="TextBox 29"/>
-          <p:cNvSpPr txBox="1"/>
-          <p:nvPr/>
-        </p:nvSpPr>
-        <p:spPr>
-          <a:xfrm>
-            <a:off x="1508760" y="4526280"/>
-            <a:ext cx="3657600" cy="365760"/>
+          <p:cNvPr id="21" name="TextBox 20"/>
+          <p:cNvSpPr txBox="1"/>
+          <p:nvPr/>
+        </p:nvSpPr>
+        <p:spPr>
+          <a:xfrm>
+            <a:off x="1828800" y="4590288"/>
+            <a:ext cx="5029200" cy="365760"/>
           </a:xfrm>
           <a:prstGeom prst="rect">
             <a:avLst/>
@@ -17641,7 +17140,7 @@
             <a:pPr algn="l">
               <a:defRPr sz="1700" b="1">
                 <a:solidFill>
-                  <a:srgbClr val="6A1B9A"/>
+                  <a:srgbClr val="1B2A4A"/>
                 </a:solidFill>
                 <a:latin typeface="Calibri"/>
               </a:defRPr>
@@ -17654,14 +17153,14 @@
       </p:sp>
       <p:sp>
         <p:nvSpPr>
-          <p:cNvPr id="31" name="TextBox 30"/>
-          <p:cNvSpPr txBox="1"/>
-          <p:nvPr/>
-        </p:nvSpPr>
-        <p:spPr>
-          <a:xfrm>
-            <a:off x="1508760" y="4892040"/>
-            <a:ext cx="4572000" cy="320040"/>
+          <p:cNvPr id="22" name="TextBox 21"/>
+          <p:cNvSpPr txBox="1"/>
+          <p:nvPr/>
+        </p:nvSpPr>
+        <p:spPr>
+          <a:xfrm>
+            <a:off x="1828800" y="4965192"/>
+            <a:ext cx="7315200" cy="320040"/>
           </a:xfrm>
           <a:prstGeom prst="rect">
             <a:avLst/>
@@ -17681,57 +17180,23 @@
               </a:defRPr>
             </a:pPr>
             <a:r>
-              <a:t>PAHD algorithm, phylogenetic correction, baselines</a:t>
-            </a:r>
-          </a:p>
-        </p:txBody>
-      </p:sp>
-      <p:sp>
-        <p:nvSpPr>
-          <p:cNvPr id="32" name="TextBox 31"/>
-          <p:cNvSpPr txBox="1"/>
-          <p:nvPr/>
-        </p:nvSpPr>
-        <p:spPr>
-          <a:xfrm>
-            <a:off x="6217920" y="4663440"/>
-            <a:ext cx="1097280" cy="365760"/>
-          </a:xfrm>
-          <a:prstGeom prst="rect">
-            <a:avLst/>
-          </a:prstGeom>
-          <a:noFill/>
-        </p:spPr>
-        <p:txBody>
-          <a:bodyPr wrap="square" anchor="ctr"/>
-          <a:lstStyle/>
-          <a:p>
-            <a:pPr algn="l">
-              <a:defRPr sz="1000" b="0">
-                <a:solidFill>
-                  <a:srgbClr val="888888"/>
-                </a:solidFill>
-                <a:latin typeface="Calibri"/>
-              </a:defRPr>
-            </a:pPr>
-            <a:r>
-              <a:t>S26 - S28</a:t>
-            </a:r>
-          </a:p>
-        </p:txBody>
-      </p:sp>
-      <p:sp>
-        <p:nvSpPr>
-          <p:cNvPr id="33" name="Rectangle 32"/>
+              <a:t>PAHD algorithm, phylogenetic correction, baselines    (S26 – S28)</a:t>
+            </a:r>
+          </a:p>
+        </p:txBody>
+      </p:sp>
+      <p:sp>
+        <p:nvSpPr>
+          <p:cNvPr id="23" name="Rounded Rectangle 22"/>
           <p:cNvSpPr/>
           <p:nvPr/>
         </p:nvSpPr>
         <p:spPr>
           <a:xfrm>
-            <a:off x="548640" y="5349240"/>
-            <a:ext cx="109728" cy="731520"/>
-          </a:xfrm>
-          <a:prstGeom prst="rect">
+            <a:off x="1097280" y="5486400"/>
+            <a:ext cx="502920" cy="502920"/>
+          </a:xfrm>
+          <a:prstGeom prst="roundRect">
             <a:avLst/>
           </a:prstGeom>
           <a:solidFill>
@@ -17756,49 +17221,6 @@
           </a:fontRef>
         </p:style>
         <p:txBody>
-          <a:bodyPr rtlCol="0" anchor="ctr"/>
-          <a:lstStyle/>
-          <a:p>
-            <a:pPr algn="ctr"/>
-          </a:p>
-        </p:txBody>
-      </p:sp>
-      <p:sp>
-        <p:nvSpPr>
-          <p:cNvPr id="34" name="Rounded Rectangle 33"/>
-          <p:cNvSpPr/>
-          <p:nvPr/>
-        </p:nvSpPr>
-        <p:spPr>
-          <a:xfrm>
-            <a:off x="822960" y="5440680"/>
-            <a:ext cx="502920" cy="502920"/>
-          </a:xfrm>
-          <a:prstGeom prst="roundRect">
-            <a:avLst/>
-          </a:prstGeom>
-          <a:solidFill>
-            <a:srgbClr val="C62828"/>
-          </a:solidFill>
-          <a:ln>
-            <a:noFill/>
-          </a:ln>
-        </p:spPr>
-        <p:style>
-          <a:lnRef idx="1">
-            <a:schemeClr val="accent1"/>
-          </a:lnRef>
-          <a:fillRef idx="3">
-            <a:schemeClr val="accent1"/>
-          </a:fillRef>
-          <a:effectRef idx="2">
-            <a:schemeClr val="accent1"/>
-          </a:effectRef>
-          <a:fontRef idx="minor">
-            <a:schemeClr val="lt1"/>
-          </a:fontRef>
-        </p:style>
-        <p:txBody>
           <a:bodyPr rtlCol="0" anchor="ctr" wrap="square"/>
           <a:lstStyle/>
           <a:p>
@@ -17818,14 +17240,14 @@
       </p:sp>
       <p:sp>
         <p:nvSpPr>
-          <p:cNvPr id="35" name="TextBox 34"/>
-          <p:cNvSpPr txBox="1"/>
-          <p:nvPr/>
-        </p:nvSpPr>
-        <p:spPr>
-          <a:xfrm>
-            <a:off x="1508760" y="5394960"/>
-            <a:ext cx="3657600" cy="365760"/>
+          <p:cNvPr id="24" name="TextBox 23"/>
+          <p:cNvSpPr txBox="1"/>
+          <p:nvPr/>
+        </p:nvSpPr>
+        <p:spPr>
+          <a:xfrm>
+            <a:off x="1828800" y="5458968"/>
+            <a:ext cx="5029200" cy="365760"/>
           </a:xfrm>
           <a:prstGeom prst="rect">
             <a:avLst/>
@@ -17839,7 +17261,7 @@
             <a:pPr algn="l">
               <a:defRPr sz="1700" b="1">
                 <a:solidFill>
-                  <a:srgbClr val="C62828"/>
+                  <a:srgbClr val="1B2A4A"/>
                 </a:solidFill>
                 <a:latin typeface="Calibri"/>
               </a:defRPr>
@@ -17852,14 +17274,14 @@
       </p:sp>
       <p:sp>
         <p:nvSpPr>
-          <p:cNvPr id="36" name="TextBox 35"/>
-          <p:cNvSpPr txBox="1"/>
-          <p:nvPr/>
-        </p:nvSpPr>
-        <p:spPr>
-          <a:xfrm>
-            <a:off x="1508760" y="5760720"/>
-            <a:ext cx="4572000" cy="320040"/>
+          <p:cNvPr id="25" name="TextBox 24"/>
+          <p:cNvSpPr txBox="1"/>
+          <p:nvPr/>
+        </p:nvSpPr>
+        <p:spPr>
+          <a:xfrm>
+            <a:off x="1828800" y="5833872"/>
+            <a:ext cx="7315200" cy="320040"/>
           </a:xfrm>
           <a:prstGeom prst="rect">
             <a:avLst/>
@@ -17879,541 +17301,7 @@
               </a:defRPr>
             </a:pPr>
             <a:r>
-              <a:t>Contributions, discussion, limitations, future work</a:t>
-            </a:r>
-          </a:p>
-        </p:txBody>
-      </p:sp>
-      <p:sp>
-        <p:nvSpPr>
-          <p:cNvPr id="37" name="TextBox 36"/>
-          <p:cNvSpPr txBox="1"/>
-          <p:nvPr/>
-        </p:nvSpPr>
-        <p:spPr>
-          <a:xfrm>
-            <a:off x="6217920" y="5532120"/>
-            <a:ext cx="1097280" cy="365760"/>
-          </a:xfrm>
-          <a:prstGeom prst="rect">
-            <a:avLst/>
-          </a:prstGeom>
-          <a:noFill/>
-        </p:spPr>
-        <p:txBody>
-          <a:bodyPr wrap="square" anchor="ctr"/>
-          <a:lstStyle/>
-          <a:p>
-            <a:pPr algn="l">
-              <a:defRPr sz="1000" b="0">
-                <a:solidFill>
-                  <a:srgbClr val="888888"/>
-                </a:solidFill>
-                <a:latin typeface="Calibri"/>
-              </a:defRPr>
-            </a:pPr>
-            <a:r>
-              <a:t>S29 - S33</a:t>
-            </a:r>
-          </a:p>
-        </p:txBody>
-      </p:sp>
-      <p:sp>
-        <p:nvSpPr>
-          <p:cNvPr id="38" name="TextBox 37"/>
-          <p:cNvSpPr txBox="1"/>
-          <p:nvPr/>
-        </p:nvSpPr>
-        <p:spPr>
-          <a:xfrm>
-            <a:off x="7772400" y="1005840"/>
-            <a:ext cx="3840480" cy="365760"/>
-          </a:xfrm>
-          <a:prstGeom prst="rect">
-            <a:avLst/>
-          </a:prstGeom>
-          <a:noFill/>
-        </p:spPr>
-        <p:txBody>
-          <a:bodyPr wrap="square" anchor="t"/>
-          <a:lstStyle/>
-          <a:p>
-            <a:pPr algn="ctr">
-              <a:defRPr sz="1600" b="1">
-                <a:solidFill>
-                  <a:srgbClr val="1B2A4A"/>
-                </a:solidFill>
-                <a:latin typeface="Calibri"/>
-              </a:defRPr>
-            </a:pPr>
-            <a:r>
-              <a:t>Research Flow</a:t>
-            </a:r>
-          </a:p>
-        </p:txBody>
-      </p:sp>
-      <p:sp>
-        <p:nvSpPr>
-          <p:cNvPr id="39" name="Rounded Rectangle 38"/>
-          <p:cNvSpPr/>
-          <p:nvPr/>
-        </p:nvSpPr>
-        <p:spPr>
-          <a:xfrm>
-            <a:off x="7955279" y="1508760"/>
-            <a:ext cx="3474720" cy="777240"/>
-          </a:xfrm>
-          <a:prstGeom prst="roundRect">
-            <a:avLst/>
-          </a:prstGeom>
-          <a:solidFill>
-            <a:srgbClr val="1B2A4A"/>
-          </a:solidFill>
-          <a:ln>
-            <a:noFill/>
-          </a:ln>
-        </p:spPr>
-        <p:style>
-          <a:lnRef idx="1">
-            <a:schemeClr val="accent1"/>
-          </a:lnRef>
-          <a:fillRef idx="3">
-            <a:schemeClr val="accent1"/>
-          </a:fillRef>
-          <a:effectRef idx="2">
-            <a:schemeClr val="accent1"/>
-          </a:effectRef>
-          <a:fontRef idx="minor">
-            <a:schemeClr val="lt1"/>
-          </a:fontRef>
-        </p:style>
-        <p:txBody>
-          <a:bodyPr rtlCol="0" anchor="ctr" wrap="square"/>
-          <a:lstStyle/>
-          <a:p>
-            <a:pPr algn="ctr">
-              <a:defRPr sz="1000" b="0">
-                <a:solidFill>
-                  <a:srgbClr val="FFFFFF"/>
-                </a:solidFill>
-                <a:latin typeface="Calibri"/>
-              </a:defRPr>
-            </a:pPr>
-            <a:r>
-              <a:t>Problem: H-score bias</a:t>
-            </a:r>
-          </a:p>
-          <a:p>
-            <a:pPr algn="ctr">
-              <a:defRPr sz="1000" b="0">
-                <a:solidFill>
-                  <a:srgbClr val="FFFFFF"/>
-                </a:solidFill>
-                <a:latin typeface="Calibri"/>
-              </a:defRPr>
-            </a:pPr>
-            <a:r>
-              <a:t>Single-pathogen limit</a:t>
-            </a:r>
-          </a:p>
-        </p:txBody>
-      </p:sp>
-      <p:sp>
-        <p:nvSpPr>
-          <p:cNvPr id="40" name="TextBox 39"/>
-          <p:cNvSpPr txBox="1"/>
-          <p:nvPr/>
-        </p:nvSpPr>
-        <p:spPr>
-          <a:xfrm>
-            <a:off x="9326880" y="2240280"/>
-            <a:ext cx="731520" cy="274320"/>
-          </a:xfrm>
-          <a:prstGeom prst="rect">
-            <a:avLst/>
-          </a:prstGeom>
-          <a:noFill/>
-        </p:spPr>
-        <p:txBody>
-          <a:bodyPr wrap="square" anchor="t"/>
-          <a:lstStyle/>
-          <a:p>
-            <a:pPr algn="ctr">
-              <a:defRPr sz="1400" b="1">
-                <a:solidFill>
-                  <a:srgbClr val="888888"/>
-                </a:solidFill>
-                <a:latin typeface="Calibri"/>
-              </a:defRPr>
-            </a:pPr>
-            <a:r>
-              <a:t>v</a:t>
-            </a:r>
-          </a:p>
-        </p:txBody>
-      </p:sp>
-      <p:sp>
-        <p:nvSpPr>
-          <p:cNvPr id="41" name="Rounded Rectangle 40"/>
-          <p:cNvSpPr/>
-          <p:nvPr/>
-        </p:nvSpPr>
-        <p:spPr>
-          <a:xfrm>
-            <a:off x="7955279" y="2468880"/>
-            <a:ext cx="3474720" cy="777240"/>
-          </a:xfrm>
-          <a:prstGeom prst="roundRect">
-            <a:avLst/>
-          </a:prstGeom>
-          <a:solidFill>
-            <a:srgbClr val="0D7377"/>
-          </a:solidFill>
-          <a:ln>
-            <a:noFill/>
-          </a:ln>
-        </p:spPr>
-        <p:style>
-          <a:lnRef idx="1">
-            <a:schemeClr val="accent1"/>
-          </a:lnRef>
-          <a:fillRef idx="3">
-            <a:schemeClr val="accent1"/>
-          </a:fillRef>
-          <a:effectRef idx="2">
-            <a:schemeClr val="accent1"/>
-          </a:effectRef>
-          <a:fontRef idx="minor">
-            <a:schemeClr val="lt1"/>
-          </a:fontRef>
-        </p:style>
-        <p:txBody>
-          <a:bodyPr rtlCol="0" anchor="ctr" wrap="square"/>
-          <a:lstStyle/>
-          <a:p>
-            <a:pPr algn="ctr">
-              <a:defRPr sz="1000" b="0">
-                <a:solidFill>
-                  <a:srgbClr val="FFFFFF"/>
-                </a:solidFill>
-                <a:latin typeface="Calibri"/>
-              </a:defRPr>
-            </a:pPr>
-            <a:r>
-              <a:t>Framework: MutBench pipeline</a:t>
-            </a:r>
-          </a:p>
-          <a:p>
-            <a:pPr algn="ctr">
-              <a:defRPr sz="1000" b="0">
-                <a:solidFill>
-                  <a:srgbClr val="FFFFFF"/>
-                </a:solidFill>
-                <a:latin typeface="Calibri"/>
-              </a:defRPr>
-            </a:pPr>
-            <a:r>
-              <a:t>9 scoring x 39 detection</a:t>
-            </a:r>
-          </a:p>
-        </p:txBody>
-      </p:sp>
-      <p:sp>
-        <p:nvSpPr>
-          <p:cNvPr id="42" name="TextBox 41"/>
-          <p:cNvSpPr txBox="1"/>
-          <p:nvPr/>
-        </p:nvSpPr>
-        <p:spPr>
-          <a:xfrm>
-            <a:off x="9326880" y="3200400"/>
-            <a:ext cx="731520" cy="274320"/>
-          </a:xfrm>
-          <a:prstGeom prst="rect">
-            <a:avLst/>
-          </a:prstGeom>
-          <a:noFill/>
-        </p:spPr>
-        <p:txBody>
-          <a:bodyPr wrap="square" anchor="t"/>
-          <a:lstStyle/>
-          <a:p>
-            <a:pPr algn="ctr">
-              <a:defRPr sz="1400" b="1">
-                <a:solidFill>
-                  <a:srgbClr val="888888"/>
-                </a:solidFill>
-                <a:latin typeface="Calibri"/>
-              </a:defRPr>
-            </a:pPr>
-            <a:r>
-              <a:t>v</a:t>
-            </a:r>
-          </a:p>
-        </p:txBody>
-      </p:sp>
-      <p:sp>
-        <p:nvSpPr>
-          <p:cNvPr id="43" name="Rounded Rectangle 42"/>
-          <p:cNvSpPr/>
-          <p:nvPr/>
-        </p:nvSpPr>
-        <p:spPr>
-          <a:xfrm>
-            <a:off x="7955279" y="3429000"/>
-            <a:ext cx="3474720" cy="777240"/>
-          </a:xfrm>
-          <a:prstGeom prst="roundRect">
-            <a:avLst/>
-          </a:prstGeom>
-          <a:solidFill>
-            <a:srgbClr val="2E7D32"/>
-          </a:solidFill>
-          <a:ln>
-            <a:noFill/>
-          </a:ln>
-        </p:spPr>
-        <p:style>
-          <a:lnRef idx="1">
-            <a:schemeClr val="accent1"/>
-          </a:lnRef>
-          <a:fillRef idx="3">
-            <a:schemeClr val="accent1"/>
-          </a:fillRef>
-          <a:effectRef idx="2">
-            <a:schemeClr val="accent1"/>
-          </a:effectRef>
-          <a:fontRef idx="minor">
-            <a:schemeClr val="lt1"/>
-          </a:fontRef>
-        </p:style>
-        <p:txBody>
-          <a:bodyPr rtlCol="0" anchor="ctr" wrap="square"/>
-          <a:lstStyle/>
-          <a:p>
-            <a:pPr algn="ctr">
-              <a:defRPr sz="1000" b="0">
-                <a:solidFill>
-                  <a:srgbClr val="FFFFFF"/>
-                </a:solidFill>
-                <a:latin typeface="Calibri"/>
-              </a:defRPr>
-            </a:pPr>
-            <a:r>
-              <a:t>Validation: Stage 1 + Stage 2</a:t>
-            </a:r>
-          </a:p>
-          <a:p>
-            <a:pPr algn="ctr">
-              <a:defRPr sz="1000" b="0">
-                <a:solidFill>
-                  <a:srgbClr val="FFFFFF"/>
-                </a:solidFill>
-                <a:latin typeface="Calibri"/>
-              </a:defRPr>
-            </a:pPr>
-            <a:r>
-              <a:t>2,544 evaluations</a:t>
-            </a:r>
-          </a:p>
-        </p:txBody>
-      </p:sp>
-      <p:sp>
-        <p:nvSpPr>
-          <p:cNvPr id="44" name="TextBox 43"/>
-          <p:cNvSpPr txBox="1"/>
-          <p:nvPr/>
-        </p:nvSpPr>
-        <p:spPr>
-          <a:xfrm>
-            <a:off x="9326880" y="4160520"/>
-            <a:ext cx="731520" cy="274320"/>
-          </a:xfrm>
-          <a:prstGeom prst="rect">
-            <a:avLst/>
-          </a:prstGeom>
-          <a:noFill/>
-        </p:spPr>
-        <p:txBody>
-          <a:bodyPr wrap="square" anchor="t"/>
-          <a:lstStyle/>
-          <a:p>
-            <a:pPr algn="ctr">
-              <a:defRPr sz="1400" b="1">
-                <a:solidFill>
-                  <a:srgbClr val="888888"/>
-                </a:solidFill>
-                <a:latin typeface="Calibri"/>
-              </a:defRPr>
-            </a:pPr>
-            <a:r>
-              <a:t>v</a:t>
-            </a:r>
-          </a:p>
-        </p:txBody>
-      </p:sp>
-      <p:sp>
-        <p:nvSpPr>
-          <p:cNvPr id="45" name="Rounded Rectangle 44"/>
-          <p:cNvSpPr/>
-          <p:nvPr/>
-        </p:nvSpPr>
-        <p:spPr>
-          <a:xfrm>
-            <a:off x="7955279" y="4389120"/>
-            <a:ext cx="3474720" cy="777240"/>
-          </a:xfrm>
-          <a:prstGeom prst="roundRect">
-            <a:avLst/>
-          </a:prstGeom>
-          <a:solidFill>
-            <a:srgbClr val="E65100"/>
-          </a:solidFill>
-          <a:ln>
-            <a:noFill/>
-          </a:ln>
-        </p:spPr>
-        <p:style>
-          <a:lnRef idx="1">
-            <a:schemeClr val="accent1"/>
-          </a:lnRef>
-          <a:fillRef idx="3">
-            <a:schemeClr val="accent1"/>
-          </a:fillRef>
-          <a:effectRef idx="2">
-            <a:schemeClr val="accent1"/>
-          </a:effectRef>
-          <a:fontRef idx="minor">
-            <a:schemeClr val="lt1"/>
-          </a:fontRef>
-        </p:style>
-        <p:txBody>
-          <a:bodyPr rtlCol="0" anchor="ctr" wrap="square"/>
-          <a:lstStyle/>
-          <a:p>
-            <a:pPr algn="ctr">
-              <a:defRPr sz="1000" b="0">
-                <a:solidFill>
-                  <a:srgbClr val="FFFFFF"/>
-                </a:solidFill>
-                <a:latin typeface="Calibri"/>
-              </a:defRPr>
-            </a:pPr>
-            <a:r>
-              <a:t>Finding: No universal best</a:t>
-            </a:r>
-          </a:p>
-          <a:p>
-            <a:pPr algn="ctr">
-              <a:defRPr sz="1000" b="0">
-                <a:solidFill>
-                  <a:srgbClr val="FFFFFF"/>
-                </a:solidFill>
-                <a:latin typeface="Calibri"/>
-              </a:defRPr>
-            </a:pPr>
-            <a:r>
-              <a:t>omega-sq = 0.285</a:t>
-            </a:r>
-          </a:p>
-        </p:txBody>
-      </p:sp>
-      <p:sp>
-        <p:nvSpPr>
-          <p:cNvPr id="46" name="TextBox 45"/>
-          <p:cNvSpPr txBox="1"/>
-          <p:nvPr/>
-        </p:nvSpPr>
-        <p:spPr>
-          <a:xfrm>
-            <a:off x="9326880" y="5120640"/>
-            <a:ext cx="731520" cy="274320"/>
-          </a:xfrm>
-          <a:prstGeom prst="rect">
-            <a:avLst/>
-          </a:prstGeom>
-          <a:noFill/>
-        </p:spPr>
-        <p:txBody>
-          <a:bodyPr wrap="square" anchor="t"/>
-          <a:lstStyle/>
-          <a:p>
-            <a:pPr algn="ctr">
-              <a:defRPr sz="1400" b="1">
-                <a:solidFill>
-                  <a:srgbClr val="888888"/>
-                </a:solidFill>
-                <a:latin typeface="Calibri"/>
-              </a:defRPr>
-            </a:pPr>
-            <a:r>
-              <a:t>v</a:t>
-            </a:r>
-          </a:p>
-        </p:txBody>
-      </p:sp>
-      <p:sp>
-        <p:nvSpPr>
-          <p:cNvPr id="47" name="Rounded Rectangle 46"/>
-          <p:cNvSpPr/>
-          <p:nvPr/>
-        </p:nvSpPr>
-        <p:spPr>
-          <a:xfrm>
-            <a:off x="7955279" y="5349240"/>
-            <a:ext cx="3474720" cy="777240"/>
-          </a:xfrm>
-          <a:prstGeom prst="roundRect">
-            <a:avLst/>
-          </a:prstGeom>
-          <a:solidFill>
-            <a:srgbClr val="6A1B9A"/>
-          </a:solidFill>
-          <a:ln>
-            <a:noFill/>
-          </a:ln>
-        </p:spPr>
-        <p:style>
-          <a:lnRef idx="1">
-            <a:schemeClr val="accent1"/>
-          </a:lnRef>
-          <a:fillRef idx="3">
-            <a:schemeClr val="accent1"/>
-          </a:fillRef>
-          <a:effectRef idx="2">
-            <a:schemeClr val="accent1"/>
-          </a:effectRef>
-          <a:fontRef idx="minor">
-            <a:schemeClr val="lt1"/>
-          </a:fontRef>
-        </p:style>
-        <p:txBody>
-          <a:bodyPr rtlCol="0" anchor="ctr" wrap="square"/>
-          <a:lstStyle/>
-          <a:p>
-            <a:pPr algn="ctr">
-              <a:defRPr sz="1000" b="0">
-                <a:solidFill>
-                  <a:srgbClr val="FFFFFF"/>
-                </a:solidFill>
-                <a:latin typeface="Calibri"/>
-              </a:defRPr>
-            </a:pPr>
-            <a:r>
-              <a:t>Solution: PAHD adaptive</a:t>
-            </a:r>
-          </a:p>
-          <a:p>
-            <a:pPr algn="ctr">
-              <a:defRPr sz="1000" b="0">
-                <a:solidFill>
-                  <a:srgbClr val="FFFFFF"/>
-                </a:solidFill>
-                <a:latin typeface="Calibri"/>
-              </a:defRPr>
-            </a:pPr>
-            <a:r>
-              <a:t>method selection</a:t>
+              <a:t>Contributions, discussion, limitations, future work    (S29 – S33)</a:t>
             </a:r>
           </a:p>
         </p:txBody>
@@ -18515,7 +17403,7 @@
       </p:sp>
       <p:pic>
         <p:nvPicPr>
-          <p:cNvPr id="4" name="Picture 3" descr="knu_symbol_white.png"/>
+          <p:cNvPr id="4" name="Picture 3" descr="knu_emblem_official.jpg"/>
           <p:cNvPicPr>
             <a:picLocks noChangeAspect="1"/>
           </p:cNvPicPr>
@@ -18622,8 +17510,8 @@
         </p:nvSpPr>
         <p:spPr>
           <a:xfrm>
-            <a:off x="11430000" y="6528816"/>
-            <a:ext cx="640080" cy="310896"/>
+            <a:off x="10789920" y="6528816"/>
+            <a:ext cx="1280160" cy="310896"/>
           </a:xfrm>
           <a:prstGeom prst="rect">
             <a:avLst/>
@@ -18643,7 +17531,7 @@
               </a:defRPr>
             </a:pPr>
             <a:r>
-              <a:t>20</a:t>
+              <a:t>—— 20</a:t>
             </a:r>
           </a:p>
         </p:txBody>
@@ -19277,7 +18165,7 @@
       </p:sp>
       <p:pic>
         <p:nvPicPr>
-          <p:cNvPr id="4" name="Picture 3" descr="knu_symbol_white.png"/>
+          <p:cNvPr id="4" name="Picture 3" descr="knu_emblem_official.jpg"/>
           <p:cNvPicPr>
             <a:picLocks noChangeAspect="1"/>
           </p:cNvPicPr>
@@ -19384,8 +18272,8 @@
         </p:nvSpPr>
         <p:spPr>
           <a:xfrm>
-            <a:off x="11430000" y="6528816"/>
-            <a:ext cx="640080" cy="310896"/>
+            <a:off x="10789920" y="6528816"/>
+            <a:ext cx="1280160" cy="310896"/>
           </a:xfrm>
           <a:prstGeom prst="rect">
             <a:avLst/>
@@ -19405,7 +18293,7 @@
               </a:defRPr>
             </a:pPr>
             <a:r>
-              <a:t>21</a:t>
+              <a:t>—— 21</a:t>
             </a:r>
           </a:p>
         </p:txBody>
@@ -20179,7 +19067,7 @@
       </p:sp>
       <p:pic>
         <p:nvPicPr>
-          <p:cNvPr id="4" name="Picture 3" descr="knu_symbol_white.png"/>
+          <p:cNvPr id="4" name="Picture 3" descr="knu_emblem_official.jpg"/>
           <p:cNvPicPr>
             <a:picLocks noChangeAspect="1"/>
           </p:cNvPicPr>
@@ -20286,8 +19174,8 @@
         </p:nvSpPr>
         <p:spPr>
           <a:xfrm>
-            <a:off x="11430000" y="6528816"/>
-            <a:ext cx="640080" cy="310896"/>
+            <a:off x="10789920" y="6528816"/>
+            <a:ext cx="1280160" cy="310896"/>
           </a:xfrm>
           <a:prstGeom prst="rect">
             <a:avLst/>
@@ -20307,7 +19195,7 @@
               </a:defRPr>
             </a:pPr>
             <a:r>
-              <a:t>22</a:t>
+              <a:t>—— 22</a:t>
             </a:r>
           </a:p>
         </p:txBody>
@@ -20691,7 +19579,7 @@
       </p:sp>
       <p:pic>
         <p:nvPicPr>
-          <p:cNvPr id="4" name="Picture 3" descr="knu_symbol_white.png"/>
+          <p:cNvPr id="4" name="Picture 3" descr="knu_emblem_official.jpg"/>
           <p:cNvPicPr>
             <a:picLocks noChangeAspect="1"/>
           </p:cNvPicPr>
@@ -20798,8 +19686,8 @@
         </p:nvSpPr>
         <p:spPr>
           <a:xfrm>
-            <a:off x="11430000" y="6528816"/>
-            <a:ext cx="640080" cy="310896"/>
+            <a:off x="10789920" y="6528816"/>
+            <a:ext cx="1280160" cy="310896"/>
           </a:xfrm>
           <a:prstGeom prst="rect">
             <a:avLst/>
@@ -20819,7 +19707,7 @@
               </a:defRPr>
             </a:pPr>
             <a:r>
-              <a:t>23</a:t>
+              <a:t>—— 23</a:t>
             </a:r>
           </a:p>
         </p:txBody>
@@ -21532,7 +20420,7 @@
       </p:sp>
       <p:pic>
         <p:nvPicPr>
-          <p:cNvPr id="4" name="Picture 3" descr="knu_symbol_white.png"/>
+          <p:cNvPr id="4" name="Picture 3" descr="knu_emblem_official.jpg"/>
           <p:cNvPicPr>
             <a:picLocks noChangeAspect="1"/>
           </p:cNvPicPr>
@@ -21639,8 +20527,8 @@
         </p:nvSpPr>
         <p:spPr>
           <a:xfrm>
-            <a:off x="11430000" y="6528816"/>
-            <a:ext cx="640080" cy="310896"/>
+            <a:off x="10789920" y="6528816"/>
+            <a:ext cx="1280160" cy="310896"/>
           </a:xfrm>
           <a:prstGeom prst="rect">
             <a:avLst/>
@@ -21660,7 +20548,7 @@
               </a:defRPr>
             </a:pPr>
             <a:r>
-              <a:t>24</a:t>
+              <a:t>—— 24</a:t>
             </a:r>
           </a:p>
         </p:txBody>
@@ -22972,7 +21860,7 @@
       </p:sp>
       <p:pic>
         <p:nvPicPr>
-          <p:cNvPr id="4" name="Picture 3" descr="knu_symbol_white.png"/>
+          <p:cNvPr id="4" name="Picture 3" descr="knu_emblem_official.jpg"/>
           <p:cNvPicPr>
             <a:picLocks noChangeAspect="1"/>
           </p:cNvPicPr>
@@ -23079,8 +21967,8 @@
         </p:nvSpPr>
         <p:spPr>
           <a:xfrm>
-            <a:off x="11430000" y="6528816"/>
-            <a:ext cx="640080" cy="310896"/>
+            <a:off x="10789920" y="6528816"/>
+            <a:ext cx="1280160" cy="310896"/>
           </a:xfrm>
           <a:prstGeom prst="rect">
             <a:avLst/>
@@ -23100,7 +21988,7 @@
               </a:defRPr>
             </a:pPr>
             <a:r>
-              <a:t>25</a:t>
+              <a:t>—— 25</a:t>
             </a:r>
           </a:p>
         </p:txBody>
@@ -24069,7 +22957,7 @@
       </p:sp>
       <p:pic>
         <p:nvPicPr>
-          <p:cNvPr id="4" name="Picture 3" descr="knu_symbol_white.png"/>
+          <p:cNvPr id="4" name="Picture 3" descr="knu_emblem_official.jpg"/>
           <p:cNvPicPr>
             <a:picLocks noChangeAspect="1"/>
           </p:cNvPicPr>
@@ -24176,8 +23064,8 @@
         </p:nvSpPr>
         <p:spPr>
           <a:xfrm>
-            <a:off x="11430000" y="6528816"/>
-            <a:ext cx="640080" cy="310896"/>
+            <a:off x="10789920" y="6528816"/>
+            <a:ext cx="1280160" cy="310896"/>
           </a:xfrm>
           <a:prstGeom prst="rect">
             <a:avLst/>
@@ -24197,7 +23085,7 @@
               </a:defRPr>
             </a:pPr>
             <a:r>
-              <a:t>26</a:t>
+              <a:t>—— 26</a:t>
             </a:r>
           </a:p>
         </p:txBody>
@@ -25526,7 +24414,7 @@
       </p:sp>
       <p:pic>
         <p:nvPicPr>
-          <p:cNvPr id="4" name="Picture 3" descr="knu_symbol_white.png"/>
+          <p:cNvPr id="4" name="Picture 3" descr="knu_emblem_official.jpg"/>
           <p:cNvPicPr>
             <a:picLocks noChangeAspect="1"/>
           </p:cNvPicPr>
@@ -25633,8 +24521,8 @@
         </p:nvSpPr>
         <p:spPr>
           <a:xfrm>
-            <a:off x="11430000" y="6528816"/>
-            <a:ext cx="640080" cy="310896"/>
+            <a:off x="10789920" y="6528816"/>
+            <a:ext cx="1280160" cy="310896"/>
           </a:xfrm>
           <a:prstGeom prst="rect">
             <a:avLst/>
@@ -25654,7 +24542,7 @@
               </a:defRPr>
             </a:pPr>
             <a:r>
-              <a:t>27</a:t>
+              <a:t>—— 27</a:t>
             </a:r>
           </a:p>
         </p:txBody>
@@ -26349,7 +25237,7 @@
       </p:sp>
       <p:pic>
         <p:nvPicPr>
-          <p:cNvPr id="4" name="Picture 3" descr="knu_symbol_white.png"/>
+          <p:cNvPr id="4" name="Picture 3" descr="knu_emblem_official.jpg"/>
           <p:cNvPicPr>
             <a:picLocks noChangeAspect="1"/>
           </p:cNvPicPr>
@@ -26456,8 +25344,8 @@
         </p:nvSpPr>
         <p:spPr>
           <a:xfrm>
-            <a:off x="11430000" y="6528816"/>
-            <a:ext cx="640080" cy="310896"/>
+            <a:off x="10789920" y="6528816"/>
+            <a:ext cx="1280160" cy="310896"/>
           </a:xfrm>
           <a:prstGeom prst="rect">
             <a:avLst/>
@@ -26477,7 +25365,7 @@
               </a:defRPr>
             </a:pPr>
             <a:r>
-              <a:t>28</a:t>
+              <a:t>—— 28</a:t>
             </a:r>
           </a:p>
         </p:txBody>
@@ -27192,7 +26080,7 @@
       </p:sp>
       <p:pic>
         <p:nvPicPr>
-          <p:cNvPr id="4" name="Picture 3" descr="knu_symbol_white.png"/>
+          <p:cNvPr id="4" name="Picture 3" descr="knu_emblem_official.jpg"/>
           <p:cNvPicPr>
             <a:picLocks noChangeAspect="1"/>
           </p:cNvPicPr>
@@ -27299,8 +26187,8 @@
         </p:nvSpPr>
         <p:spPr>
           <a:xfrm>
-            <a:off x="11430000" y="6528816"/>
-            <a:ext cx="640080" cy="310896"/>
+            <a:off x="10789920" y="6528816"/>
+            <a:ext cx="1280160" cy="310896"/>
           </a:xfrm>
           <a:prstGeom prst="rect">
             <a:avLst/>
@@ -27320,7 +26208,7 @@
               </a:defRPr>
             </a:pPr>
             <a:r>
-              <a:t>29</a:t>
+              <a:t>—— 29</a:t>
             </a:r>
           </a:p>
         </p:txBody>
@@ -28286,7 +27174,7 @@
       </p:sp>
       <p:pic>
         <p:nvPicPr>
-          <p:cNvPr id="4" name="Picture 3" descr="knu_symbol_white.png"/>
+          <p:cNvPr id="4" name="Picture 3" descr="knu_emblem_official.jpg"/>
           <p:cNvPicPr>
             <a:picLocks noChangeAspect="1"/>
           </p:cNvPicPr>
@@ -28393,8 +27281,8 @@
         </p:nvSpPr>
         <p:spPr>
           <a:xfrm>
-            <a:off x="11430000" y="6528816"/>
-            <a:ext cx="640080" cy="310896"/>
+            <a:off x="10789920" y="6528816"/>
+            <a:ext cx="1280160" cy="310896"/>
           </a:xfrm>
           <a:prstGeom prst="rect">
             <a:avLst/>
@@ -28414,7 +27302,7 @@
               </a:defRPr>
             </a:pPr>
             <a:r>
-              <a:t>3</a:t>
+              <a:t>—— 3</a:t>
             </a:r>
           </a:p>
         </p:txBody>
@@ -28428,7 +27316,7 @@
         <p:spPr>
           <a:xfrm>
             <a:off x="548640" y="1097280"/>
-            <a:ext cx="5303520" cy="3200400"/>
+            <a:ext cx="5303520" cy="4937760"/>
           </a:xfrm>
           <a:prstGeom prst="roundRect">
             <a:avLst/>
@@ -28473,7 +27361,7 @@
         <p:spPr>
           <a:xfrm>
             <a:off x="548640" y="1097280"/>
-            <a:ext cx="91440" cy="3200400"/>
+            <a:ext cx="91440" cy="4937760"/>
           </a:xfrm>
           <a:prstGeom prst="rect">
             <a:avLst/>
@@ -28658,87 +27546,30 @@
           </a:p>
         </p:txBody>
       </p:sp>
-      <p:sp>
-        <p:nvSpPr>
-          <p:cNvPr id="13" name="Rounded Rectangle 12"/>
-          <p:cNvSpPr/>
-          <p:nvPr/>
-        </p:nvSpPr>
-        <p:spPr>
-          <a:xfrm>
-            <a:off x="914400" y="3108960"/>
-            <a:ext cx="4389120" cy="1097280"/>
-          </a:xfrm>
-          <a:prstGeom prst="roundRect">
-            <a:avLst/>
-          </a:prstGeom>
-          <a:solidFill>
-            <a:srgbClr val="F0F0F0"/>
-          </a:solidFill>
-          <a:ln w="25400">
-            <a:solidFill>
-              <a:srgbClr val="999999"/>
-            </a:solidFill>
-          </a:ln>
-        </p:spPr>
-        <p:style>
-          <a:lnRef idx="1">
-            <a:schemeClr val="accent1"/>
-          </a:lnRef>
-          <a:fillRef idx="3">
-            <a:schemeClr val="accent1"/>
-          </a:fillRef>
-          <a:effectRef idx="2">
-            <a:schemeClr val="accent1"/>
-          </a:effectRef>
-          <a:fontRef idx="minor">
-            <a:schemeClr val="lt1"/>
-          </a:fontRef>
-        </p:style>
-        <p:txBody>
-          <a:bodyPr rtlCol="0" anchor="ctr" wrap="square"/>
-          <a:lstStyle/>
-          <a:p>
-            <a:pPr algn="ctr">
-              <a:defRPr sz="1100" b="0">
-                <a:solidFill>
-                  <a:srgbClr val="888888"/>
-                </a:solidFill>
-                <a:latin typeface="Calibri"/>
-              </a:defRPr>
-            </a:pPr>
-            <a:r>
-              <a:t>[Image Placeholder]</a:t>
-            </a:r>
-          </a:p>
-          <a:p>
-            <a:pPr algn="ctr">
-              <a:defRPr sz="1100" b="0">
-                <a:solidFill>
-                  <a:srgbClr val="888888"/>
-                </a:solidFill>
-                <a:latin typeface="Calibri"/>
-              </a:defRPr>
-            </a:pPr>
-            <a:r>
-              <a:t>MOSD Key Figure</a:t>
-            </a:r>
-          </a:p>
-          <a:p>
-            <a:pPr algn="ctr">
-              <a:defRPr sz="1100" b="0">
-                <a:solidFill>
-                  <a:srgbClr val="888888"/>
-                </a:solidFill>
-                <a:latin typeface="Calibri"/>
-              </a:defRPr>
-            </a:pPr>
-            <a:r>
-              <a:t>(To be inserted)</a:t>
-            </a:r>
-          </a:p>
-        </p:txBody>
-      </p:sp>
+      <p:pic>
+        <p:nvPicPr>
+          <p:cNvPr id="13" name="Picture 12" descr="hotspot_score_comparison.png"/>
+          <p:cNvPicPr>
+            <a:picLocks noChangeAspect="1"/>
+          </p:cNvPicPr>
+          <p:nvPr/>
+        </p:nvPicPr>
+        <p:blipFill>
+          <a:blip r:embed="rId3"/>
+          <a:stretch>
+            <a:fillRect/>
+          </a:stretch>
+        </p:blipFill>
+        <p:spPr>
+          <a:xfrm>
+            <a:off x="914400" y="3200400"/>
+            <a:ext cx="4389120" cy="2743200"/>
+          </a:xfrm>
+          <a:prstGeom prst="rect">
+            <a:avLst/>
+          </a:prstGeom>
+        </p:spPr>
+      </p:pic>
       <p:sp>
         <p:nvSpPr>
           <p:cNvPr id="14" name="Rounded Rectangle 13"/>
@@ -28748,7 +27579,7 @@
         <p:spPr>
           <a:xfrm>
             <a:off x="6309360" y="1097280"/>
-            <a:ext cx="5303520" cy="3200400"/>
+            <a:ext cx="5303520" cy="4937760"/>
           </a:xfrm>
           <a:prstGeom prst="roundRect">
             <a:avLst/>
@@ -28793,7 +27624,7 @@
         <p:spPr>
           <a:xfrm>
             <a:off x="6309360" y="1097280"/>
-            <a:ext cx="91440" cy="3200400"/>
+            <a:ext cx="91440" cy="4937760"/>
           </a:xfrm>
           <a:prstGeom prst="rect">
             <a:avLst/>
@@ -28978,142 +27809,30 @@
           </a:p>
         </p:txBody>
       </p:sp>
-      <p:sp>
-        <p:nvSpPr>
-          <p:cNvPr id="19" name="Rounded Rectangle 18"/>
-          <p:cNvSpPr/>
-          <p:nvPr/>
-        </p:nvSpPr>
-        <p:spPr>
-          <a:xfrm>
-            <a:off x="6675120" y="3108960"/>
-            <a:ext cx="4389120" cy="1097280"/>
-          </a:xfrm>
-          <a:prstGeom prst="roundRect">
-            <a:avLst/>
-          </a:prstGeom>
-          <a:solidFill>
-            <a:srgbClr val="F0F0F0"/>
-          </a:solidFill>
-          <a:ln w="25400">
-            <a:solidFill>
-              <a:srgbClr val="999999"/>
-            </a:solidFill>
-          </a:ln>
-        </p:spPr>
-        <p:style>
-          <a:lnRef idx="1">
-            <a:schemeClr val="accent1"/>
-          </a:lnRef>
-          <a:fillRef idx="3">
-            <a:schemeClr val="accent1"/>
-          </a:fillRef>
-          <a:effectRef idx="2">
-            <a:schemeClr val="accent1"/>
-          </a:effectRef>
-          <a:fontRef idx="minor">
-            <a:schemeClr val="lt1"/>
-          </a:fontRef>
-        </p:style>
-        <p:txBody>
-          <a:bodyPr rtlCol="0" anchor="ctr" wrap="square"/>
-          <a:lstStyle/>
-          <a:p>
-            <a:pPr algn="ctr">
-              <a:defRPr sz="1100" b="0">
-                <a:solidFill>
-                  <a:srgbClr val="888888"/>
-                </a:solidFill>
-                <a:latin typeface="Calibri"/>
-              </a:defRPr>
-            </a:pPr>
-            <a:r>
-              <a:t>[Image Placeholder]</a:t>
-            </a:r>
-          </a:p>
-          <a:p>
-            <a:pPr algn="ctr">
-              <a:defRPr sz="1100" b="0">
-                <a:solidFill>
-                  <a:srgbClr val="888888"/>
-                </a:solidFill>
-                <a:latin typeface="Calibri"/>
-              </a:defRPr>
-            </a:pPr>
-            <a:r>
-              <a:t>MutClust Key Figure</a:t>
-            </a:r>
-          </a:p>
-          <a:p>
-            <a:pPr algn="ctr">
-              <a:defRPr sz="1100" b="0">
-                <a:solidFill>
-                  <a:srgbClr val="888888"/>
-                </a:solidFill>
-                <a:latin typeface="Calibri"/>
-              </a:defRPr>
-            </a:pPr>
-            <a:r>
-              <a:t>(To be inserted)</a:t>
-            </a:r>
-          </a:p>
-        </p:txBody>
-      </p:sp>
-      <p:sp>
-        <p:nvSpPr>
-          <p:cNvPr id="20" name="Rounded Rectangle 19"/>
-          <p:cNvSpPr/>
-          <p:nvPr/>
-        </p:nvSpPr>
-        <p:spPr>
-          <a:xfrm>
-            <a:off x="1371600" y="4663440"/>
-            <a:ext cx="9418320" cy="731520"/>
-          </a:xfrm>
-          <a:prstGeom prst="roundRect">
-            <a:avLst/>
-          </a:prstGeom>
-          <a:solidFill>
-            <a:srgbClr val="1B2A4A"/>
-          </a:solidFill>
-          <a:ln w="12700">
-            <a:solidFill>
-              <a:srgbClr val="E0E0E0"/>
-            </a:solidFill>
-          </a:ln>
-        </p:spPr>
-        <p:style>
-          <a:lnRef idx="1">
-            <a:schemeClr val="accent1"/>
-          </a:lnRef>
-          <a:fillRef idx="3">
-            <a:schemeClr val="accent1"/>
-          </a:fillRef>
-          <a:effectRef idx="2">
-            <a:schemeClr val="accent1"/>
-          </a:effectRef>
-          <a:fontRef idx="minor">
-            <a:schemeClr val="lt1"/>
-          </a:fontRef>
-        </p:style>
-        <p:txBody>
-          <a:bodyPr rtlCol="0" anchor="ctr" wrap="square"/>
-          <a:lstStyle/>
-          <a:p>
-            <a:pPr algn="ctr">
-              <a:defRPr sz="1500" b="1">
-                <a:solidFill>
-                  <a:srgbClr val="FFFFFF"/>
-                </a:solidFill>
-                <a:latin typeface="Calibri"/>
-              </a:defRPr>
-            </a:pPr>
-            <a:r>
-              <a:t>These gaps motivate MutBench: systematic cross-pathogen benchmarking</a:t>
-            </a:r>
-          </a:p>
-        </p:txBody>
-      </p:sp>
+      <p:pic>
+        <p:nvPicPr>
+          <p:cNvPr id="19" name="Picture 18" descr="method_comparison.png"/>
+          <p:cNvPicPr>
+            <a:picLocks noChangeAspect="1"/>
+          </p:cNvPicPr>
+          <p:nvPr/>
+        </p:nvPicPr>
+        <p:blipFill>
+          <a:blip r:embed="rId4"/>
+          <a:stretch>
+            <a:fillRect/>
+          </a:stretch>
+        </p:blipFill>
+        <p:spPr>
+          <a:xfrm>
+            <a:off x="6675120" y="3200400"/>
+            <a:ext cx="4389120" cy="2743200"/>
+          </a:xfrm>
+          <a:prstGeom prst="rect">
+            <a:avLst/>
+          </a:prstGeom>
+        </p:spPr>
+      </p:pic>
     </p:spTree>
   </p:cSld>
   <p:clrMapOvr>
@@ -29211,7 +27930,7 @@
       </p:sp>
       <p:pic>
         <p:nvPicPr>
-          <p:cNvPr id="4" name="Picture 3" descr="knu_symbol_white.png"/>
+          <p:cNvPr id="4" name="Picture 3" descr="knu_emblem_official.jpg"/>
           <p:cNvPicPr>
             <a:picLocks noChangeAspect="1"/>
           </p:cNvPicPr>
@@ -29318,8 +28037,8 @@
         </p:nvSpPr>
         <p:spPr>
           <a:xfrm>
-            <a:off x="11430000" y="6528816"/>
-            <a:ext cx="640080" cy="310896"/>
+            <a:off x="10789920" y="6528816"/>
+            <a:ext cx="1280160" cy="310896"/>
           </a:xfrm>
           <a:prstGeom prst="rect">
             <a:avLst/>
@@ -29339,7 +28058,7 @@
               </a:defRPr>
             </a:pPr>
             <a:r>
-              <a:t>30</a:t>
+              <a:t>—— 30</a:t>
             </a:r>
           </a:p>
         </p:txBody>
@@ -29909,7 +28628,7 @@
       </p:sp>
       <p:pic>
         <p:nvPicPr>
-          <p:cNvPr id="4" name="Picture 3" descr="knu_symbol_white.png"/>
+          <p:cNvPr id="4" name="Picture 3" descr="knu_emblem_official.jpg"/>
           <p:cNvPicPr>
             <a:picLocks noChangeAspect="1"/>
           </p:cNvPicPr>
@@ -30016,8 +28735,8 @@
         </p:nvSpPr>
         <p:spPr>
           <a:xfrm>
-            <a:off x="11430000" y="6528816"/>
-            <a:ext cx="640080" cy="310896"/>
+            <a:off x="10789920" y="6528816"/>
+            <a:ext cx="1280160" cy="310896"/>
           </a:xfrm>
           <a:prstGeom prst="rect">
             <a:avLst/>
@@ -30037,7 +28756,7 @@
               </a:defRPr>
             </a:pPr>
             <a:r>
-              <a:t>31</a:t>
+              <a:t>—— 31</a:t>
             </a:r>
           </a:p>
         </p:txBody>
@@ -31373,7 +30092,7 @@
       </p:sp>
       <p:pic>
         <p:nvPicPr>
-          <p:cNvPr id="4" name="Picture 3" descr="knu_symbol_white.png"/>
+          <p:cNvPr id="4" name="Picture 3" descr="knu_emblem_official.jpg"/>
           <p:cNvPicPr>
             <a:picLocks noChangeAspect="1"/>
           </p:cNvPicPr>
@@ -31480,8 +30199,8 @@
         </p:nvSpPr>
         <p:spPr>
           <a:xfrm>
-            <a:off x="11430000" y="6528816"/>
-            <a:ext cx="640080" cy="310896"/>
+            <a:off x="10789920" y="6528816"/>
+            <a:ext cx="1280160" cy="310896"/>
           </a:xfrm>
           <a:prstGeom prst="rect">
             <a:avLst/>
@@ -31501,7 +30220,7 @@
               </a:defRPr>
             </a:pPr>
             <a:r>
-              <a:t>32</a:t>
+              <a:t>—— 32</a:t>
             </a:r>
           </a:p>
         </p:txBody>
@@ -32365,7 +31084,7 @@
       </p:sp>
       <p:pic>
         <p:nvPicPr>
-          <p:cNvPr id="3" name="Picture 2" descr="knu_symbol_white.png"/>
+          <p:cNvPr id="3" name="Picture 2" descr="knu_emblem_official.jpg"/>
           <p:cNvPicPr>
             <a:picLocks noChangeAspect="1"/>
           </p:cNvPicPr>
@@ -32813,14 +31532,14 @@
               </a:defRPr>
             </a:pPr>
             <a:r>
-              <a:t>The Central Dogma: DNA -&gt; RNA -&gt; Protein</a:t>
+              <a:t>The Central Dogma: DNA → RNA → Protein</a:t>
             </a:r>
           </a:p>
         </p:txBody>
       </p:sp>
       <p:pic>
         <p:nvPicPr>
-          <p:cNvPr id="4" name="Picture 3" descr="knu_symbol_white.png"/>
+          <p:cNvPr id="4" name="Picture 3" descr="knu_emblem_official.jpg"/>
           <p:cNvPicPr>
             <a:picLocks noChangeAspect="1"/>
           </p:cNvPicPr>
@@ -32927,8 +31646,8 @@
         </p:nvSpPr>
         <p:spPr>
           <a:xfrm>
-            <a:off x="11430000" y="6528816"/>
-            <a:ext cx="640080" cy="310896"/>
+            <a:off x="10789920" y="6528816"/>
+            <a:ext cx="1280160" cy="310896"/>
           </a:xfrm>
           <a:prstGeom prst="rect">
             <a:avLst/>
@@ -32948,21 +31667,89 @@
               </a:defRPr>
             </a:pPr>
             <a:r>
-              <a:t>4</a:t>
-            </a:r>
-          </a:p>
-        </p:txBody>
-      </p:sp>
-      <p:sp>
-        <p:nvSpPr>
-          <p:cNvPr id="8" name="TextBox 7"/>
+              <a:t>—— 4</a:t>
+            </a:r>
+          </a:p>
+        </p:txBody>
+      </p:sp>
+      <p:sp>
+        <p:nvSpPr>
+          <p:cNvPr id="8" name="Rounded Rectangle 7"/>
+          <p:cNvSpPr/>
+          <p:nvPr/>
+        </p:nvSpPr>
+        <p:spPr>
+          <a:xfrm>
+            <a:off x="2743200" y="1005840"/>
+            <a:ext cx="6675120" cy="2194560"/>
+          </a:xfrm>
+          <a:prstGeom prst="roundRect">
+            <a:avLst/>
+          </a:prstGeom>
+          <a:solidFill>
+            <a:srgbClr val="F0F0F0"/>
+          </a:solidFill>
+          <a:ln w="25400">
+            <a:solidFill>
+              <a:srgbClr val="999999"/>
+            </a:solidFill>
+          </a:ln>
+        </p:spPr>
+        <p:style>
+          <a:lnRef idx="1">
+            <a:schemeClr val="accent1"/>
+          </a:lnRef>
+          <a:fillRef idx="3">
+            <a:schemeClr val="accent1"/>
+          </a:fillRef>
+          <a:effectRef idx="2">
+            <a:schemeClr val="accent1"/>
+          </a:effectRef>
+          <a:fontRef idx="minor">
+            <a:schemeClr val="lt1"/>
+          </a:fontRef>
+        </p:style>
+        <p:txBody>
+          <a:bodyPr rtlCol="0" anchor="ctr" wrap="square"/>
+          <a:lstStyle/>
+          <a:p>
+            <a:pPr algn="ctr">
+              <a:defRPr sz="1100" b="0">
+                <a:solidFill>
+                  <a:srgbClr val="888888"/>
+                </a:solidFill>
+                <a:latin typeface="Calibri"/>
+              </a:defRPr>
+            </a:pPr>
+            <a:r>
+              <a:t>[Central Dogma overview diagram]</a:t>
+            </a:r>
+          </a:p>
+          <a:p>
+            <a:pPr algn="ctr">
+              <a:defRPr sz="1100" b="0">
+                <a:solidFill>
+                  <a:srgbClr val="888888"/>
+                </a:solidFill>
+                <a:latin typeface="Calibri"/>
+              </a:defRPr>
+            </a:pPr>
+            <a:r>
+              <a:t>DNA → Transcription → mRNA → Translation → Protein</a:t>
+            </a:r>
+          </a:p>
+        </p:txBody>
+      </p:sp>
+      <p:sp>
+        <p:nvSpPr>
+          <p:cNvPr id="9" name="TextBox 8"/>
           <p:cNvSpPr txBox="1"/>
           <p:nvPr/>
         </p:nvSpPr>
         <p:spPr>
           <a:xfrm>
             <a:off x="548640" y="1097280"/>
-            <a:ext cx="5303520" cy="365760"/>
+            <a:ext cx="2011680" cy="365760"/>
           </a:xfrm>
           <a:prstGeom prst="rect">
             <a:avLst/>
@@ -32982,21 +31769,21 @@
               </a:defRPr>
             </a:pPr>
             <a:r>
-              <a:t>Key Biological Terms</a:t>
-            </a:r>
-          </a:p>
-        </p:txBody>
-      </p:sp>
-      <p:sp>
-        <p:nvSpPr>
-          <p:cNvPr id="9" name="Rounded Rectangle 8"/>
+              <a:t>Key Terms</a:t>
+            </a:r>
+          </a:p>
+        </p:txBody>
+      </p:sp>
+      <p:sp>
+        <p:nvSpPr>
+          <p:cNvPr id="10" name="Rounded Rectangle 9"/>
           <p:cNvSpPr/>
           <p:nvPr/>
         </p:nvSpPr>
         <p:spPr>
           <a:xfrm>
-            <a:off x="548640" y="1600200"/>
-            <a:ext cx="5303520" cy="960120"/>
+            <a:off x="548640" y="3383280"/>
+            <a:ext cx="4754880" cy="731520"/>
           </a:xfrm>
           <a:prstGeom prst="roundRect">
             <a:avLst/>
@@ -33034,14 +31821,14 @@
       </p:sp>
       <p:sp>
         <p:nvSpPr>
-          <p:cNvPr id="10" name="TextBox 9"/>
-          <p:cNvSpPr txBox="1"/>
-          <p:nvPr/>
-        </p:nvSpPr>
-        <p:spPr>
-          <a:xfrm>
-            <a:off x="731520" y="1691640"/>
-            <a:ext cx="1371600" cy="320040"/>
+          <p:cNvPr id="11" name="TextBox 10"/>
+          <p:cNvSpPr txBox="1"/>
+          <p:nvPr/>
+        </p:nvSpPr>
+        <p:spPr>
+          <a:xfrm>
+            <a:off x="731520" y="3429000"/>
+            <a:ext cx="1280160" cy="274320"/>
           </a:xfrm>
           <a:prstGeom prst="rect">
             <a:avLst/>
@@ -33053,7 +31840,7 @@
           <a:lstStyle/>
           <a:p>
             <a:pPr algn="l">
-              <a:defRPr sz="1300" b="1">
+              <a:defRPr sz="1200" b="1">
                 <a:solidFill>
                   <a:srgbClr val="0D7377"/>
                 </a:solidFill>
@@ -33068,14 +31855,14 @@
       </p:sp>
       <p:sp>
         <p:nvSpPr>
-          <p:cNvPr id="11" name="TextBox 10"/>
-          <p:cNvSpPr txBox="1"/>
-          <p:nvPr/>
-        </p:nvSpPr>
-        <p:spPr>
-          <a:xfrm>
-            <a:off x="731520" y="2011680"/>
-            <a:ext cx="4937760" cy="502920"/>
+          <p:cNvPr id="12" name="TextBox 11"/>
+          <p:cNvSpPr txBox="1"/>
+          <p:nvPr/>
+        </p:nvSpPr>
+        <p:spPr>
+          <a:xfrm>
+            <a:off x="731520" y="3703320"/>
+            <a:ext cx="3474720" cy="365760"/>
           </a:xfrm>
           <a:prstGeom prst="rect">
             <a:avLst/>
@@ -33087,7 +31874,7 @@
           <a:lstStyle/>
           <a:p>
             <a:pPr algn="l">
-              <a:defRPr sz="1000" b="0">
+              <a:defRPr sz="900" b="0">
                 <a:solidFill>
                   <a:srgbClr val="333333"/>
                 </a:solidFill>
@@ -33095,12 +31882,12 @@
               </a:defRPr>
             </a:pPr>
             <a:r>
-              <a:t>The complete genetic information of an organism,</a:t>
-            </a:r>
-          </a:p>
-          <a:p>
-            <a:pPr algn="l">
-              <a:defRPr sz="1000" b="0">
+              <a:t>Complete genetic information,</a:t>
+            </a:r>
+          </a:p>
+          <a:p>
+            <a:pPr algn="l">
+              <a:defRPr sz="900" b="0">
                 <a:solidFill>
                   <a:srgbClr val="333333"/>
                 </a:solidFill>
@@ -33108,21 +31895,76 @@
               </a:defRPr>
             </a:pPr>
             <a:r>
-              <a:t>encoded as a DNA or RNA sequence.</a:t>
-            </a:r>
-          </a:p>
-        </p:txBody>
-      </p:sp>
-      <p:sp>
-        <p:nvSpPr>
-          <p:cNvPr id="12" name="Rounded Rectangle 11"/>
+              <a:t>encoded as DNA or RNA.</a:t>
+            </a:r>
+          </a:p>
+        </p:txBody>
+      </p:sp>
+      <p:sp>
+        <p:nvSpPr>
+          <p:cNvPr id="13" name="Rounded Rectangle 12"/>
           <p:cNvSpPr/>
           <p:nvPr/>
         </p:nvSpPr>
         <p:spPr>
           <a:xfrm>
-            <a:off x="548640" y="2697480"/>
-            <a:ext cx="5303520" cy="960120"/>
+            <a:off x="4297680" y="3429000"/>
+            <a:ext cx="914400" cy="640080"/>
+          </a:xfrm>
+          <a:prstGeom prst="roundRect">
+            <a:avLst/>
+          </a:prstGeom>
+          <a:solidFill>
+            <a:srgbClr val="F0F0F0"/>
+          </a:solidFill>
+          <a:ln w="25400">
+            <a:solidFill>
+              <a:srgbClr val="999999"/>
+            </a:solidFill>
+          </a:ln>
+        </p:spPr>
+        <p:style>
+          <a:lnRef idx="1">
+            <a:schemeClr val="accent1"/>
+          </a:lnRef>
+          <a:fillRef idx="3">
+            <a:schemeClr val="accent1"/>
+          </a:fillRef>
+          <a:effectRef idx="2">
+            <a:schemeClr val="accent1"/>
+          </a:effectRef>
+          <a:fontRef idx="minor">
+            <a:schemeClr val="lt1"/>
+          </a:fontRef>
+        </p:style>
+        <p:txBody>
+          <a:bodyPr rtlCol="0" anchor="ctr" wrap="square"/>
+          <a:lstStyle/>
+          <a:p>
+            <a:pPr algn="ctr">
+              <a:defRPr sz="1100" b="0">
+                <a:solidFill>
+                  <a:srgbClr val="888888"/>
+                </a:solidFill>
+                <a:latin typeface="Calibri"/>
+              </a:defRPr>
+            </a:pPr>
+            <a:r>
+              <a:t>[DNA double helix image]</a:t>
+            </a:r>
+          </a:p>
+        </p:txBody>
+      </p:sp>
+      <p:sp>
+        <p:nvSpPr>
+          <p:cNvPr id="14" name="Rounded Rectangle 13"/>
+          <p:cNvSpPr/>
+          <p:nvPr/>
+        </p:nvSpPr>
+        <p:spPr>
+          <a:xfrm>
+            <a:off x="548640" y="4206240"/>
+            <a:ext cx="4754880" cy="731520"/>
           </a:xfrm>
           <a:prstGeom prst="roundRect">
             <a:avLst/>
@@ -33160,14 +32002,14 @@
       </p:sp>
       <p:sp>
         <p:nvSpPr>
-          <p:cNvPr id="13" name="TextBox 12"/>
-          <p:cNvSpPr txBox="1"/>
-          <p:nvPr/>
-        </p:nvSpPr>
-        <p:spPr>
-          <a:xfrm>
-            <a:off x="731520" y="2788920"/>
-            <a:ext cx="1371600" cy="320040"/>
+          <p:cNvPr id="15" name="TextBox 14"/>
+          <p:cNvSpPr txBox="1"/>
+          <p:nvPr/>
+        </p:nvSpPr>
+        <p:spPr>
+          <a:xfrm>
+            <a:off x="731520" y="4251960"/>
+            <a:ext cx="1280160" cy="274320"/>
           </a:xfrm>
           <a:prstGeom prst="rect">
             <a:avLst/>
@@ -33179,7 +32021,7 @@
           <a:lstStyle/>
           <a:p>
             <a:pPr algn="l">
-              <a:defRPr sz="1300" b="1">
+              <a:defRPr sz="1200" b="1">
                 <a:solidFill>
                   <a:srgbClr val="0D7377"/>
                 </a:solidFill>
@@ -33194,14 +32036,14 @@
       </p:sp>
       <p:sp>
         <p:nvSpPr>
-          <p:cNvPr id="14" name="TextBox 13"/>
-          <p:cNvSpPr txBox="1"/>
-          <p:nvPr/>
-        </p:nvSpPr>
-        <p:spPr>
-          <a:xfrm>
-            <a:off x="731520" y="3108960"/>
-            <a:ext cx="4937760" cy="502920"/>
+          <p:cNvPr id="16" name="TextBox 15"/>
+          <p:cNvSpPr txBox="1"/>
+          <p:nvPr/>
+        </p:nvSpPr>
+        <p:spPr>
+          <a:xfrm>
+            <a:off x="731520" y="4526280"/>
+            <a:ext cx="3474720" cy="365760"/>
           </a:xfrm>
           <a:prstGeom prst="rect">
             <a:avLst/>
@@ -33213,7 +32055,7 @@
           <a:lstStyle/>
           <a:p>
             <a:pPr algn="l">
-              <a:defRPr sz="1000" b="0">
+              <a:defRPr sz="900" b="0">
                 <a:solidFill>
                   <a:srgbClr val="333333"/>
                 </a:solidFill>
@@ -33221,12 +32063,12 @@
               </a:defRPr>
             </a:pPr>
             <a:r>
-              <a:t>A segment of the genome that encodes a functional</a:t>
-            </a:r>
-          </a:p>
-          <a:p>
-            <a:pPr algn="l">
-              <a:defRPr sz="1000" b="0">
+              <a:t>Segment encoding a functional</a:t>
+            </a:r>
+          </a:p>
+          <a:p>
+            <a:pPr algn="l">
+              <a:defRPr sz="900" b="0">
                 <a:solidFill>
                   <a:srgbClr val="333333"/>
                 </a:solidFill>
@@ -33241,14 +32083,69 @@
       </p:sp>
       <p:sp>
         <p:nvSpPr>
-          <p:cNvPr id="15" name="Rounded Rectangle 14"/>
+          <p:cNvPr id="17" name="Rounded Rectangle 16"/>
           <p:cNvSpPr/>
           <p:nvPr/>
         </p:nvSpPr>
         <p:spPr>
           <a:xfrm>
-            <a:off x="548640" y="3794760"/>
-            <a:ext cx="5303520" cy="960120"/>
+            <a:off x="4297680" y="4251960"/>
+            <a:ext cx="914400" cy="640080"/>
+          </a:xfrm>
+          <a:prstGeom prst="roundRect">
+            <a:avLst/>
+          </a:prstGeom>
+          <a:solidFill>
+            <a:srgbClr val="F0F0F0"/>
+          </a:solidFill>
+          <a:ln w="25400">
+            <a:solidFill>
+              <a:srgbClr val="999999"/>
+            </a:solidFill>
+          </a:ln>
+        </p:spPr>
+        <p:style>
+          <a:lnRef idx="1">
+            <a:schemeClr val="accent1"/>
+          </a:lnRef>
+          <a:fillRef idx="3">
+            <a:schemeClr val="accent1"/>
+          </a:fillRef>
+          <a:effectRef idx="2">
+            <a:schemeClr val="accent1"/>
+          </a:effectRef>
+          <a:fontRef idx="minor">
+            <a:schemeClr val="lt1"/>
+          </a:fontRef>
+        </p:style>
+        <p:txBody>
+          <a:bodyPr rtlCol="0" anchor="ctr" wrap="square"/>
+          <a:lstStyle/>
+          <a:p>
+            <a:pPr algn="ctr">
+              <a:defRPr sz="1100" b="0">
+                <a:solidFill>
+                  <a:srgbClr val="888888"/>
+                </a:solidFill>
+                <a:latin typeface="Calibri"/>
+              </a:defRPr>
+            </a:pPr>
+            <a:r>
+              <a:t>[Gene segment image]</a:t>
+            </a:r>
+          </a:p>
+        </p:txBody>
+      </p:sp>
+      <p:sp>
+        <p:nvSpPr>
+          <p:cNvPr id="18" name="Rounded Rectangle 17"/>
+          <p:cNvSpPr/>
+          <p:nvPr/>
+        </p:nvSpPr>
+        <p:spPr>
+          <a:xfrm>
+            <a:off x="548640" y="5029200"/>
+            <a:ext cx="4754880" cy="731520"/>
           </a:xfrm>
           <a:prstGeom prst="roundRect">
             <a:avLst/>
@@ -33286,14 +32183,14 @@
       </p:sp>
       <p:sp>
         <p:nvSpPr>
-          <p:cNvPr id="16" name="TextBox 15"/>
-          <p:cNvSpPr txBox="1"/>
-          <p:nvPr/>
-        </p:nvSpPr>
-        <p:spPr>
-          <a:xfrm>
-            <a:off x="731520" y="3886200"/>
-            <a:ext cx="1371600" cy="320040"/>
+          <p:cNvPr id="19" name="TextBox 18"/>
+          <p:cNvSpPr txBox="1"/>
+          <p:nvPr/>
+        </p:nvSpPr>
+        <p:spPr>
+          <a:xfrm>
+            <a:off x="731520" y="5074920"/>
+            <a:ext cx="1280160" cy="274320"/>
           </a:xfrm>
           <a:prstGeom prst="rect">
             <a:avLst/>
@@ -33305,7 +32202,7 @@
           <a:lstStyle/>
           <a:p>
             <a:pPr algn="l">
-              <a:defRPr sz="1300" b="1">
+              <a:defRPr sz="1200" b="1">
                 <a:solidFill>
                   <a:srgbClr val="0D7377"/>
                 </a:solidFill>
@@ -33320,14 +32217,14 @@
       </p:sp>
       <p:sp>
         <p:nvSpPr>
-          <p:cNvPr id="17" name="TextBox 16"/>
-          <p:cNvSpPr txBox="1"/>
-          <p:nvPr/>
-        </p:nvSpPr>
-        <p:spPr>
-          <a:xfrm>
-            <a:off x="731520" y="4206240"/>
-            <a:ext cx="4937760" cy="502920"/>
+          <p:cNvPr id="20" name="TextBox 19"/>
+          <p:cNvSpPr txBox="1"/>
+          <p:nvPr/>
+        </p:nvSpPr>
+        <p:spPr>
+          <a:xfrm>
+            <a:off x="731520" y="5349240"/>
+            <a:ext cx="3474720" cy="365760"/>
           </a:xfrm>
           <a:prstGeom prst="rect">
             <a:avLst/>
@@ -33339,7 +32236,7 @@
           <a:lstStyle/>
           <a:p>
             <a:pPr algn="l">
-              <a:defRPr sz="1000" b="0">
+              <a:defRPr sz="900" b="0">
                 <a:solidFill>
                   <a:srgbClr val="333333"/>
                 </a:solidFill>
@@ -33347,34 +32244,76 @@
               </a:defRPr>
             </a:pPr>
             <a:r>
-              <a:t>The building blocks of DNA/RNA: Adenine (A),</a:t>
-            </a:r>
-          </a:p>
-          <a:p>
-            <a:pPr algn="l">
-              <a:defRPr sz="1000" b="0">
-                <a:solidFill>
-                  <a:srgbClr val="333333"/>
-                </a:solidFill>
-                <a:latin typeface="Calibri"/>
-              </a:defRPr>
-            </a:pPr>
-            <a:r>
-              <a:t>Thymine (T)/Uracil (U), Guanine (G), Cytosine (C).</a:t>
-            </a:r>
-          </a:p>
-        </p:txBody>
-      </p:sp>
-      <p:sp>
-        <p:nvSpPr>
-          <p:cNvPr id="18" name="Rounded Rectangle 17"/>
+              <a:t>Building blocks: A, T/U, G, C.</a:t>
+            </a:r>
+          </a:p>
+        </p:txBody>
+      </p:sp>
+      <p:sp>
+        <p:nvSpPr>
+          <p:cNvPr id="21" name="Rounded Rectangle 20"/>
           <p:cNvSpPr/>
           <p:nvPr/>
         </p:nvSpPr>
         <p:spPr>
           <a:xfrm>
-            <a:off x="548640" y="4892040"/>
-            <a:ext cx="5303520" cy="960120"/>
+            <a:off x="4297680" y="5074920"/>
+            <a:ext cx="914400" cy="640080"/>
+          </a:xfrm>
+          <a:prstGeom prst="roundRect">
+            <a:avLst/>
+          </a:prstGeom>
+          <a:solidFill>
+            <a:srgbClr val="F0F0F0"/>
+          </a:solidFill>
+          <a:ln w="25400">
+            <a:solidFill>
+              <a:srgbClr val="999999"/>
+            </a:solidFill>
+          </a:ln>
+        </p:spPr>
+        <p:style>
+          <a:lnRef idx="1">
+            <a:schemeClr val="accent1"/>
+          </a:lnRef>
+          <a:fillRef idx="3">
+            <a:schemeClr val="accent1"/>
+          </a:fillRef>
+          <a:effectRef idx="2">
+            <a:schemeClr val="accent1"/>
+          </a:effectRef>
+          <a:fontRef idx="minor">
+            <a:schemeClr val="lt1"/>
+          </a:fontRef>
+        </p:style>
+        <p:txBody>
+          <a:bodyPr rtlCol="0" anchor="ctr" wrap="square"/>
+          <a:lstStyle/>
+          <a:p>
+            <a:pPr algn="ctr">
+              <a:defRPr sz="1100" b="0">
+                <a:solidFill>
+                  <a:srgbClr val="888888"/>
+                </a:solidFill>
+                <a:latin typeface="Calibri"/>
+              </a:defRPr>
+            </a:pPr>
+            <a:r>
+              <a:t>[Nucleotide structure image]</a:t>
+            </a:r>
+          </a:p>
+        </p:txBody>
+      </p:sp>
+      <p:sp>
+        <p:nvSpPr>
+          <p:cNvPr id="22" name="Rounded Rectangle 21"/>
+          <p:cNvSpPr/>
+          <p:nvPr/>
+        </p:nvSpPr>
+        <p:spPr>
+          <a:xfrm>
+            <a:off x="548640" y="5852160"/>
+            <a:ext cx="4754880" cy="731520"/>
           </a:xfrm>
           <a:prstGeom prst="roundRect">
             <a:avLst/>
@@ -33412,14 +32351,14 @@
       </p:sp>
       <p:sp>
         <p:nvSpPr>
-          <p:cNvPr id="19" name="TextBox 18"/>
-          <p:cNvSpPr txBox="1"/>
-          <p:nvPr/>
-        </p:nvSpPr>
-        <p:spPr>
-          <a:xfrm>
-            <a:off x="731520" y="4983480"/>
-            <a:ext cx="1371600" cy="320040"/>
+          <p:cNvPr id="23" name="TextBox 22"/>
+          <p:cNvSpPr txBox="1"/>
+          <p:nvPr/>
+        </p:nvSpPr>
+        <p:spPr>
+          <a:xfrm>
+            <a:off x="731520" y="5897880"/>
+            <a:ext cx="1280160" cy="274320"/>
           </a:xfrm>
           <a:prstGeom prst="rect">
             <a:avLst/>
@@ -33431,7 +32370,7 @@
           <a:lstStyle/>
           <a:p>
             <a:pPr algn="l">
-              <a:defRPr sz="1300" b="1">
+              <a:defRPr sz="1200" b="1">
                 <a:solidFill>
                   <a:srgbClr val="0D7377"/>
                 </a:solidFill>
@@ -33446,14 +32385,14 @@
       </p:sp>
       <p:sp>
         <p:nvSpPr>
-          <p:cNvPr id="20" name="TextBox 19"/>
-          <p:cNvSpPr txBox="1"/>
-          <p:nvPr/>
-        </p:nvSpPr>
-        <p:spPr>
-          <a:xfrm>
-            <a:off x="731520" y="5303520"/>
-            <a:ext cx="4937760" cy="502920"/>
+          <p:cNvPr id="24" name="TextBox 23"/>
+          <p:cNvSpPr txBox="1"/>
+          <p:nvPr/>
+        </p:nvSpPr>
+        <p:spPr>
+          <a:xfrm>
+            <a:off x="731520" y="6172200"/>
+            <a:ext cx="3474720" cy="365760"/>
           </a:xfrm>
           <a:prstGeom prst="rect">
             <a:avLst/>
@@ -33465,7 +32404,7 @@
           <a:lstStyle/>
           <a:p>
             <a:pPr algn="l">
-              <a:defRPr sz="1000" b="0">
+              <a:defRPr sz="900" b="0">
                 <a:solidFill>
                   <a:srgbClr val="333333"/>
                 </a:solidFill>
@@ -33473,12 +32412,12 @@
               </a:defRPr>
             </a:pPr>
             <a:r>
-              <a:t>Building blocks of proteins. A sequence of 3</a:t>
-            </a:r>
-          </a:p>
-          <a:p>
-            <a:pPr algn="l">
-              <a:defRPr sz="1000" b="0">
+              <a:t>Protein building blocks.</a:t>
+            </a:r>
+          </a:p>
+          <a:p>
+            <a:pPr algn="l">
+              <a:defRPr sz="900" b="0">
                 <a:solidFill>
                   <a:srgbClr val="333333"/>
                 </a:solidFill>
@@ -33486,21 +32425,21 @@
               </a:defRPr>
             </a:pPr>
             <a:r>
-              <a:t>nucleotides (codon) specifies one amino acid.</a:t>
-            </a:r>
-          </a:p>
-        </p:txBody>
-      </p:sp>
-      <p:sp>
-        <p:nvSpPr>
-          <p:cNvPr id="21" name="Rounded Rectangle 20"/>
+              <a:t>3 nucleotides = 1 codon = 1 AA.</a:t>
+            </a:r>
+          </a:p>
+        </p:txBody>
+      </p:sp>
+      <p:sp>
+        <p:nvSpPr>
+          <p:cNvPr id="25" name="Rounded Rectangle 24"/>
           <p:cNvSpPr/>
           <p:nvPr/>
         </p:nvSpPr>
         <p:spPr>
           <a:xfrm>
-            <a:off x="6309360" y="1097280"/>
-            <a:ext cx="5303520" cy="2743200"/>
+            <a:off x="4297680" y="5897880"/>
+            <a:ext cx="914400" cy="640080"/>
           </a:xfrm>
           <a:prstGeom prst="roundRect">
             <a:avLst/>
@@ -33541,81 +32480,21 @@
               </a:defRPr>
             </a:pPr>
             <a:r>
-              <a:t>[Image Placeholder]</a:t>
-            </a:r>
-          </a:p>
-          <a:p>
-            <a:pPr algn="ctr">
-              <a:defRPr sz="1100" b="0">
-                <a:solidFill>
-                  <a:srgbClr val="888888"/>
-                </a:solidFill>
-                <a:latin typeface="Calibri"/>
-              </a:defRPr>
-            </a:pPr>
-            <a:r>
-              <a:t>DNA Structure Diagram</a:t>
-            </a:r>
-          </a:p>
-          <a:p>
-            <a:pPr algn="ctr">
-              <a:defRPr sz="1100" b="0">
-                <a:solidFill>
-                  <a:srgbClr val="888888"/>
-                </a:solidFill>
-                <a:latin typeface="Calibri"/>
-              </a:defRPr>
-            </a:pPr>
-            <a:r>
-              <a:t>(To be inserted)</a:t>
-            </a:r>
-          </a:p>
-        </p:txBody>
-      </p:sp>
-      <p:sp>
-        <p:nvSpPr>
-          <p:cNvPr id="22" name="TextBox 21"/>
-          <p:cNvSpPr txBox="1"/>
-          <p:nvPr/>
-        </p:nvSpPr>
-        <p:spPr>
-          <a:xfrm>
-            <a:off x="6309360" y="4114800"/>
-            <a:ext cx="5303520" cy="365760"/>
-          </a:xfrm>
-          <a:prstGeom prst="rect">
-            <a:avLst/>
-          </a:prstGeom>
-          <a:noFill/>
-        </p:spPr>
-        <p:txBody>
-          <a:bodyPr wrap="square" anchor="t"/>
-          <a:lstStyle/>
-          <a:p>
-            <a:pPr algn="l">
-              <a:defRPr sz="1400" b="1">
-                <a:solidFill>
-                  <a:srgbClr val="1B2A4A"/>
-                </a:solidFill>
-                <a:latin typeface="Calibri"/>
-              </a:defRPr>
-            </a:pPr>
-            <a:r>
-              <a:t>Central Dogma Flow</a:t>
-            </a:r>
-          </a:p>
-        </p:txBody>
-      </p:sp>
-      <p:sp>
-        <p:nvSpPr>
-          <p:cNvPr id="23" name="Rounded Rectangle 22"/>
+              <a:t>[Amino acid image]</a:t>
+            </a:r>
+          </a:p>
+        </p:txBody>
+      </p:sp>
+      <p:sp>
+        <p:nvSpPr>
+          <p:cNvPr id="26" name="Rounded Rectangle 25"/>
           <p:cNvSpPr/>
           <p:nvPr/>
         </p:nvSpPr>
         <p:spPr>
           <a:xfrm>
-            <a:off x="6492240" y="4572000"/>
-            <a:ext cx="1371600" cy="594360"/>
+            <a:off x="5669280" y="3383280"/>
+            <a:ext cx="1920240" cy="502920"/>
           </a:xfrm>
           <a:prstGeom prst="roundRect">
             <a:avLst/>
@@ -33646,7 +32525,7 @@
           <a:lstStyle/>
           <a:p>
             <a:pPr algn="ctr">
-              <a:defRPr sz="1400" b="1">
+              <a:defRPr sz="1300" b="1">
                 <a:solidFill>
                   <a:srgbClr val="FFFFFF"/>
                 </a:solidFill>
@@ -33661,14 +32540,69 @@
       </p:sp>
       <p:sp>
         <p:nvSpPr>
-          <p:cNvPr id="24" name="TextBox 23"/>
-          <p:cNvSpPr txBox="1"/>
-          <p:nvPr/>
-        </p:nvSpPr>
-        <p:spPr>
-          <a:xfrm>
-            <a:off x="7863840" y="4617720"/>
-            <a:ext cx="365760" cy="502920"/>
+          <p:cNvPr id="27" name="Rounded Rectangle 26"/>
+          <p:cNvSpPr/>
+          <p:nvPr/>
+        </p:nvSpPr>
+        <p:spPr>
+          <a:xfrm>
+            <a:off x="5760720" y="3977640"/>
+            <a:ext cx="1737360" cy="1371600"/>
+          </a:xfrm>
+          <a:prstGeom prst="roundRect">
+            <a:avLst/>
+          </a:prstGeom>
+          <a:solidFill>
+            <a:srgbClr val="F0F0F0"/>
+          </a:solidFill>
+          <a:ln w="25400">
+            <a:solidFill>
+              <a:srgbClr val="999999"/>
+            </a:solidFill>
+          </a:ln>
+        </p:spPr>
+        <p:style>
+          <a:lnRef idx="1">
+            <a:schemeClr val="accent1"/>
+          </a:lnRef>
+          <a:fillRef idx="3">
+            <a:schemeClr val="accent1"/>
+          </a:fillRef>
+          <a:effectRef idx="2">
+            <a:schemeClr val="accent1"/>
+          </a:effectRef>
+          <a:fontRef idx="minor">
+            <a:schemeClr val="lt1"/>
+          </a:fontRef>
+        </p:style>
+        <p:txBody>
+          <a:bodyPr rtlCol="0" anchor="ctr" wrap="square"/>
+          <a:lstStyle/>
+          <a:p>
+            <a:pPr algn="ctr">
+              <a:defRPr sz="1100" b="0">
+                <a:solidFill>
+                  <a:srgbClr val="888888"/>
+                </a:solidFill>
+                <a:latin typeface="Calibri"/>
+              </a:defRPr>
+            </a:pPr>
+            <a:r>
+              <a:t>[DNA double helix image]</a:t>
+            </a:r>
+          </a:p>
+        </p:txBody>
+      </p:sp>
+      <p:sp>
+        <p:nvSpPr>
+          <p:cNvPr id="28" name="TextBox 27"/>
+          <p:cNvSpPr txBox="1"/>
+          <p:nvPr/>
+        </p:nvSpPr>
+        <p:spPr>
+          <a:xfrm>
+            <a:off x="7589520" y="3429000"/>
+            <a:ext cx="274320" cy="411480"/>
           </a:xfrm>
           <a:prstGeom prst="rect">
             <a:avLst/>
@@ -33688,21 +32622,21 @@
               </a:defRPr>
             </a:pPr>
             <a:r>
-              <a:t>&gt;</a:t>
-            </a:r>
-          </a:p>
-        </p:txBody>
-      </p:sp>
-      <p:sp>
-        <p:nvSpPr>
-          <p:cNvPr id="25" name="Rounded Rectangle 24"/>
+              <a:t>→</a:t>
+            </a:r>
+          </a:p>
+        </p:txBody>
+      </p:sp>
+      <p:sp>
+        <p:nvSpPr>
+          <p:cNvPr id="29" name="Rounded Rectangle 28"/>
           <p:cNvSpPr/>
           <p:nvPr/>
         </p:nvSpPr>
         <p:spPr>
           <a:xfrm>
-            <a:off x="8229600" y="4572000"/>
-            <a:ext cx="1371600" cy="594360"/>
+            <a:off x="7863840" y="3383280"/>
+            <a:ext cx="1920240" cy="502920"/>
           </a:xfrm>
           <a:prstGeom prst="roundRect">
             <a:avLst/>
@@ -33733,7 +32667,7 @@
           <a:lstStyle/>
           <a:p>
             <a:pPr algn="ctr">
-              <a:defRPr sz="1400" b="1">
+              <a:defRPr sz="1300" b="1">
                 <a:solidFill>
                   <a:srgbClr val="FFFFFF"/>
                 </a:solidFill>
@@ -33748,14 +32682,69 @@
       </p:sp>
       <p:sp>
         <p:nvSpPr>
-          <p:cNvPr id="26" name="TextBox 25"/>
-          <p:cNvSpPr txBox="1"/>
-          <p:nvPr/>
-        </p:nvSpPr>
-        <p:spPr>
-          <a:xfrm>
-            <a:off x="9601200" y="4617720"/>
-            <a:ext cx="365760" cy="502920"/>
+          <p:cNvPr id="30" name="Rounded Rectangle 29"/>
+          <p:cNvSpPr/>
+          <p:nvPr/>
+        </p:nvSpPr>
+        <p:spPr>
+          <a:xfrm>
+            <a:off x="7955280" y="3977640"/>
+            <a:ext cx="1737360" cy="1371600"/>
+          </a:xfrm>
+          <a:prstGeom prst="roundRect">
+            <a:avLst/>
+          </a:prstGeom>
+          <a:solidFill>
+            <a:srgbClr val="F0F0F0"/>
+          </a:solidFill>
+          <a:ln w="25400">
+            <a:solidFill>
+              <a:srgbClr val="999999"/>
+            </a:solidFill>
+          </a:ln>
+        </p:spPr>
+        <p:style>
+          <a:lnRef idx="1">
+            <a:schemeClr val="accent1"/>
+          </a:lnRef>
+          <a:fillRef idx="3">
+            <a:schemeClr val="accent1"/>
+          </a:fillRef>
+          <a:effectRef idx="2">
+            <a:schemeClr val="accent1"/>
+          </a:effectRef>
+          <a:fontRef idx="minor">
+            <a:schemeClr val="lt1"/>
+          </a:fontRef>
+        </p:style>
+        <p:txBody>
+          <a:bodyPr rtlCol="0" anchor="ctr" wrap="square"/>
+          <a:lstStyle/>
+          <a:p>
+            <a:pPr algn="ctr">
+              <a:defRPr sz="1100" b="0">
+                <a:solidFill>
+                  <a:srgbClr val="888888"/>
+                </a:solidFill>
+                <a:latin typeface="Calibri"/>
+              </a:defRPr>
+            </a:pPr>
+            <a:r>
+              <a:t>[mRNA transcription image]</a:t>
+            </a:r>
+          </a:p>
+        </p:txBody>
+      </p:sp>
+      <p:sp>
+        <p:nvSpPr>
+          <p:cNvPr id="31" name="TextBox 30"/>
+          <p:cNvSpPr txBox="1"/>
+          <p:nvPr/>
+        </p:nvSpPr>
+        <p:spPr>
+          <a:xfrm>
+            <a:off x="9784080" y="3429000"/>
+            <a:ext cx="274320" cy="411480"/>
           </a:xfrm>
           <a:prstGeom prst="rect">
             <a:avLst/>
@@ -33775,21 +32764,21 @@
               </a:defRPr>
             </a:pPr>
             <a:r>
-              <a:t>&gt;</a:t>
-            </a:r>
-          </a:p>
-        </p:txBody>
-      </p:sp>
-      <p:sp>
-        <p:nvSpPr>
-          <p:cNvPr id="27" name="Rounded Rectangle 26"/>
+              <a:t>→</a:t>
+            </a:r>
+          </a:p>
+        </p:txBody>
+      </p:sp>
+      <p:sp>
+        <p:nvSpPr>
+          <p:cNvPr id="32" name="Rounded Rectangle 31"/>
           <p:cNvSpPr/>
           <p:nvPr/>
         </p:nvSpPr>
         <p:spPr>
           <a:xfrm>
-            <a:off x="9966960" y="4572000"/>
-            <a:ext cx="1371600" cy="594360"/>
+            <a:off x="10058400" y="3383280"/>
+            <a:ext cx="1920240" cy="502920"/>
           </a:xfrm>
           <a:prstGeom prst="roundRect">
             <a:avLst/>
@@ -33820,7 +32809,7 @@
           <a:lstStyle/>
           <a:p>
             <a:pPr algn="ctr">
-              <a:defRPr sz="1400" b="1">
+              <a:defRPr sz="1300" b="1">
                 <a:solidFill>
                   <a:srgbClr val="FFFFFF"/>
                 </a:solidFill>
@@ -33835,14 +32824,69 @@
       </p:sp>
       <p:sp>
         <p:nvSpPr>
-          <p:cNvPr id="28" name="Rounded Rectangle 27"/>
+          <p:cNvPr id="33" name="Rounded Rectangle 32"/>
           <p:cNvSpPr/>
           <p:nvPr/>
         </p:nvSpPr>
         <p:spPr>
           <a:xfrm>
-            <a:off x="6309360" y="5394960"/>
-            <a:ext cx="5303520" cy="685800"/>
+            <a:off x="10149840" y="3977640"/>
+            <a:ext cx="1737360" cy="1371600"/>
+          </a:xfrm>
+          <a:prstGeom prst="roundRect">
+            <a:avLst/>
+          </a:prstGeom>
+          <a:solidFill>
+            <a:srgbClr val="F0F0F0"/>
+          </a:solidFill>
+          <a:ln w="25400">
+            <a:solidFill>
+              <a:srgbClr val="999999"/>
+            </a:solidFill>
+          </a:ln>
+        </p:spPr>
+        <p:style>
+          <a:lnRef idx="1">
+            <a:schemeClr val="accent1"/>
+          </a:lnRef>
+          <a:fillRef idx="3">
+            <a:schemeClr val="accent1"/>
+          </a:fillRef>
+          <a:effectRef idx="2">
+            <a:schemeClr val="accent1"/>
+          </a:effectRef>
+          <a:fontRef idx="minor">
+            <a:schemeClr val="lt1"/>
+          </a:fontRef>
+        </p:style>
+        <p:txBody>
+          <a:bodyPr rtlCol="0" anchor="ctr" wrap="square"/>
+          <a:lstStyle/>
+          <a:p>
+            <a:pPr algn="ctr">
+              <a:defRPr sz="1100" b="0">
+                <a:solidFill>
+                  <a:srgbClr val="888888"/>
+                </a:solidFill>
+                <a:latin typeface="Calibri"/>
+              </a:defRPr>
+            </a:pPr>
+            <a:r>
+              <a:t>[Protein folding image]</a:t>
+            </a:r>
+          </a:p>
+        </p:txBody>
+      </p:sp>
+      <p:sp>
+        <p:nvSpPr>
+          <p:cNvPr id="34" name="Rounded Rectangle 33"/>
+          <p:cNvSpPr/>
+          <p:nvPr/>
+        </p:nvSpPr>
+        <p:spPr>
+          <a:xfrm>
+            <a:off x="5669280" y="5577840"/>
+            <a:ext cx="5760720" cy="640080"/>
           </a:xfrm>
           <a:prstGeom prst="roundRect">
             <a:avLst/>
@@ -33998,7 +33042,7 @@
       </p:sp>
       <p:pic>
         <p:nvPicPr>
-          <p:cNvPr id="4" name="Picture 3" descr="knu_symbol_white.png"/>
+          <p:cNvPr id="4" name="Picture 3" descr="knu_emblem_official.jpg"/>
           <p:cNvPicPr>
             <a:picLocks noChangeAspect="1"/>
           </p:cNvPicPr>
@@ -34105,8 +33149,8 @@
         </p:nvSpPr>
         <p:spPr>
           <a:xfrm>
-            <a:off x="11430000" y="6528816"/>
-            <a:ext cx="640080" cy="310896"/>
+            <a:off x="10789920" y="6528816"/>
+            <a:ext cx="1280160" cy="310896"/>
           </a:xfrm>
           <a:prstGeom prst="rect">
             <a:avLst/>
@@ -34126,21 +33170,119 @@
               </a:defRPr>
             </a:pPr>
             <a:r>
-              <a:t>5</a:t>
-            </a:r>
-          </a:p>
-        </p:txBody>
-      </p:sp>
-      <p:sp>
-        <p:nvSpPr>
-          <p:cNvPr id="8" name="TextBox 7"/>
-          <p:cNvSpPr txBox="1"/>
-          <p:nvPr/>
-        </p:nvSpPr>
-        <p:spPr>
-          <a:xfrm>
-            <a:off x="548640" y="1097280"/>
-            <a:ext cx="3657600" cy="365760"/>
+              <a:t>—— 5</a:t>
+            </a:r>
+          </a:p>
+        </p:txBody>
+      </p:sp>
+      <p:sp>
+        <p:nvSpPr>
+          <p:cNvPr id="8" name="Rounded Rectangle 7"/>
+          <p:cNvSpPr/>
+          <p:nvPr/>
+        </p:nvSpPr>
+        <p:spPr>
+          <a:xfrm>
+            <a:off x="2423160" y="1005840"/>
+            <a:ext cx="7315200" cy="3657600"/>
+          </a:xfrm>
+          <a:prstGeom prst="roundRect">
+            <a:avLst/>
+          </a:prstGeom>
+          <a:solidFill>
+            <a:srgbClr val="F0F0F0"/>
+          </a:solidFill>
+          <a:ln w="25400">
+            <a:solidFill>
+              <a:srgbClr val="999999"/>
+            </a:solidFill>
+          </a:ln>
+        </p:spPr>
+        <p:style>
+          <a:lnRef idx="1">
+            <a:schemeClr val="accent1"/>
+          </a:lnRef>
+          <a:fillRef idx="3">
+            <a:schemeClr val="accent1"/>
+          </a:fillRef>
+          <a:effectRef idx="2">
+            <a:schemeClr val="accent1"/>
+          </a:effectRef>
+          <a:fontRef idx="minor">
+            <a:schemeClr val="lt1"/>
+          </a:fontRef>
+        </p:style>
+        <p:txBody>
+          <a:bodyPr rtlCol="0" anchor="ctr" wrap="square"/>
+          <a:lstStyle/>
+          <a:p>
+            <a:pPr algn="ctr">
+              <a:defRPr sz="1100" b="0">
+                <a:solidFill>
+                  <a:srgbClr val="888888"/>
+                </a:solidFill>
+                <a:latin typeface="Calibri"/>
+              </a:defRPr>
+            </a:pPr>
+            <a:r>
+              <a:t>[Mutation types diagram: substitution, insertion, deletion with DNA sequence examples]</a:t>
+            </a:r>
+          </a:p>
+        </p:txBody>
+      </p:sp>
+      <p:sp>
+        <p:nvSpPr>
+          <p:cNvPr id="9" name="Rectangle 8"/>
+          <p:cNvSpPr/>
+          <p:nvPr/>
+        </p:nvSpPr>
+        <p:spPr>
+          <a:xfrm>
+            <a:off x="457200" y="1097280"/>
+            <a:ext cx="73152" cy="1005840"/>
+          </a:xfrm>
+          <a:prstGeom prst="rect">
+            <a:avLst/>
+          </a:prstGeom>
+          <a:solidFill>
+            <a:srgbClr val="0D7377"/>
+          </a:solidFill>
+          <a:ln>
+            <a:noFill/>
+          </a:ln>
+        </p:spPr>
+        <p:style>
+          <a:lnRef idx="1">
+            <a:schemeClr val="accent1"/>
+          </a:lnRef>
+          <a:fillRef idx="3">
+            <a:schemeClr val="accent1"/>
+          </a:fillRef>
+          <a:effectRef idx="2">
+            <a:schemeClr val="accent1"/>
+          </a:effectRef>
+          <a:fontRef idx="minor">
+            <a:schemeClr val="lt1"/>
+          </a:fontRef>
+        </p:style>
+        <p:txBody>
+          <a:bodyPr rtlCol="0" anchor="ctr"/>
+          <a:lstStyle/>
+          <a:p>
+            <a:pPr algn="ctr"/>
+          </a:p>
+        </p:txBody>
+      </p:sp>
+      <p:sp>
+        <p:nvSpPr>
+          <p:cNvPr id="10" name="TextBox 9"/>
+          <p:cNvSpPr txBox="1"/>
+          <p:nvPr/>
+        </p:nvSpPr>
+        <p:spPr>
+          <a:xfrm>
+            <a:off x="640080" y="1188720"/>
+            <a:ext cx="1645920" cy="274320"/>
           </a:xfrm>
           <a:prstGeom prst="rect">
             <a:avLst/>
@@ -34152,7 +33294,297 @@
           <a:lstStyle/>
           <a:p>
             <a:pPr algn="l">
-              <a:defRPr sz="1600" b="1">
+              <a:defRPr sz="1200" b="1">
+                <a:solidFill>
+                  <a:srgbClr val="0D7377"/>
+                </a:solidFill>
+                <a:latin typeface="Calibri"/>
+              </a:defRPr>
+            </a:pPr>
+            <a:r>
+              <a:t>Substitution</a:t>
+            </a:r>
+          </a:p>
+        </p:txBody>
+      </p:sp>
+      <p:sp>
+        <p:nvSpPr>
+          <p:cNvPr id="11" name="TextBox 10"/>
+          <p:cNvSpPr txBox="1"/>
+          <p:nvPr/>
+        </p:nvSpPr>
+        <p:spPr>
+          <a:xfrm>
+            <a:off x="640080" y="1481328"/>
+            <a:ext cx="1645920" cy="502920"/>
+          </a:xfrm>
+          <a:prstGeom prst="rect">
+            <a:avLst/>
+          </a:prstGeom>
+          <a:noFill/>
+        </p:spPr>
+        <p:txBody>
+          <a:bodyPr wrap="square" anchor="t"/>
+          <a:lstStyle/>
+          <a:p>
+            <a:pPr algn="l">
+              <a:defRPr sz="900" b="0">
+                <a:solidFill>
+                  <a:srgbClr val="333333"/>
+                </a:solidFill>
+                <a:latin typeface="Calibri"/>
+              </a:defRPr>
+            </a:pPr>
+            <a:r>
+              <a:t>One nucleotide replaced by another</a:t>
+            </a:r>
+          </a:p>
+        </p:txBody>
+      </p:sp>
+      <p:sp>
+        <p:nvSpPr>
+          <p:cNvPr id="12" name="Rectangle 11"/>
+          <p:cNvSpPr/>
+          <p:nvPr/>
+        </p:nvSpPr>
+        <p:spPr>
+          <a:xfrm>
+            <a:off x="457200" y="2286000"/>
+            <a:ext cx="73152" cy="1005840"/>
+          </a:xfrm>
+          <a:prstGeom prst="rect">
+            <a:avLst/>
+          </a:prstGeom>
+          <a:solidFill>
+            <a:srgbClr val="E65100"/>
+          </a:solidFill>
+          <a:ln>
+            <a:noFill/>
+          </a:ln>
+        </p:spPr>
+        <p:style>
+          <a:lnRef idx="1">
+            <a:schemeClr val="accent1"/>
+          </a:lnRef>
+          <a:fillRef idx="3">
+            <a:schemeClr val="accent1"/>
+          </a:fillRef>
+          <a:effectRef idx="2">
+            <a:schemeClr val="accent1"/>
+          </a:effectRef>
+          <a:fontRef idx="minor">
+            <a:schemeClr val="lt1"/>
+          </a:fontRef>
+        </p:style>
+        <p:txBody>
+          <a:bodyPr rtlCol="0" anchor="ctr"/>
+          <a:lstStyle/>
+          <a:p>
+            <a:pPr algn="ctr"/>
+          </a:p>
+        </p:txBody>
+      </p:sp>
+      <p:sp>
+        <p:nvSpPr>
+          <p:cNvPr id="13" name="TextBox 12"/>
+          <p:cNvSpPr txBox="1"/>
+          <p:nvPr/>
+        </p:nvSpPr>
+        <p:spPr>
+          <a:xfrm>
+            <a:off x="640080" y="2377440"/>
+            <a:ext cx="1645920" cy="274320"/>
+          </a:xfrm>
+          <a:prstGeom prst="rect">
+            <a:avLst/>
+          </a:prstGeom>
+          <a:noFill/>
+        </p:spPr>
+        <p:txBody>
+          <a:bodyPr wrap="square" anchor="t"/>
+          <a:lstStyle/>
+          <a:p>
+            <a:pPr algn="l">
+              <a:defRPr sz="1200" b="1">
+                <a:solidFill>
+                  <a:srgbClr val="E65100"/>
+                </a:solidFill>
+                <a:latin typeface="Calibri"/>
+              </a:defRPr>
+            </a:pPr>
+            <a:r>
+              <a:t>Insertion</a:t>
+            </a:r>
+          </a:p>
+        </p:txBody>
+      </p:sp>
+      <p:sp>
+        <p:nvSpPr>
+          <p:cNvPr id="14" name="TextBox 13"/>
+          <p:cNvSpPr txBox="1"/>
+          <p:nvPr/>
+        </p:nvSpPr>
+        <p:spPr>
+          <a:xfrm>
+            <a:off x="640080" y="2670048"/>
+            <a:ext cx="1645920" cy="502920"/>
+          </a:xfrm>
+          <a:prstGeom prst="rect">
+            <a:avLst/>
+          </a:prstGeom>
+          <a:noFill/>
+        </p:spPr>
+        <p:txBody>
+          <a:bodyPr wrap="square" anchor="t"/>
+          <a:lstStyle/>
+          <a:p>
+            <a:pPr algn="l">
+              <a:defRPr sz="900" b="0">
+                <a:solidFill>
+                  <a:srgbClr val="333333"/>
+                </a:solidFill>
+                <a:latin typeface="Calibri"/>
+              </a:defRPr>
+            </a:pPr>
+            <a:r>
+              <a:t>Extra nucleotide(s) added, shifts reading frame</a:t>
+            </a:r>
+          </a:p>
+        </p:txBody>
+      </p:sp>
+      <p:sp>
+        <p:nvSpPr>
+          <p:cNvPr id="15" name="Rectangle 14"/>
+          <p:cNvSpPr/>
+          <p:nvPr/>
+        </p:nvSpPr>
+        <p:spPr>
+          <a:xfrm>
+            <a:off x="457200" y="3474720"/>
+            <a:ext cx="73152" cy="1005840"/>
+          </a:xfrm>
+          <a:prstGeom prst="rect">
+            <a:avLst/>
+          </a:prstGeom>
+          <a:solidFill>
+            <a:srgbClr val="C62828"/>
+          </a:solidFill>
+          <a:ln>
+            <a:noFill/>
+          </a:ln>
+        </p:spPr>
+        <p:style>
+          <a:lnRef idx="1">
+            <a:schemeClr val="accent1"/>
+          </a:lnRef>
+          <a:fillRef idx="3">
+            <a:schemeClr val="accent1"/>
+          </a:fillRef>
+          <a:effectRef idx="2">
+            <a:schemeClr val="accent1"/>
+          </a:effectRef>
+          <a:fontRef idx="minor">
+            <a:schemeClr val="lt1"/>
+          </a:fontRef>
+        </p:style>
+        <p:txBody>
+          <a:bodyPr rtlCol="0" anchor="ctr"/>
+          <a:lstStyle/>
+          <a:p>
+            <a:pPr algn="ctr"/>
+          </a:p>
+        </p:txBody>
+      </p:sp>
+      <p:sp>
+        <p:nvSpPr>
+          <p:cNvPr id="16" name="TextBox 15"/>
+          <p:cNvSpPr txBox="1"/>
+          <p:nvPr/>
+        </p:nvSpPr>
+        <p:spPr>
+          <a:xfrm>
+            <a:off x="640080" y="3566160"/>
+            <a:ext cx="1645920" cy="274320"/>
+          </a:xfrm>
+          <a:prstGeom prst="rect">
+            <a:avLst/>
+          </a:prstGeom>
+          <a:noFill/>
+        </p:spPr>
+        <p:txBody>
+          <a:bodyPr wrap="square" anchor="t"/>
+          <a:lstStyle/>
+          <a:p>
+            <a:pPr algn="l">
+              <a:defRPr sz="1200" b="1">
+                <a:solidFill>
+                  <a:srgbClr val="C62828"/>
+                </a:solidFill>
+                <a:latin typeface="Calibri"/>
+              </a:defRPr>
+            </a:pPr>
+            <a:r>
+              <a:t>Deletion</a:t>
+            </a:r>
+          </a:p>
+        </p:txBody>
+      </p:sp>
+      <p:sp>
+        <p:nvSpPr>
+          <p:cNvPr id="17" name="TextBox 16"/>
+          <p:cNvSpPr txBox="1"/>
+          <p:nvPr/>
+        </p:nvSpPr>
+        <p:spPr>
+          <a:xfrm>
+            <a:off x="640080" y="3858768"/>
+            <a:ext cx="1645920" cy="502920"/>
+          </a:xfrm>
+          <a:prstGeom prst="rect">
+            <a:avLst/>
+          </a:prstGeom>
+          <a:noFill/>
+        </p:spPr>
+        <p:txBody>
+          <a:bodyPr wrap="square" anchor="t"/>
+          <a:lstStyle/>
+          <a:p>
+            <a:pPr algn="l">
+              <a:defRPr sz="900" b="0">
+                <a:solidFill>
+                  <a:srgbClr val="333333"/>
+                </a:solidFill>
+                <a:latin typeface="Calibri"/>
+              </a:defRPr>
+            </a:pPr>
+            <a:r>
+              <a:t>Nucleotide(s) removed, disrupts structure</a:t>
+            </a:r>
+          </a:p>
+        </p:txBody>
+      </p:sp>
+      <p:sp>
+        <p:nvSpPr>
+          <p:cNvPr id="18" name="TextBox 17"/>
+          <p:cNvSpPr txBox="1"/>
+          <p:nvPr/>
+        </p:nvSpPr>
+        <p:spPr>
+          <a:xfrm>
+            <a:off x="548640" y="4846320"/>
+            <a:ext cx="2743200" cy="320040"/>
+          </a:xfrm>
+          <a:prstGeom prst="rect">
+            <a:avLst/>
+          </a:prstGeom>
+          <a:noFill/>
+        </p:spPr>
+        <p:txBody>
+          <a:bodyPr wrap="square" anchor="t"/>
+          <a:lstStyle/>
+          <a:p>
+            <a:pPr algn="l">
+              <a:defRPr sz="1400" b="1">
                 <a:solidFill>
                   <a:srgbClr val="1B2A4A"/>
                 </a:solidFill>
@@ -34160,21 +33592,21 @@
               </a:defRPr>
             </a:pPr>
             <a:r>
-              <a:t>Mutation Types</a:t>
-            </a:r>
-          </a:p>
-        </p:txBody>
-      </p:sp>
-      <p:sp>
-        <p:nvSpPr>
-          <p:cNvPr id="9" name="Rounded Rectangle 8"/>
+              <a:t>Effects on Protein</a:t>
+            </a:r>
+          </a:p>
+        </p:txBody>
+      </p:sp>
+      <p:sp>
+        <p:nvSpPr>
+          <p:cNvPr id="19" name="Rounded Rectangle 18"/>
           <p:cNvSpPr/>
           <p:nvPr/>
         </p:nvSpPr>
         <p:spPr>
           <a:xfrm>
-            <a:off x="548640" y="1600200"/>
-            <a:ext cx="5029200" cy="960120"/>
+            <a:off x="548640" y="5257800"/>
+            <a:ext cx="2468880" cy="731520"/>
           </a:xfrm>
           <a:prstGeom prst="roundRect">
             <a:avLst/>
@@ -34212,20 +33644,20 @@
       </p:sp>
       <p:sp>
         <p:nvSpPr>
-          <p:cNvPr id="10" name="Rectangle 9"/>
+          <p:cNvPr id="20" name="Rectangle 19"/>
           <p:cNvSpPr/>
           <p:nvPr/>
         </p:nvSpPr>
         <p:spPr>
           <a:xfrm>
-            <a:off x="548640" y="1600200"/>
-            <a:ext cx="73152" cy="960120"/>
+            <a:off x="548640" y="5257800"/>
+            <a:ext cx="54864" cy="731520"/>
           </a:xfrm>
           <a:prstGeom prst="rect">
             <a:avLst/>
           </a:prstGeom>
           <a:solidFill>
-            <a:srgbClr val="0D7377"/>
+            <a:srgbClr val="888888"/>
           </a:solidFill>
           <a:ln>
             <a:noFill/>
@@ -34255,14 +33687,14 @@
       </p:sp>
       <p:sp>
         <p:nvSpPr>
-          <p:cNvPr id="11" name="TextBox 10"/>
-          <p:cNvSpPr txBox="1"/>
-          <p:nvPr/>
-        </p:nvSpPr>
-        <p:spPr>
-          <a:xfrm>
-            <a:off x="822960" y="1691640"/>
-            <a:ext cx="4572000" cy="274320"/>
+          <p:cNvPr id="21" name="TextBox 20"/>
+          <p:cNvSpPr txBox="1"/>
+          <p:nvPr/>
+        </p:nvSpPr>
+        <p:spPr>
+          <a:xfrm>
+            <a:off x="731520" y="5303520"/>
+            <a:ext cx="2103120" cy="274320"/>
           </a:xfrm>
           <a:prstGeom prst="rect">
             <a:avLst/>
@@ -34274,29 +33706,29 @@
           <a:lstStyle/>
           <a:p>
             <a:pPr algn="l">
-              <a:defRPr sz="1300" b="1">
-                <a:solidFill>
-                  <a:srgbClr val="0D7377"/>
-                </a:solidFill>
-                <a:latin typeface="Calibri"/>
-              </a:defRPr>
-            </a:pPr>
-            <a:r>
-              <a:t>Substitution</a:t>
-            </a:r>
-          </a:p>
-        </p:txBody>
-      </p:sp>
-      <p:sp>
-        <p:nvSpPr>
-          <p:cNvPr id="12" name="TextBox 11"/>
-          <p:cNvSpPr txBox="1"/>
-          <p:nvPr/>
-        </p:nvSpPr>
-        <p:spPr>
-          <a:xfrm>
-            <a:off x="822960" y="1984248"/>
-            <a:ext cx="4572000" cy="502920"/>
+              <a:defRPr sz="1100" b="1">
+                <a:solidFill>
+                  <a:srgbClr val="888888"/>
+                </a:solidFill>
+                <a:latin typeface="Calibri"/>
+              </a:defRPr>
+            </a:pPr>
+            <a:r>
+              <a:t>Silent</a:t>
+            </a:r>
+          </a:p>
+        </p:txBody>
+      </p:sp>
+      <p:sp>
+        <p:nvSpPr>
+          <p:cNvPr id="22" name="TextBox 21"/>
+          <p:cNvSpPr txBox="1"/>
+          <p:nvPr/>
+        </p:nvSpPr>
+        <p:spPr>
+          <a:xfrm>
+            <a:off x="731520" y="5605272"/>
+            <a:ext cx="2103120" cy="320040"/>
           </a:xfrm>
           <a:prstGeom prst="rect">
             <a:avLst/>
@@ -34308,7 +33740,7 @@
           <a:lstStyle/>
           <a:p>
             <a:pPr algn="l">
-              <a:defRPr sz="1000" b="0">
+              <a:defRPr sz="900" b="0">
                 <a:solidFill>
                   <a:srgbClr val="333333"/>
                 </a:solidFill>
@@ -34316,34 +33748,21 @@
               </a:defRPr>
             </a:pPr>
             <a:r>
-              <a:t>One nucleotide replaced by another</a:t>
-            </a:r>
-          </a:p>
-          <a:p>
-            <a:pPr algn="l">
-              <a:defRPr sz="1000" b="0">
-                <a:solidFill>
-                  <a:srgbClr val="333333"/>
-                </a:solidFill>
-                <a:latin typeface="Calibri"/>
-              </a:defRPr>
-            </a:pPr>
-            <a:r>
-              <a:t>e.g., A -&gt; G at a specific position</a:t>
-            </a:r>
-          </a:p>
-        </p:txBody>
-      </p:sp>
-      <p:sp>
-        <p:nvSpPr>
-          <p:cNvPr id="13" name="Rounded Rectangle 12"/>
+              <a:t>No AA change</a:t>
+            </a:r>
+          </a:p>
+        </p:txBody>
+      </p:sp>
+      <p:sp>
+        <p:nvSpPr>
+          <p:cNvPr id="23" name="Rounded Rectangle 22"/>
           <p:cNvSpPr/>
           <p:nvPr/>
         </p:nvSpPr>
         <p:spPr>
           <a:xfrm>
-            <a:off x="548640" y="2697480"/>
-            <a:ext cx="5029200" cy="960120"/>
+            <a:off x="3200400" y="5257800"/>
+            <a:ext cx="2468880" cy="731520"/>
           </a:xfrm>
           <a:prstGeom prst="roundRect">
             <a:avLst/>
@@ -34381,20 +33800,20 @@
       </p:sp>
       <p:sp>
         <p:nvSpPr>
-          <p:cNvPr id="14" name="Rectangle 13"/>
+          <p:cNvPr id="24" name="Rectangle 23"/>
           <p:cNvSpPr/>
           <p:nvPr/>
         </p:nvSpPr>
         <p:spPr>
           <a:xfrm>
-            <a:off x="548640" y="2697480"/>
-            <a:ext cx="73152" cy="960120"/>
+            <a:off x="3200400" y="5257800"/>
+            <a:ext cx="54864" cy="731520"/>
           </a:xfrm>
           <a:prstGeom prst="rect">
             <a:avLst/>
           </a:prstGeom>
           <a:solidFill>
-            <a:srgbClr val="E65100"/>
+            <a:srgbClr val="1565C0"/>
           </a:solidFill>
           <a:ln>
             <a:noFill/>
@@ -34424,14 +33843,14 @@
       </p:sp>
       <p:sp>
         <p:nvSpPr>
-          <p:cNvPr id="15" name="TextBox 14"/>
-          <p:cNvSpPr txBox="1"/>
-          <p:nvPr/>
-        </p:nvSpPr>
-        <p:spPr>
-          <a:xfrm>
-            <a:off x="822960" y="2788920"/>
-            <a:ext cx="4572000" cy="274320"/>
+          <p:cNvPr id="25" name="TextBox 24"/>
+          <p:cNvSpPr txBox="1"/>
+          <p:nvPr/>
+        </p:nvSpPr>
+        <p:spPr>
+          <a:xfrm>
+            <a:off x="3383280" y="5303520"/>
+            <a:ext cx="2103120" cy="274320"/>
           </a:xfrm>
           <a:prstGeom prst="rect">
             <a:avLst/>
@@ -34443,29 +33862,29 @@
           <a:lstStyle/>
           <a:p>
             <a:pPr algn="l">
-              <a:defRPr sz="1300" b="1">
-                <a:solidFill>
-                  <a:srgbClr val="E65100"/>
-                </a:solidFill>
-                <a:latin typeface="Calibri"/>
-              </a:defRPr>
-            </a:pPr>
-            <a:r>
-              <a:t>Insertion</a:t>
-            </a:r>
-          </a:p>
-        </p:txBody>
-      </p:sp>
-      <p:sp>
-        <p:nvSpPr>
-          <p:cNvPr id="16" name="TextBox 15"/>
-          <p:cNvSpPr txBox="1"/>
-          <p:nvPr/>
-        </p:nvSpPr>
-        <p:spPr>
-          <a:xfrm>
-            <a:off x="822960" y="3081528"/>
-            <a:ext cx="4572000" cy="502920"/>
+              <a:defRPr sz="1100" b="1">
+                <a:solidFill>
+                  <a:srgbClr val="1565C0"/>
+                </a:solidFill>
+                <a:latin typeface="Calibri"/>
+              </a:defRPr>
+            </a:pPr>
+            <a:r>
+              <a:t>Missense</a:t>
+            </a:r>
+          </a:p>
+        </p:txBody>
+      </p:sp>
+      <p:sp>
+        <p:nvSpPr>
+          <p:cNvPr id="26" name="TextBox 25"/>
+          <p:cNvSpPr txBox="1"/>
+          <p:nvPr/>
+        </p:nvSpPr>
+        <p:spPr>
+          <a:xfrm>
+            <a:off x="3383280" y="5605272"/>
+            <a:ext cx="2103120" cy="320040"/>
           </a:xfrm>
           <a:prstGeom prst="rect">
             <a:avLst/>
@@ -34477,7 +33896,7 @@
           <a:lstStyle/>
           <a:p>
             <a:pPr algn="l">
-              <a:defRPr sz="1000" b="0">
+              <a:defRPr sz="900" b="0">
                 <a:solidFill>
                   <a:srgbClr val="333333"/>
                 </a:solidFill>
@@ -34485,34 +33904,21 @@
               </a:defRPr>
             </a:pPr>
             <a:r>
-              <a:t>Extra nucleotide(s) added into the sequence</a:t>
-            </a:r>
-          </a:p>
-          <a:p>
-            <a:pPr algn="l">
-              <a:defRPr sz="1000" b="0">
-                <a:solidFill>
-                  <a:srgbClr val="333333"/>
-                </a:solidFill>
-                <a:latin typeface="Calibri"/>
-              </a:defRPr>
-            </a:pPr>
-            <a:r>
-              <a:t>Shifts the reading frame downstream</a:t>
-            </a:r>
-          </a:p>
-        </p:txBody>
-      </p:sp>
-      <p:sp>
-        <p:nvSpPr>
-          <p:cNvPr id="17" name="Rounded Rectangle 16"/>
+              <a:t>Different AA</a:t>
+            </a:r>
+          </a:p>
+        </p:txBody>
+      </p:sp>
+      <p:sp>
+        <p:nvSpPr>
+          <p:cNvPr id="27" name="Rounded Rectangle 26"/>
           <p:cNvSpPr/>
           <p:nvPr/>
         </p:nvSpPr>
         <p:spPr>
           <a:xfrm>
-            <a:off x="548640" y="3794760"/>
-            <a:ext cx="5029200" cy="960120"/>
+            <a:off x="5852160" y="5257800"/>
+            <a:ext cx="2468880" cy="731520"/>
           </a:xfrm>
           <a:prstGeom prst="roundRect">
             <a:avLst/>
@@ -34550,14 +33956,14 @@
       </p:sp>
       <p:sp>
         <p:nvSpPr>
-          <p:cNvPr id="18" name="Rectangle 17"/>
+          <p:cNvPr id="28" name="Rectangle 27"/>
           <p:cNvSpPr/>
           <p:nvPr/>
         </p:nvSpPr>
         <p:spPr>
           <a:xfrm>
-            <a:off x="548640" y="3794760"/>
-            <a:ext cx="73152" cy="960120"/>
+            <a:off x="5852160" y="5257800"/>
+            <a:ext cx="54864" cy="731520"/>
           </a:xfrm>
           <a:prstGeom prst="rect">
             <a:avLst/>
@@ -34593,14 +33999,14 @@
       </p:sp>
       <p:sp>
         <p:nvSpPr>
-          <p:cNvPr id="19" name="TextBox 18"/>
-          <p:cNvSpPr txBox="1"/>
-          <p:nvPr/>
-        </p:nvSpPr>
-        <p:spPr>
-          <a:xfrm>
-            <a:off x="822960" y="3886200"/>
-            <a:ext cx="4572000" cy="274320"/>
+          <p:cNvPr id="29" name="TextBox 28"/>
+          <p:cNvSpPr txBox="1"/>
+          <p:nvPr/>
+        </p:nvSpPr>
+        <p:spPr>
+          <a:xfrm>
+            <a:off x="6035040" y="5303520"/>
+            <a:ext cx="2103120" cy="274320"/>
           </a:xfrm>
           <a:prstGeom prst="rect">
             <a:avLst/>
@@ -34612,7 +34018,7 @@
           <a:lstStyle/>
           <a:p>
             <a:pPr algn="l">
-              <a:defRPr sz="1300" b="1">
+              <a:defRPr sz="1100" b="1">
                 <a:solidFill>
                   <a:srgbClr val="C62828"/>
                 </a:solidFill>
@@ -34620,21 +34026,21 @@
               </a:defRPr>
             </a:pPr>
             <a:r>
-              <a:t>Deletion</a:t>
-            </a:r>
-          </a:p>
-        </p:txBody>
-      </p:sp>
-      <p:sp>
-        <p:nvSpPr>
-          <p:cNvPr id="20" name="TextBox 19"/>
-          <p:cNvSpPr txBox="1"/>
-          <p:nvPr/>
-        </p:nvSpPr>
-        <p:spPr>
-          <a:xfrm>
-            <a:off x="822960" y="4178808"/>
-            <a:ext cx="4572000" cy="502920"/>
+              <a:t>Nonsense</a:t>
+            </a:r>
+          </a:p>
+        </p:txBody>
+      </p:sp>
+      <p:sp>
+        <p:nvSpPr>
+          <p:cNvPr id="30" name="TextBox 29"/>
+          <p:cNvSpPr txBox="1"/>
+          <p:nvPr/>
+        </p:nvSpPr>
+        <p:spPr>
+          <a:xfrm>
+            <a:off x="6035040" y="5605272"/>
+            <a:ext cx="2103120" cy="320040"/>
           </a:xfrm>
           <a:prstGeom prst="rect">
             <a:avLst/>
@@ -34646,7 +34052,7 @@
           <a:lstStyle/>
           <a:p>
             <a:pPr algn="l">
-              <a:defRPr sz="1000" b="0">
+              <a:defRPr sz="900" b="0">
                 <a:solidFill>
                   <a:srgbClr val="333333"/>
                 </a:solidFill>
@@ -34654,656 +34060,21 @@
               </a:defRPr>
             </a:pPr>
             <a:r>
-              <a:t>Nucleotide(s) removed from the sequence</a:t>
-            </a:r>
-          </a:p>
-          <a:p>
-            <a:pPr algn="l">
-              <a:defRPr sz="1000" b="0">
-                <a:solidFill>
-                  <a:srgbClr val="333333"/>
-                </a:solidFill>
-                <a:latin typeface="Calibri"/>
-              </a:defRPr>
-            </a:pPr>
-            <a:r>
-              <a:t>Can disrupt protein structure</a:t>
-            </a:r>
-          </a:p>
-        </p:txBody>
-      </p:sp>
-      <p:sp>
-        <p:nvSpPr>
-          <p:cNvPr id="21" name="TextBox 20"/>
-          <p:cNvSpPr txBox="1"/>
-          <p:nvPr/>
-        </p:nvSpPr>
-        <p:spPr>
-          <a:xfrm>
-            <a:off x="5943600" y="1097280"/>
-            <a:ext cx="3657600" cy="365760"/>
-          </a:xfrm>
-          <a:prstGeom prst="rect">
-            <a:avLst/>
-          </a:prstGeom>
-          <a:noFill/>
-        </p:spPr>
-        <p:txBody>
-          <a:bodyPr wrap="square" anchor="t"/>
-          <a:lstStyle/>
-          <a:p>
-            <a:pPr algn="l">
-              <a:defRPr sz="1600" b="1">
-                <a:solidFill>
-                  <a:srgbClr val="1B2A4A"/>
-                </a:solidFill>
-                <a:latin typeface="Calibri"/>
-              </a:defRPr>
-            </a:pPr>
-            <a:r>
-              <a:t>Effects on Protein</a:t>
-            </a:r>
-          </a:p>
-        </p:txBody>
-      </p:sp>
-      <p:sp>
-        <p:nvSpPr>
-          <p:cNvPr id="22" name="Rounded Rectangle 21"/>
+              <a:t>Premature stop</a:t>
+            </a:r>
+          </a:p>
+        </p:txBody>
+      </p:sp>
+      <p:sp>
+        <p:nvSpPr>
+          <p:cNvPr id="31" name="Rounded Rectangle 30"/>
           <p:cNvSpPr/>
           <p:nvPr/>
         </p:nvSpPr>
         <p:spPr>
           <a:xfrm>
-            <a:off x="5943600" y="1600200"/>
-            <a:ext cx="5669280" cy="960120"/>
-          </a:xfrm>
-          <a:prstGeom prst="roundRect">
-            <a:avLst/>
-          </a:prstGeom>
-          <a:solidFill>
-            <a:srgbClr val="FFFFFF"/>
-          </a:solidFill>
-          <a:ln w="12700">
-            <a:solidFill>
-              <a:srgbClr val="E0E0E0"/>
-            </a:solidFill>
-          </a:ln>
-        </p:spPr>
-        <p:style>
-          <a:lnRef idx="1">
-            <a:schemeClr val="accent1"/>
-          </a:lnRef>
-          <a:fillRef idx="3">
-            <a:schemeClr val="accent1"/>
-          </a:fillRef>
-          <a:effectRef idx="2">
-            <a:schemeClr val="accent1"/>
-          </a:effectRef>
-          <a:fontRef idx="minor">
-            <a:schemeClr val="lt1"/>
-          </a:fontRef>
-        </p:style>
-        <p:txBody>
-          <a:bodyPr rtlCol="0" anchor="ctr"/>
-          <a:lstStyle/>
-          <a:p>
-            <a:pPr algn="ctr"/>
-          </a:p>
-        </p:txBody>
-      </p:sp>
-      <p:sp>
-        <p:nvSpPr>
-          <p:cNvPr id="23" name="Rectangle 22"/>
-          <p:cNvSpPr/>
-          <p:nvPr/>
-        </p:nvSpPr>
-        <p:spPr>
-          <a:xfrm>
-            <a:off x="5943600" y="1600200"/>
-            <a:ext cx="73152" cy="960120"/>
-          </a:xfrm>
-          <a:prstGeom prst="rect">
-            <a:avLst/>
-          </a:prstGeom>
-          <a:solidFill>
-            <a:srgbClr val="888888"/>
-          </a:solidFill>
-          <a:ln>
-            <a:noFill/>
-          </a:ln>
-        </p:spPr>
-        <p:style>
-          <a:lnRef idx="1">
-            <a:schemeClr val="accent1"/>
-          </a:lnRef>
-          <a:fillRef idx="3">
-            <a:schemeClr val="accent1"/>
-          </a:fillRef>
-          <a:effectRef idx="2">
-            <a:schemeClr val="accent1"/>
-          </a:effectRef>
-          <a:fontRef idx="minor">
-            <a:schemeClr val="lt1"/>
-          </a:fontRef>
-        </p:style>
-        <p:txBody>
-          <a:bodyPr rtlCol="0" anchor="ctr"/>
-          <a:lstStyle/>
-          <a:p>
-            <a:pPr algn="ctr"/>
-          </a:p>
-        </p:txBody>
-      </p:sp>
-      <p:sp>
-        <p:nvSpPr>
-          <p:cNvPr id="24" name="TextBox 23"/>
-          <p:cNvSpPr txBox="1"/>
-          <p:nvPr/>
-        </p:nvSpPr>
-        <p:spPr>
-          <a:xfrm>
-            <a:off x="6217920" y="1691640"/>
-            <a:ext cx="5212080" cy="274320"/>
-          </a:xfrm>
-          <a:prstGeom prst="rect">
-            <a:avLst/>
-          </a:prstGeom>
-          <a:noFill/>
-        </p:spPr>
-        <p:txBody>
-          <a:bodyPr wrap="square" anchor="t"/>
-          <a:lstStyle/>
-          <a:p>
-            <a:pPr algn="l">
-              <a:defRPr sz="1300" b="1">
-                <a:solidFill>
-                  <a:srgbClr val="888888"/>
-                </a:solidFill>
-                <a:latin typeface="Calibri"/>
-              </a:defRPr>
-            </a:pPr>
-            <a:r>
-              <a:t>Silent</a:t>
-            </a:r>
-          </a:p>
-        </p:txBody>
-      </p:sp>
-      <p:sp>
-        <p:nvSpPr>
-          <p:cNvPr id="25" name="TextBox 24"/>
-          <p:cNvSpPr txBox="1"/>
-          <p:nvPr/>
-        </p:nvSpPr>
-        <p:spPr>
-          <a:xfrm>
-            <a:off x="6217920" y="1984248"/>
-            <a:ext cx="5212080" cy="502920"/>
-          </a:xfrm>
-          <a:prstGeom prst="rect">
-            <a:avLst/>
-          </a:prstGeom>
-          <a:noFill/>
-        </p:spPr>
-        <p:txBody>
-          <a:bodyPr wrap="square" anchor="t"/>
-          <a:lstStyle/>
-          <a:p>
-            <a:pPr algn="l">
-              <a:defRPr sz="1000" b="0">
-                <a:solidFill>
-                  <a:srgbClr val="333333"/>
-                </a:solidFill>
-                <a:latin typeface="Calibri"/>
-              </a:defRPr>
-            </a:pPr>
-            <a:r>
-              <a:t>No change in amino acid</a:t>
-            </a:r>
-          </a:p>
-          <a:p>
-            <a:pPr algn="l">
-              <a:defRPr sz="1000" b="0">
-                <a:solidFill>
-                  <a:srgbClr val="333333"/>
-                </a:solidFill>
-                <a:latin typeface="Calibri"/>
-              </a:defRPr>
-            </a:pPr>
-            <a:r>
-              <a:t>(due to codon redundancy)</a:t>
-            </a:r>
-          </a:p>
-        </p:txBody>
-      </p:sp>
-      <p:sp>
-        <p:nvSpPr>
-          <p:cNvPr id="26" name="Rounded Rectangle 25"/>
-          <p:cNvSpPr/>
-          <p:nvPr/>
-        </p:nvSpPr>
-        <p:spPr>
-          <a:xfrm>
-            <a:off x="5943600" y="2697480"/>
-            <a:ext cx="5669280" cy="960120"/>
-          </a:xfrm>
-          <a:prstGeom prst="roundRect">
-            <a:avLst/>
-          </a:prstGeom>
-          <a:solidFill>
-            <a:srgbClr val="FFFFFF"/>
-          </a:solidFill>
-          <a:ln w="12700">
-            <a:solidFill>
-              <a:srgbClr val="E0E0E0"/>
-            </a:solidFill>
-          </a:ln>
-        </p:spPr>
-        <p:style>
-          <a:lnRef idx="1">
-            <a:schemeClr val="accent1"/>
-          </a:lnRef>
-          <a:fillRef idx="3">
-            <a:schemeClr val="accent1"/>
-          </a:fillRef>
-          <a:effectRef idx="2">
-            <a:schemeClr val="accent1"/>
-          </a:effectRef>
-          <a:fontRef idx="minor">
-            <a:schemeClr val="lt1"/>
-          </a:fontRef>
-        </p:style>
-        <p:txBody>
-          <a:bodyPr rtlCol="0" anchor="ctr"/>
-          <a:lstStyle/>
-          <a:p>
-            <a:pPr algn="ctr"/>
-          </a:p>
-        </p:txBody>
-      </p:sp>
-      <p:sp>
-        <p:nvSpPr>
-          <p:cNvPr id="27" name="Rectangle 26"/>
-          <p:cNvSpPr/>
-          <p:nvPr/>
-        </p:nvSpPr>
-        <p:spPr>
-          <a:xfrm>
-            <a:off x="5943600" y="2697480"/>
-            <a:ext cx="73152" cy="960120"/>
-          </a:xfrm>
-          <a:prstGeom prst="rect">
-            <a:avLst/>
-          </a:prstGeom>
-          <a:solidFill>
-            <a:srgbClr val="1565C0"/>
-          </a:solidFill>
-          <a:ln>
-            <a:noFill/>
-          </a:ln>
-        </p:spPr>
-        <p:style>
-          <a:lnRef idx="1">
-            <a:schemeClr val="accent1"/>
-          </a:lnRef>
-          <a:fillRef idx="3">
-            <a:schemeClr val="accent1"/>
-          </a:fillRef>
-          <a:effectRef idx="2">
-            <a:schemeClr val="accent1"/>
-          </a:effectRef>
-          <a:fontRef idx="minor">
-            <a:schemeClr val="lt1"/>
-          </a:fontRef>
-        </p:style>
-        <p:txBody>
-          <a:bodyPr rtlCol="0" anchor="ctr"/>
-          <a:lstStyle/>
-          <a:p>
-            <a:pPr algn="ctr"/>
-          </a:p>
-        </p:txBody>
-      </p:sp>
-      <p:sp>
-        <p:nvSpPr>
-          <p:cNvPr id="28" name="TextBox 27"/>
-          <p:cNvSpPr txBox="1"/>
-          <p:nvPr/>
-        </p:nvSpPr>
-        <p:spPr>
-          <a:xfrm>
-            <a:off x="6217920" y="2788920"/>
-            <a:ext cx="5212080" cy="274320"/>
-          </a:xfrm>
-          <a:prstGeom prst="rect">
-            <a:avLst/>
-          </a:prstGeom>
-          <a:noFill/>
-        </p:spPr>
-        <p:txBody>
-          <a:bodyPr wrap="square" anchor="t"/>
-          <a:lstStyle/>
-          <a:p>
-            <a:pPr algn="l">
-              <a:defRPr sz="1300" b="1">
-                <a:solidFill>
-                  <a:srgbClr val="1565C0"/>
-                </a:solidFill>
-                <a:latin typeface="Calibri"/>
-              </a:defRPr>
-            </a:pPr>
-            <a:r>
-              <a:t>Missense</a:t>
-            </a:r>
-          </a:p>
-        </p:txBody>
-      </p:sp>
-      <p:sp>
-        <p:nvSpPr>
-          <p:cNvPr id="29" name="TextBox 28"/>
-          <p:cNvSpPr txBox="1"/>
-          <p:nvPr/>
-        </p:nvSpPr>
-        <p:spPr>
-          <a:xfrm>
-            <a:off x="6217920" y="3081528"/>
-            <a:ext cx="5212080" cy="502920"/>
-          </a:xfrm>
-          <a:prstGeom prst="rect">
-            <a:avLst/>
-          </a:prstGeom>
-          <a:noFill/>
-        </p:spPr>
-        <p:txBody>
-          <a:bodyPr wrap="square" anchor="t"/>
-          <a:lstStyle/>
-          <a:p>
-            <a:pPr algn="l">
-              <a:defRPr sz="1000" b="0">
-                <a:solidFill>
-                  <a:srgbClr val="333333"/>
-                </a:solidFill>
-                <a:latin typeface="Calibri"/>
-              </a:defRPr>
-            </a:pPr>
-            <a:r>
-              <a:t>Different amino acid produced</a:t>
-            </a:r>
-          </a:p>
-          <a:p>
-            <a:pPr algn="l">
-              <a:defRPr sz="1000" b="0">
-                <a:solidFill>
-                  <a:srgbClr val="333333"/>
-                </a:solidFill>
-                <a:latin typeface="Calibri"/>
-              </a:defRPr>
-            </a:pPr>
-            <a:r>
-              <a:t>May alter protein function</a:t>
-            </a:r>
-          </a:p>
-        </p:txBody>
-      </p:sp>
-      <p:sp>
-        <p:nvSpPr>
-          <p:cNvPr id="30" name="Rounded Rectangle 29"/>
-          <p:cNvSpPr/>
-          <p:nvPr/>
-        </p:nvSpPr>
-        <p:spPr>
-          <a:xfrm>
-            <a:off x="5943600" y="3794760"/>
-            <a:ext cx="5669280" cy="960120"/>
-          </a:xfrm>
-          <a:prstGeom prst="roundRect">
-            <a:avLst/>
-          </a:prstGeom>
-          <a:solidFill>
-            <a:srgbClr val="FFFFFF"/>
-          </a:solidFill>
-          <a:ln w="12700">
-            <a:solidFill>
-              <a:srgbClr val="E0E0E0"/>
-            </a:solidFill>
-          </a:ln>
-        </p:spPr>
-        <p:style>
-          <a:lnRef idx="1">
-            <a:schemeClr val="accent1"/>
-          </a:lnRef>
-          <a:fillRef idx="3">
-            <a:schemeClr val="accent1"/>
-          </a:fillRef>
-          <a:effectRef idx="2">
-            <a:schemeClr val="accent1"/>
-          </a:effectRef>
-          <a:fontRef idx="minor">
-            <a:schemeClr val="lt1"/>
-          </a:fontRef>
-        </p:style>
-        <p:txBody>
-          <a:bodyPr rtlCol="0" anchor="ctr"/>
-          <a:lstStyle/>
-          <a:p>
-            <a:pPr algn="ctr"/>
-          </a:p>
-        </p:txBody>
-      </p:sp>
-      <p:sp>
-        <p:nvSpPr>
-          <p:cNvPr id="31" name="Rectangle 30"/>
-          <p:cNvSpPr/>
-          <p:nvPr/>
-        </p:nvSpPr>
-        <p:spPr>
-          <a:xfrm>
-            <a:off x="5943600" y="3794760"/>
-            <a:ext cx="73152" cy="960120"/>
-          </a:xfrm>
-          <a:prstGeom prst="rect">
-            <a:avLst/>
-          </a:prstGeom>
-          <a:solidFill>
-            <a:srgbClr val="C62828"/>
-          </a:solidFill>
-          <a:ln>
-            <a:noFill/>
-          </a:ln>
-        </p:spPr>
-        <p:style>
-          <a:lnRef idx="1">
-            <a:schemeClr val="accent1"/>
-          </a:lnRef>
-          <a:fillRef idx="3">
-            <a:schemeClr val="accent1"/>
-          </a:fillRef>
-          <a:effectRef idx="2">
-            <a:schemeClr val="accent1"/>
-          </a:effectRef>
-          <a:fontRef idx="minor">
-            <a:schemeClr val="lt1"/>
-          </a:fontRef>
-        </p:style>
-        <p:txBody>
-          <a:bodyPr rtlCol="0" anchor="ctr"/>
-          <a:lstStyle/>
-          <a:p>
-            <a:pPr algn="ctr"/>
-          </a:p>
-        </p:txBody>
-      </p:sp>
-      <p:sp>
-        <p:nvSpPr>
-          <p:cNvPr id="32" name="TextBox 31"/>
-          <p:cNvSpPr txBox="1"/>
-          <p:nvPr/>
-        </p:nvSpPr>
-        <p:spPr>
-          <a:xfrm>
-            <a:off x="6217920" y="3886200"/>
-            <a:ext cx="5212080" cy="274320"/>
-          </a:xfrm>
-          <a:prstGeom prst="rect">
-            <a:avLst/>
-          </a:prstGeom>
-          <a:noFill/>
-        </p:spPr>
-        <p:txBody>
-          <a:bodyPr wrap="square" anchor="t"/>
-          <a:lstStyle/>
-          <a:p>
-            <a:pPr algn="l">
-              <a:defRPr sz="1300" b="1">
-                <a:solidFill>
-                  <a:srgbClr val="C62828"/>
-                </a:solidFill>
-                <a:latin typeface="Calibri"/>
-              </a:defRPr>
-            </a:pPr>
-            <a:r>
-              <a:t>Nonsense</a:t>
-            </a:r>
-          </a:p>
-        </p:txBody>
-      </p:sp>
-      <p:sp>
-        <p:nvSpPr>
-          <p:cNvPr id="33" name="TextBox 32"/>
-          <p:cNvSpPr txBox="1"/>
-          <p:nvPr/>
-        </p:nvSpPr>
-        <p:spPr>
-          <a:xfrm>
-            <a:off x="6217920" y="4178808"/>
-            <a:ext cx="5212080" cy="502920"/>
-          </a:xfrm>
-          <a:prstGeom prst="rect">
-            <a:avLst/>
-          </a:prstGeom>
-          <a:noFill/>
-        </p:spPr>
-        <p:txBody>
-          <a:bodyPr wrap="square" anchor="t"/>
-          <a:lstStyle/>
-          <a:p>
-            <a:pPr algn="l">
-              <a:defRPr sz="1000" b="0">
-                <a:solidFill>
-                  <a:srgbClr val="333333"/>
-                </a:solidFill>
-                <a:latin typeface="Calibri"/>
-              </a:defRPr>
-            </a:pPr>
-            <a:r>
-              <a:t>Premature stop codon created</a:t>
-            </a:r>
-          </a:p>
-          <a:p>
-            <a:pPr algn="l">
-              <a:defRPr sz="1000" b="0">
-                <a:solidFill>
-                  <a:srgbClr val="333333"/>
-                </a:solidFill>
-                <a:latin typeface="Calibri"/>
-              </a:defRPr>
-            </a:pPr>
-            <a:r>
-              <a:t>Truncated, non-functional protein</a:t>
-            </a:r>
-          </a:p>
-        </p:txBody>
-      </p:sp>
-      <p:sp>
-        <p:nvSpPr>
-          <p:cNvPr id="34" name="Rounded Rectangle 33"/>
-          <p:cNvSpPr/>
-          <p:nvPr/>
-        </p:nvSpPr>
-        <p:spPr>
-          <a:xfrm>
-            <a:off x="548640" y="4754880"/>
-            <a:ext cx="5029200" cy="1280160"/>
-          </a:xfrm>
-          <a:prstGeom prst="roundRect">
-            <a:avLst/>
-          </a:prstGeom>
-          <a:solidFill>
-            <a:srgbClr val="F0F0F0"/>
-          </a:solidFill>
-          <a:ln w="25400">
-            <a:solidFill>
-              <a:srgbClr val="999999"/>
-            </a:solidFill>
-          </a:ln>
-        </p:spPr>
-        <p:style>
-          <a:lnRef idx="1">
-            <a:schemeClr val="accent1"/>
-          </a:lnRef>
-          <a:fillRef idx="3">
-            <a:schemeClr val="accent1"/>
-          </a:fillRef>
-          <a:effectRef idx="2">
-            <a:schemeClr val="accent1"/>
-          </a:effectRef>
-          <a:fontRef idx="minor">
-            <a:schemeClr val="lt1"/>
-          </a:fontRef>
-        </p:style>
-        <p:txBody>
-          <a:bodyPr rtlCol="0" anchor="ctr" wrap="square"/>
-          <a:lstStyle/>
-          <a:p>
-            <a:pPr algn="ctr">
-              <a:defRPr sz="1100" b="0">
-                <a:solidFill>
-                  <a:srgbClr val="888888"/>
-                </a:solidFill>
-                <a:latin typeface="Calibri"/>
-              </a:defRPr>
-            </a:pPr>
-            <a:r>
-              <a:t>[Image Placeholder]</a:t>
-            </a:r>
-          </a:p>
-          <a:p>
-            <a:pPr algn="ctr">
-              <a:defRPr sz="1100" b="0">
-                <a:solidFill>
-                  <a:srgbClr val="888888"/>
-                </a:solidFill>
-                <a:latin typeface="Calibri"/>
-              </a:defRPr>
-            </a:pPr>
-            <a:r>
-              <a:t>Mutation Types Diagram</a:t>
-            </a:r>
-          </a:p>
-          <a:p>
-            <a:pPr algn="ctr">
-              <a:defRPr sz="1100" b="0">
-                <a:solidFill>
-                  <a:srgbClr val="888888"/>
-                </a:solidFill>
-                <a:latin typeface="Calibri"/>
-              </a:defRPr>
-            </a:pPr>
-            <a:r>
-              <a:t>(To be inserted)</a:t>
-            </a:r>
-          </a:p>
-        </p:txBody>
-      </p:sp>
-      <p:sp>
-        <p:nvSpPr>
-          <p:cNvPr id="35" name="Rounded Rectangle 34"/>
-          <p:cNvSpPr/>
-          <p:nvPr/>
-        </p:nvSpPr>
-        <p:spPr>
-          <a:xfrm>
-            <a:off x="5943600" y="4754880"/>
-            <a:ext cx="5669280" cy="1280160"/>
+            <a:off x="8229600" y="4846320"/>
+            <a:ext cx="3566160" cy="1143000"/>
           </a:xfrm>
           <a:prstGeom prst="roundRect">
             <a:avLst/>
@@ -35336,7 +34107,7 @@
           <a:lstStyle/>
           <a:p>
             <a:pPr algn="ctr">
-              <a:defRPr sz="1300" b="1">
+              <a:defRPr sz="1100" b="1">
                 <a:solidFill>
                   <a:srgbClr val="2E7D32"/>
                 </a:solidFill>
@@ -35344,12 +34115,12 @@
               </a:defRPr>
             </a:pPr>
             <a:r>
-              <a:t>When mutations cluster at specific positions</a:t>
+              <a:t>When mutations cluster at specific</a:t>
             </a:r>
           </a:p>
           <a:p>
             <a:pPr algn="ctr">
-              <a:defRPr sz="1300" b="1">
+              <a:defRPr sz="1100" b="1">
                 <a:solidFill>
                   <a:srgbClr val="2E7D32"/>
                 </a:solidFill>
@@ -35357,12 +34128,12 @@
               </a:defRPr>
             </a:pPr>
             <a:r>
-              <a:t>across many independent viral lineages,</a:t>
+              <a:t>positions across many lineages,</a:t>
             </a:r>
           </a:p>
           <a:p>
             <a:pPr algn="ctr">
-              <a:defRPr sz="1300" b="1">
+              <a:defRPr sz="1100" b="1">
                 <a:solidFill>
                   <a:srgbClr val="2E7D32"/>
                 </a:solidFill>
@@ -35370,7 +34141,7 @@
               </a:defRPr>
             </a:pPr>
             <a:r>
-              <a:t>these positions are called Mutation Hotspots.</a:t>
+              <a:t>they are called Mutation Hotspots.</a:t>
             </a:r>
           </a:p>
         </p:txBody>
@@ -35472,7 +34243,7 @@
       </p:sp>
       <p:pic>
         <p:nvPicPr>
-          <p:cNvPr id="4" name="Picture 3" descr="knu_symbol_white.png"/>
+          <p:cNvPr id="4" name="Picture 3" descr="knu_emblem_official.jpg"/>
           <p:cNvPicPr>
             <a:picLocks noChangeAspect="1"/>
           </p:cNvPicPr>
@@ -35579,8 +34350,8 @@
         </p:nvSpPr>
         <p:spPr>
           <a:xfrm>
-            <a:off x="11430000" y="6528816"/>
-            <a:ext cx="640080" cy="310896"/>
+            <a:off x="10789920" y="6528816"/>
+            <a:ext cx="1280160" cy="310896"/>
           </a:xfrm>
           <a:prstGeom prst="rect">
             <a:avLst/>
@@ -35600,7 +34371,7 @@
               </a:defRPr>
             </a:pPr>
             <a:r>
-              <a:t>6</a:t>
+              <a:t>—— 6</a:t>
             </a:r>
           </a:p>
         </p:txBody>
@@ -35614,7 +34385,7 @@
         <p:spPr>
           <a:xfrm>
             <a:off x="457200" y="1097280"/>
-            <a:ext cx="3566160" cy="3840480"/>
+            <a:ext cx="3566160" cy="4937760"/>
           </a:xfrm>
           <a:prstGeom prst="roundRect">
             <a:avLst/>
@@ -35736,7 +34507,7 @@
         <p:spPr>
           <a:xfrm>
             <a:off x="640080" y="1737360"/>
-            <a:ext cx="3200400" cy="3017520"/>
+            <a:ext cx="3200400" cy="2377440"/>
           </a:xfrm>
           <a:prstGeom prst="rect">
             <a:avLst/>
@@ -35844,8 +34615,63 @@
         </p:nvSpPr>
         <p:spPr>
           <a:xfrm>
+            <a:off x="640080" y="4206240"/>
+            <a:ext cx="3200400" cy="1691640"/>
+          </a:xfrm>
+          <a:prstGeom prst="roundRect">
+            <a:avLst/>
+          </a:prstGeom>
+          <a:solidFill>
+            <a:srgbClr val="F0F0F0"/>
+          </a:solidFill>
+          <a:ln w="25400">
+            <a:solidFill>
+              <a:srgbClr val="999999"/>
+            </a:solidFill>
+          </a:ln>
+        </p:spPr>
+        <p:style>
+          <a:lnRef idx="1">
+            <a:schemeClr val="accent1"/>
+          </a:lnRef>
+          <a:fillRef idx="3">
+            <a:schemeClr val="accent1"/>
+          </a:fillRef>
+          <a:effectRef idx="2">
+            <a:schemeClr val="accent1"/>
+          </a:effectRef>
+          <a:fontRef idx="minor">
+            <a:schemeClr val="lt1"/>
+          </a:fontRef>
+        </p:style>
+        <p:txBody>
+          <a:bodyPr rtlCol="0" anchor="ctr" wrap="square"/>
+          <a:lstStyle/>
+          <a:p>
+            <a:pPr algn="ctr">
+              <a:defRPr sz="1100" b="0">
+                <a:solidFill>
+                  <a:srgbClr val="888888"/>
+                </a:solidFill>
+                <a:latin typeface="Calibri"/>
+              </a:defRPr>
+            </a:pPr>
+            <a:r>
+              <a:t>[Positive selection diagram]</a:t>
+            </a:r>
+          </a:p>
+        </p:txBody>
+      </p:sp>
+      <p:sp>
+        <p:nvSpPr>
+          <p:cNvPr id="13" name="Rounded Rectangle 12"/>
+          <p:cNvSpPr/>
+          <p:nvPr/>
+        </p:nvSpPr>
+        <p:spPr>
+          <a:xfrm>
             <a:off x="4297680" y="1097280"/>
-            <a:ext cx="3566160" cy="3840480"/>
+            <a:ext cx="3566160" cy="4937760"/>
           </a:xfrm>
           <a:prstGeom prst="roundRect">
             <a:avLst/>
@@ -35883,7 +34709,7 @@
       </p:sp>
       <p:sp>
         <p:nvSpPr>
-          <p:cNvPr id="13" name="Rectangle 12"/>
+          <p:cNvPr id="14" name="Rectangle 13"/>
           <p:cNvSpPr/>
           <p:nvPr/>
         </p:nvSpPr>
@@ -35926,7 +34752,7 @@
       </p:sp>
       <p:sp>
         <p:nvSpPr>
-          <p:cNvPr id="14" name="TextBox 13"/>
+          <p:cNvPr id="15" name="TextBox 14"/>
           <p:cNvSpPr txBox="1"/>
           <p:nvPr/>
         </p:nvSpPr>
@@ -35960,14 +34786,14 @@
       </p:sp>
       <p:sp>
         <p:nvSpPr>
-          <p:cNvPr id="15" name="TextBox 14"/>
+          <p:cNvPr id="16" name="TextBox 15"/>
           <p:cNvSpPr txBox="1"/>
           <p:nvPr/>
         </p:nvSpPr>
         <p:spPr>
           <a:xfrm>
             <a:off x="4480560" y="1737360"/>
-            <a:ext cx="3200400" cy="3017520"/>
+            <a:ext cx="3200400" cy="2377440"/>
           </a:xfrm>
           <a:prstGeom prst="rect">
             <a:avLst/>
@@ -36069,14 +34895,69 @@
       </p:sp>
       <p:sp>
         <p:nvSpPr>
-          <p:cNvPr id="16" name="Rounded Rectangle 15"/>
+          <p:cNvPr id="17" name="Rounded Rectangle 16"/>
           <p:cNvSpPr/>
           <p:nvPr/>
         </p:nvSpPr>
         <p:spPr>
           <a:xfrm>
+            <a:off x="4480560" y="4206240"/>
+            <a:ext cx="3200400" cy="1691640"/>
+          </a:xfrm>
+          <a:prstGeom prst="roundRect">
+            <a:avLst/>
+          </a:prstGeom>
+          <a:solidFill>
+            <a:srgbClr val="F0F0F0"/>
+          </a:solidFill>
+          <a:ln w="25400">
+            <a:solidFill>
+              <a:srgbClr val="999999"/>
+            </a:solidFill>
+          </a:ln>
+        </p:spPr>
+        <p:style>
+          <a:lnRef idx="1">
+            <a:schemeClr val="accent1"/>
+          </a:lnRef>
+          <a:fillRef idx="3">
+            <a:schemeClr val="accent1"/>
+          </a:fillRef>
+          <a:effectRef idx="2">
+            <a:schemeClr val="accent1"/>
+          </a:effectRef>
+          <a:fontRef idx="minor">
+            <a:schemeClr val="lt1"/>
+          </a:fontRef>
+        </p:style>
+        <p:txBody>
+          <a:bodyPr rtlCol="0" anchor="ctr" wrap="square"/>
+          <a:lstStyle/>
+          <a:p>
+            <a:pPr algn="ctr">
+              <a:defRPr sz="1100" b="0">
+                <a:solidFill>
+                  <a:srgbClr val="888888"/>
+                </a:solidFill>
+                <a:latin typeface="Calibri"/>
+              </a:defRPr>
+            </a:pPr>
+            <a:r>
+              <a:t>[Purifying selection diagram]</a:t>
+            </a:r>
+          </a:p>
+        </p:txBody>
+      </p:sp>
+      <p:sp>
+        <p:nvSpPr>
+          <p:cNvPr id="18" name="Rounded Rectangle 17"/>
+          <p:cNvSpPr/>
+          <p:nvPr/>
+        </p:nvSpPr>
+        <p:spPr>
+          <a:xfrm>
             <a:off x="8138160" y="1097280"/>
-            <a:ext cx="3566160" cy="3840480"/>
+            <a:ext cx="3566160" cy="4937760"/>
           </a:xfrm>
           <a:prstGeom prst="roundRect">
             <a:avLst/>
@@ -36114,7 +34995,7 @@
       </p:sp>
       <p:sp>
         <p:nvSpPr>
-          <p:cNvPr id="17" name="Rectangle 16"/>
+          <p:cNvPr id="19" name="Rectangle 18"/>
           <p:cNvSpPr/>
           <p:nvPr/>
         </p:nvSpPr>
@@ -36157,7 +35038,7 @@
       </p:sp>
       <p:sp>
         <p:nvSpPr>
-          <p:cNvPr id="18" name="TextBox 17"/>
+          <p:cNvPr id="20" name="TextBox 19"/>
           <p:cNvSpPr txBox="1"/>
           <p:nvPr/>
         </p:nvSpPr>
@@ -36191,14 +35072,14 @@
       </p:sp>
       <p:sp>
         <p:nvSpPr>
-          <p:cNvPr id="19" name="TextBox 18"/>
+          <p:cNvPr id="21" name="TextBox 20"/>
           <p:cNvSpPr txBox="1"/>
           <p:nvPr/>
         </p:nvSpPr>
         <p:spPr>
           <a:xfrm>
             <a:off x="8321040" y="1737360"/>
-            <a:ext cx="3200400" cy="3017520"/>
+            <a:ext cx="3200400" cy="2377440"/>
           </a:xfrm>
           <a:prstGeom prst="rect">
             <a:avLst/>
@@ -36300,14 +35181,14 @@
       </p:sp>
       <p:sp>
         <p:nvSpPr>
-          <p:cNvPr id="20" name="Rounded Rectangle 19"/>
+          <p:cNvPr id="22" name="Rounded Rectangle 21"/>
           <p:cNvSpPr/>
           <p:nvPr/>
         </p:nvSpPr>
         <p:spPr>
           <a:xfrm>
-            <a:off x="457200" y="5166360"/>
-            <a:ext cx="11247120" cy="960120"/>
+            <a:off x="8321040" y="4206240"/>
+            <a:ext cx="3200400" cy="1691640"/>
           </a:xfrm>
           <a:prstGeom prst="roundRect">
             <a:avLst/>
@@ -36348,7 +35229,7 @@
               </a:defRPr>
             </a:pPr>
             <a:r>
-              <a:t>[Image Placeholder]  Virus Evolution / Phylogenetic Tree Diagram  (To be inserted)</a:t>
+              <a:t>[Convergent evolution diagram]</a:t>
             </a:r>
           </a:p>
         </p:txBody>
@@ -36450,7 +35331,7 @@
       </p:sp>
       <p:pic>
         <p:nvPicPr>
-          <p:cNvPr id="4" name="Picture 3" descr="knu_symbol_white.png"/>
+          <p:cNvPr id="4" name="Picture 3" descr="knu_emblem_official.jpg"/>
           <p:cNvPicPr>
             <a:picLocks noChangeAspect="1"/>
           </p:cNvPicPr>
@@ -36557,8 +35438,8 @@
         </p:nvSpPr>
         <p:spPr>
           <a:xfrm>
-            <a:off x="11430000" y="6528816"/>
-            <a:ext cx="640080" cy="310896"/>
+            <a:off x="10789920" y="6528816"/>
+            <a:ext cx="1280160" cy="310896"/>
           </a:xfrm>
           <a:prstGeom prst="rect">
             <a:avLst/>
@@ -36578,7 +35459,7 @@
               </a:defRPr>
             </a:pPr>
             <a:r>
-              <a:t>7</a:t>
+              <a:t>—— 7</a:t>
             </a:r>
           </a:p>
         </p:txBody>
@@ -36591,19 +35472,17 @@
         </p:nvSpPr>
         <p:spPr>
           <a:xfrm>
-            <a:off x="548640" y="1005840"/>
-            <a:ext cx="11064240" cy="3200400"/>
+            <a:off x="365760" y="1188720"/>
+            <a:ext cx="2011680" cy="1371600"/>
           </a:xfrm>
           <a:prstGeom prst="roundRect">
             <a:avLst/>
           </a:prstGeom>
           <a:solidFill>
-            <a:srgbClr val="F0F0F0"/>
+            <a:srgbClr val="C62828"/>
           </a:solidFill>
-          <a:ln w="25400">
-            <a:solidFill>
-              <a:srgbClr val="999999"/>
-            </a:solidFill>
+          <a:ln>
+            <a:noFill/>
           </a:ln>
         </p:spPr>
         <p:style>
@@ -36627,66 +35506,881 @@
             <a:pPr algn="ctr">
               <a:defRPr sz="1100" b="0">
                 <a:solidFill>
-                  <a:srgbClr val="888888"/>
-                </a:solidFill>
-                <a:latin typeface="Calibri"/>
-              </a:defRPr>
-            </a:pPr>
-            <a:r>
-              <a:t>[Image Placeholder]</a:t>
+                  <a:srgbClr val="FFFFFF"/>
+                </a:solidFill>
+                <a:latin typeface="Calibri"/>
+              </a:defRPr>
+            </a:pPr>
+            <a:r>
+              <a:t>Problem</a:t>
             </a:r>
           </a:p>
           <a:p>
             <a:pPr algn="ctr">
               <a:defRPr sz="1100" b="0">
                 <a:solidFill>
-                  <a:srgbClr val="888888"/>
-                </a:solidFill>
-                <a:latin typeface="Calibri"/>
-              </a:defRPr>
-            </a:pPr>
-            <a:r>
-              <a:t>MutBench Research Overview - Full Pipeline Diagram</a:t>
-            </a:r>
+                  <a:srgbClr val="FFFFFF"/>
+                </a:solidFill>
+                <a:latin typeface="Calibri"/>
+              </a:defRPr>
+            </a:pPr>
           </a:p>
           <a:p>
             <a:pPr algn="ctr">
               <a:defRPr sz="1100" b="0">
                 <a:solidFill>
-                  <a:srgbClr val="888888"/>
-                </a:solidFill>
-                <a:latin typeface="Calibri"/>
-              </a:defRPr>
-            </a:pPr>
-            <a:r>
-              <a:t>Problem -&gt; MutBench Framework -&gt; Stage 1 &amp; 2 Results -&gt; PAHD</a:t>
+                  <a:srgbClr val="FFFFFF"/>
+                </a:solidFill>
+                <a:latin typeface="Calibri"/>
+              </a:defRPr>
+            </a:pPr>
+            <a:r>
+              <a:t>No benchmark for</a:t>
             </a:r>
           </a:p>
           <a:p>
             <a:pPr algn="ctr">
               <a:defRPr sz="1100" b="0">
                 <a:solidFill>
-                  <a:srgbClr val="888888"/>
-                </a:solidFill>
-                <a:latin typeface="Calibri"/>
-              </a:defRPr>
-            </a:pPr>
-            <a:r>
-              <a:t>(To be inserted)</a:t>
-            </a:r>
-          </a:p>
-        </p:txBody>
-      </p:sp>
-      <p:sp>
-        <p:nvSpPr>
-          <p:cNvPr id="9" name="Rounded Rectangle 8"/>
+                  <a:srgbClr val="FFFFFF"/>
+                </a:solidFill>
+                <a:latin typeface="Calibri"/>
+              </a:defRPr>
+            </a:pPr>
+            <a:r>
+              <a:t>hotspot detection</a:t>
+            </a:r>
+          </a:p>
+        </p:txBody>
+      </p:sp>
+      <p:sp>
+        <p:nvSpPr>
+          <p:cNvPr id="9" name="TextBox 8"/>
+          <p:cNvSpPr txBox="1"/>
+          <p:nvPr/>
+        </p:nvSpPr>
+        <p:spPr>
+          <a:xfrm>
+            <a:off x="365760" y="1280160"/>
+            <a:ext cx="2011680" cy="320040"/>
+          </a:xfrm>
+          <a:prstGeom prst="rect">
+            <a:avLst/>
+          </a:prstGeom>
+          <a:noFill/>
+        </p:spPr>
+        <p:txBody>
+          <a:bodyPr wrap="square" anchor="t"/>
+          <a:lstStyle/>
+          <a:p>
+            <a:pPr algn="ctr">
+              <a:defRPr sz="1300" b="1">
+                <a:solidFill>
+                  <a:srgbClr val="FFFFFF"/>
+                </a:solidFill>
+                <a:latin typeface="Calibri"/>
+              </a:defRPr>
+            </a:pPr>
+            <a:r>
+              <a:t>Problem</a:t>
+            </a:r>
+          </a:p>
+        </p:txBody>
+      </p:sp>
+      <p:sp>
+        <p:nvSpPr>
+          <p:cNvPr id="10" name="TextBox 9"/>
+          <p:cNvSpPr txBox="1"/>
+          <p:nvPr/>
+        </p:nvSpPr>
+        <p:spPr>
+          <a:xfrm>
+            <a:off x="2377440" y="1554480"/>
+            <a:ext cx="365760" cy="457200"/>
+          </a:xfrm>
+          <a:prstGeom prst="rect">
+            <a:avLst/>
+          </a:prstGeom>
+          <a:noFill/>
+        </p:spPr>
+        <p:txBody>
+          <a:bodyPr wrap="square" anchor="t"/>
+          <a:lstStyle/>
+          <a:p>
+            <a:pPr algn="ctr">
+              <a:defRPr sz="2400" b="1">
+                <a:solidFill>
+                  <a:srgbClr val="333333"/>
+                </a:solidFill>
+                <a:latin typeface="Calibri"/>
+              </a:defRPr>
+            </a:pPr>
+            <a:r>
+              <a:t>→</a:t>
+            </a:r>
+          </a:p>
+        </p:txBody>
+      </p:sp>
+      <p:sp>
+        <p:nvSpPr>
+          <p:cNvPr id="11" name="Rounded Rectangle 10"/>
           <p:cNvSpPr/>
           <p:nvPr/>
         </p:nvSpPr>
         <p:spPr>
           <a:xfrm>
-            <a:off x="365760" y="4480560"/>
-            <a:ext cx="2148840" cy="1645920"/>
+            <a:off x="2743200" y="1188720"/>
+            <a:ext cx="2011680" cy="1371600"/>
+          </a:xfrm>
+          <a:prstGeom prst="roundRect">
+            <a:avLst/>
+          </a:prstGeom>
+          <a:solidFill>
+            <a:srgbClr val="1565C0"/>
+          </a:solidFill>
+          <a:ln>
+            <a:noFill/>
+          </a:ln>
+        </p:spPr>
+        <p:style>
+          <a:lnRef idx="1">
+            <a:schemeClr val="accent1"/>
+          </a:lnRef>
+          <a:fillRef idx="3">
+            <a:schemeClr val="accent1"/>
+          </a:fillRef>
+          <a:effectRef idx="2">
+            <a:schemeClr val="accent1"/>
+          </a:effectRef>
+          <a:fontRef idx="minor">
+            <a:schemeClr val="lt1"/>
+          </a:fontRef>
+        </p:style>
+        <p:txBody>
+          <a:bodyPr rtlCol="0" anchor="ctr" wrap="square"/>
+          <a:lstStyle/>
+          <a:p>
+            <a:pPr algn="ctr">
+              <a:defRPr sz="1100" b="0">
+                <a:solidFill>
+                  <a:srgbClr val="FFFFFF"/>
+                </a:solidFill>
+                <a:latin typeface="Calibri"/>
+              </a:defRPr>
+            </a:pPr>
+            <a:r>
+              <a:t>MutBench</a:t>
+            </a:r>
+          </a:p>
+          <a:p>
+            <a:pPr algn="ctr">
+              <a:defRPr sz="1100" b="0">
+                <a:solidFill>
+                  <a:srgbClr val="FFFFFF"/>
+                </a:solidFill>
+                <a:latin typeface="Calibri"/>
+              </a:defRPr>
+            </a:pPr>
+          </a:p>
+          <a:p>
+            <a:pPr algn="ctr">
+              <a:defRPr sz="1100" b="0">
+                <a:solidFill>
+                  <a:srgbClr val="FFFFFF"/>
+                </a:solidFill>
+                <a:latin typeface="Calibri"/>
+              </a:defRPr>
+            </a:pPr>
+            <a:r>
+              <a:t>3-Layer GT</a:t>
+            </a:r>
+          </a:p>
+          <a:p>
+            <a:pPr algn="ctr">
+              <a:defRPr sz="1100" b="0">
+                <a:solidFill>
+                  <a:srgbClr val="FFFFFF"/>
+                </a:solidFill>
+                <a:latin typeface="Calibri"/>
+              </a:defRPr>
+            </a:pPr>
+            <a:r>
+              <a:t>9 Scoring</a:t>
+            </a:r>
+          </a:p>
+          <a:p>
+            <a:pPr algn="ctr">
+              <a:defRPr sz="1100" b="0">
+                <a:solidFill>
+                  <a:srgbClr val="FFFFFF"/>
+                </a:solidFill>
+                <a:latin typeface="Calibri"/>
+              </a:defRPr>
+            </a:pPr>
+            <a:r>
+              <a:t>39 Detection</a:t>
+            </a:r>
+          </a:p>
+        </p:txBody>
+      </p:sp>
+      <p:sp>
+        <p:nvSpPr>
+          <p:cNvPr id="12" name="TextBox 11"/>
+          <p:cNvSpPr txBox="1"/>
+          <p:nvPr/>
+        </p:nvSpPr>
+        <p:spPr>
+          <a:xfrm>
+            <a:off x="2743200" y="1280160"/>
+            <a:ext cx="2011680" cy="320040"/>
+          </a:xfrm>
+          <a:prstGeom prst="rect">
+            <a:avLst/>
+          </a:prstGeom>
+          <a:noFill/>
+        </p:spPr>
+        <p:txBody>
+          <a:bodyPr wrap="square" anchor="t"/>
+          <a:lstStyle/>
+          <a:p>
+            <a:pPr algn="ctr">
+              <a:defRPr sz="1300" b="1">
+                <a:solidFill>
+                  <a:srgbClr val="FFFFFF"/>
+                </a:solidFill>
+                <a:latin typeface="Calibri"/>
+              </a:defRPr>
+            </a:pPr>
+            <a:r>
+              <a:t>MutBench</a:t>
+            </a:r>
+          </a:p>
+        </p:txBody>
+      </p:sp>
+      <p:sp>
+        <p:nvSpPr>
+          <p:cNvPr id="13" name="TextBox 12"/>
+          <p:cNvSpPr txBox="1"/>
+          <p:nvPr/>
+        </p:nvSpPr>
+        <p:spPr>
+          <a:xfrm>
+            <a:off x="4754880" y="1554480"/>
+            <a:ext cx="365760" cy="457200"/>
+          </a:xfrm>
+          <a:prstGeom prst="rect">
+            <a:avLst/>
+          </a:prstGeom>
+          <a:noFill/>
+        </p:spPr>
+        <p:txBody>
+          <a:bodyPr wrap="square" anchor="t"/>
+          <a:lstStyle/>
+          <a:p>
+            <a:pPr algn="ctr">
+              <a:defRPr sz="2400" b="1">
+                <a:solidFill>
+                  <a:srgbClr val="333333"/>
+                </a:solidFill>
+                <a:latin typeface="Calibri"/>
+              </a:defRPr>
+            </a:pPr>
+            <a:r>
+              <a:t>→</a:t>
+            </a:r>
+          </a:p>
+        </p:txBody>
+      </p:sp>
+      <p:sp>
+        <p:nvSpPr>
+          <p:cNvPr id="14" name="Rounded Rectangle 13"/>
+          <p:cNvSpPr/>
+          <p:nvPr/>
+        </p:nvSpPr>
+        <p:spPr>
+          <a:xfrm>
+            <a:off x="5120640" y="1188720"/>
+            <a:ext cx="2011680" cy="1371600"/>
+          </a:xfrm>
+          <a:prstGeom prst="roundRect">
+            <a:avLst/>
+          </a:prstGeom>
+          <a:solidFill>
+            <a:srgbClr val="2E7D32"/>
+          </a:solidFill>
+          <a:ln>
+            <a:noFill/>
+          </a:ln>
+        </p:spPr>
+        <p:style>
+          <a:lnRef idx="1">
+            <a:schemeClr val="accent1"/>
+          </a:lnRef>
+          <a:fillRef idx="3">
+            <a:schemeClr val="accent1"/>
+          </a:fillRef>
+          <a:effectRef idx="2">
+            <a:schemeClr val="accent1"/>
+          </a:effectRef>
+          <a:fontRef idx="minor">
+            <a:schemeClr val="lt1"/>
+          </a:fontRef>
+        </p:style>
+        <p:txBody>
+          <a:bodyPr rtlCol="0" anchor="ctr" wrap="square"/>
+          <a:lstStyle/>
+          <a:p>
+            <a:pPr algn="ctr">
+              <a:defRPr sz="1100" b="0">
+                <a:solidFill>
+                  <a:srgbClr val="FFFFFF"/>
+                </a:solidFill>
+                <a:latin typeface="Calibri"/>
+              </a:defRPr>
+            </a:pPr>
+            <a:r>
+              <a:t>Stage 1</a:t>
+            </a:r>
+          </a:p>
+          <a:p>
+            <a:pPr algn="ctr">
+              <a:defRPr sz="1100" b="0">
+                <a:solidFill>
+                  <a:srgbClr val="FFFFFF"/>
+                </a:solidFill>
+                <a:latin typeface="Calibri"/>
+              </a:defRPr>
+            </a:pPr>
+          </a:p>
+          <a:p>
+            <a:pPr algn="ctr">
+              <a:defRPr sz="1100" b="0">
+                <a:solidFill>
+                  <a:srgbClr val="FFFFFF"/>
+                </a:solidFill>
+                <a:latin typeface="Calibri"/>
+              </a:defRPr>
+            </a:pPr>
+            <a:r>
+              <a:t>SARS-CoV-2</a:t>
+            </a:r>
+          </a:p>
+          <a:p>
+            <a:pPr algn="ctr">
+              <a:defRPr sz="1100" b="0">
+                <a:solidFill>
+                  <a:srgbClr val="FFFFFF"/>
+                </a:solidFill>
+                <a:latin typeface="Calibri"/>
+              </a:defRPr>
+            </a:pPr>
+            <a:r>
+              <a:t>depth analysis</a:t>
+            </a:r>
+          </a:p>
+        </p:txBody>
+      </p:sp>
+      <p:sp>
+        <p:nvSpPr>
+          <p:cNvPr id="15" name="TextBox 14"/>
+          <p:cNvSpPr txBox="1"/>
+          <p:nvPr/>
+        </p:nvSpPr>
+        <p:spPr>
+          <a:xfrm>
+            <a:off x="5120640" y="1280160"/>
+            <a:ext cx="2011680" cy="320040"/>
+          </a:xfrm>
+          <a:prstGeom prst="rect">
+            <a:avLst/>
+          </a:prstGeom>
+          <a:noFill/>
+        </p:spPr>
+        <p:txBody>
+          <a:bodyPr wrap="square" anchor="t"/>
+          <a:lstStyle/>
+          <a:p>
+            <a:pPr algn="ctr">
+              <a:defRPr sz="1300" b="1">
+                <a:solidFill>
+                  <a:srgbClr val="FFFFFF"/>
+                </a:solidFill>
+                <a:latin typeface="Calibri"/>
+              </a:defRPr>
+            </a:pPr>
+            <a:r>
+              <a:t>Stage 1</a:t>
+            </a:r>
+          </a:p>
+        </p:txBody>
+      </p:sp>
+      <p:sp>
+        <p:nvSpPr>
+          <p:cNvPr id="16" name="TextBox 15"/>
+          <p:cNvSpPr txBox="1"/>
+          <p:nvPr/>
+        </p:nvSpPr>
+        <p:spPr>
+          <a:xfrm>
+            <a:off x="7132320" y="1554480"/>
+            <a:ext cx="365760" cy="457200"/>
+          </a:xfrm>
+          <a:prstGeom prst="rect">
+            <a:avLst/>
+          </a:prstGeom>
+          <a:noFill/>
+        </p:spPr>
+        <p:txBody>
+          <a:bodyPr wrap="square" anchor="t"/>
+          <a:lstStyle/>
+          <a:p>
+            <a:pPr algn="ctr">
+              <a:defRPr sz="2400" b="1">
+                <a:solidFill>
+                  <a:srgbClr val="333333"/>
+                </a:solidFill>
+                <a:latin typeface="Calibri"/>
+              </a:defRPr>
+            </a:pPr>
+            <a:r>
+              <a:t>→</a:t>
+            </a:r>
+          </a:p>
+        </p:txBody>
+      </p:sp>
+      <p:sp>
+        <p:nvSpPr>
+          <p:cNvPr id="17" name="Rounded Rectangle 16"/>
+          <p:cNvSpPr/>
+          <p:nvPr/>
+        </p:nvSpPr>
+        <p:spPr>
+          <a:xfrm>
+            <a:off x="7498080" y="1188720"/>
+            <a:ext cx="2011680" cy="1371600"/>
+          </a:xfrm>
+          <a:prstGeom prst="roundRect">
+            <a:avLst/>
+          </a:prstGeom>
+          <a:solidFill>
+            <a:srgbClr val="E65100"/>
+          </a:solidFill>
+          <a:ln>
+            <a:noFill/>
+          </a:ln>
+        </p:spPr>
+        <p:style>
+          <a:lnRef idx="1">
+            <a:schemeClr val="accent1"/>
+          </a:lnRef>
+          <a:fillRef idx="3">
+            <a:schemeClr val="accent1"/>
+          </a:fillRef>
+          <a:effectRef idx="2">
+            <a:schemeClr val="accent1"/>
+          </a:effectRef>
+          <a:fontRef idx="minor">
+            <a:schemeClr val="lt1"/>
+          </a:fontRef>
+        </p:style>
+        <p:txBody>
+          <a:bodyPr rtlCol="0" anchor="ctr" wrap="square"/>
+          <a:lstStyle/>
+          <a:p>
+            <a:pPr algn="ctr">
+              <a:defRPr sz="1100" b="0">
+                <a:solidFill>
+                  <a:srgbClr val="FFFFFF"/>
+                </a:solidFill>
+                <a:latin typeface="Calibri"/>
+              </a:defRPr>
+            </a:pPr>
+            <a:r>
+              <a:t>Stage 2</a:t>
+            </a:r>
+          </a:p>
+          <a:p>
+            <a:pPr algn="ctr">
+              <a:defRPr sz="1100" b="0">
+                <a:solidFill>
+                  <a:srgbClr val="FFFFFF"/>
+                </a:solidFill>
+                <a:latin typeface="Calibri"/>
+              </a:defRPr>
+            </a:pPr>
+          </a:p>
+          <a:p>
+            <a:pPr algn="ctr">
+              <a:defRPr sz="1100" b="0">
+                <a:solidFill>
+                  <a:srgbClr val="FFFFFF"/>
+                </a:solidFill>
+                <a:latin typeface="Calibri"/>
+              </a:defRPr>
+            </a:pPr>
+            <a:r>
+              <a:t>9 pathogens</a:t>
+            </a:r>
+          </a:p>
+          <a:p>
+            <a:pPr algn="ctr">
+              <a:defRPr sz="1100" b="0">
+                <a:solidFill>
+                  <a:srgbClr val="FFFFFF"/>
+                </a:solidFill>
+                <a:latin typeface="Calibri"/>
+              </a:defRPr>
+            </a:pPr>
+            <a:r>
+              <a:t>2,544 evaluations</a:t>
+            </a:r>
+          </a:p>
+        </p:txBody>
+      </p:sp>
+      <p:sp>
+        <p:nvSpPr>
+          <p:cNvPr id="18" name="TextBox 17"/>
+          <p:cNvSpPr txBox="1"/>
+          <p:nvPr/>
+        </p:nvSpPr>
+        <p:spPr>
+          <a:xfrm>
+            <a:off x="7498080" y="1280160"/>
+            <a:ext cx="2011680" cy="320040"/>
+          </a:xfrm>
+          <a:prstGeom prst="rect">
+            <a:avLst/>
+          </a:prstGeom>
+          <a:noFill/>
+        </p:spPr>
+        <p:txBody>
+          <a:bodyPr wrap="square" anchor="t"/>
+          <a:lstStyle/>
+          <a:p>
+            <a:pPr algn="ctr">
+              <a:defRPr sz="1300" b="1">
+                <a:solidFill>
+                  <a:srgbClr val="FFFFFF"/>
+                </a:solidFill>
+                <a:latin typeface="Calibri"/>
+              </a:defRPr>
+            </a:pPr>
+            <a:r>
+              <a:t>Stage 2</a:t>
+            </a:r>
+          </a:p>
+        </p:txBody>
+      </p:sp>
+      <p:sp>
+        <p:nvSpPr>
+          <p:cNvPr id="19" name="TextBox 18"/>
+          <p:cNvSpPr txBox="1"/>
+          <p:nvPr/>
+        </p:nvSpPr>
+        <p:spPr>
+          <a:xfrm>
+            <a:off x="9509760" y="1554480"/>
+            <a:ext cx="365760" cy="457200"/>
+          </a:xfrm>
+          <a:prstGeom prst="rect">
+            <a:avLst/>
+          </a:prstGeom>
+          <a:noFill/>
+        </p:spPr>
+        <p:txBody>
+          <a:bodyPr wrap="square" anchor="t"/>
+          <a:lstStyle/>
+          <a:p>
+            <a:pPr algn="ctr">
+              <a:defRPr sz="2400" b="1">
+                <a:solidFill>
+                  <a:srgbClr val="333333"/>
+                </a:solidFill>
+                <a:latin typeface="Calibri"/>
+              </a:defRPr>
+            </a:pPr>
+            <a:r>
+              <a:t>→</a:t>
+            </a:r>
+          </a:p>
+        </p:txBody>
+      </p:sp>
+      <p:sp>
+        <p:nvSpPr>
+          <p:cNvPr id="20" name="Rounded Rectangle 19"/>
+          <p:cNvSpPr/>
+          <p:nvPr/>
+        </p:nvSpPr>
+        <p:spPr>
+          <a:xfrm>
+            <a:off x="9875520" y="1188720"/>
+            <a:ext cx="2011680" cy="1371600"/>
+          </a:xfrm>
+          <a:prstGeom prst="roundRect">
+            <a:avLst/>
+          </a:prstGeom>
+          <a:solidFill>
+            <a:srgbClr val="6A1B9A"/>
+          </a:solidFill>
+          <a:ln>
+            <a:noFill/>
+          </a:ln>
+        </p:spPr>
+        <p:style>
+          <a:lnRef idx="1">
+            <a:schemeClr val="accent1"/>
+          </a:lnRef>
+          <a:fillRef idx="3">
+            <a:schemeClr val="accent1"/>
+          </a:fillRef>
+          <a:effectRef idx="2">
+            <a:schemeClr val="accent1"/>
+          </a:effectRef>
+          <a:fontRef idx="minor">
+            <a:schemeClr val="lt1"/>
+          </a:fontRef>
+        </p:style>
+        <p:txBody>
+          <a:bodyPr rtlCol="0" anchor="ctr" wrap="square"/>
+          <a:lstStyle/>
+          <a:p>
+            <a:pPr algn="ctr">
+              <a:defRPr sz="1100" b="0">
+                <a:solidFill>
+                  <a:srgbClr val="FFFFFF"/>
+                </a:solidFill>
+                <a:latin typeface="Calibri"/>
+              </a:defRPr>
+            </a:pPr>
+            <a:r>
+              <a:t>Finding</a:t>
+            </a:r>
+          </a:p>
+          <a:p>
+            <a:pPr algn="ctr">
+              <a:defRPr sz="1100" b="0">
+                <a:solidFill>
+                  <a:srgbClr val="FFFFFF"/>
+                </a:solidFill>
+                <a:latin typeface="Calibri"/>
+              </a:defRPr>
+            </a:pPr>
+          </a:p>
+          <a:p>
+            <a:pPr algn="ctr">
+              <a:defRPr sz="1100" b="0">
+                <a:solidFill>
+                  <a:srgbClr val="FFFFFF"/>
+                </a:solidFill>
+                <a:latin typeface="Calibri"/>
+              </a:defRPr>
+            </a:pPr>
+            <a:r>
+              <a:t>No universal best</a:t>
+            </a:r>
+          </a:p>
+          <a:p>
+            <a:pPr algn="ctr">
+              <a:defRPr sz="1100" b="0">
+                <a:solidFill>
+                  <a:srgbClr val="FFFFFF"/>
+                </a:solidFill>
+                <a:latin typeface="Calibri"/>
+              </a:defRPr>
+            </a:pPr>
+            <a:r>
+              <a:t>ω² = 0.285</a:t>
+            </a:r>
+          </a:p>
+        </p:txBody>
+      </p:sp>
+      <p:sp>
+        <p:nvSpPr>
+          <p:cNvPr id="21" name="TextBox 20"/>
+          <p:cNvSpPr txBox="1"/>
+          <p:nvPr/>
+        </p:nvSpPr>
+        <p:spPr>
+          <a:xfrm>
+            <a:off x="9875520" y="1280160"/>
+            <a:ext cx="2011680" cy="320040"/>
+          </a:xfrm>
+          <a:prstGeom prst="rect">
+            <a:avLst/>
+          </a:prstGeom>
+          <a:noFill/>
+        </p:spPr>
+        <p:txBody>
+          <a:bodyPr wrap="square" anchor="t"/>
+          <a:lstStyle/>
+          <a:p>
+            <a:pPr algn="ctr">
+              <a:defRPr sz="1300" b="1">
+                <a:solidFill>
+                  <a:srgbClr val="FFFFFF"/>
+                </a:solidFill>
+                <a:latin typeface="Calibri"/>
+              </a:defRPr>
+            </a:pPr>
+            <a:r>
+              <a:t>Finding</a:t>
+            </a:r>
+          </a:p>
+        </p:txBody>
+      </p:sp>
+      <p:sp>
+        <p:nvSpPr>
+          <p:cNvPr id="22" name="Rectangle 21"/>
+          <p:cNvSpPr/>
+          <p:nvPr/>
+        </p:nvSpPr>
+        <p:spPr>
+          <a:xfrm>
+            <a:off x="1828800" y="2834640"/>
+            <a:ext cx="8503920" cy="36576"/>
+          </a:xfrm>
+          <a:prstGeom prst="rect">
+            <a:avLst/>
+          </a:prstGeom>
+          <a:solidFill>
+            <a:srgbClr val="1B2A4A"/>
+          </a:solidFill>
+          <a:ln>
+            <a:noFill/>
+          </a:ln>
+        </p:spPr>
+        <p:style>
+          <a:lnRef idx="1">
+            <a:schemeClr val="accent1"/>
+          </a:lnRef>
+          <a:fillRef idx="3">
+            <a:schemeClr val="accent1"/>
+          </a:fillRef>
+          <a:effectRef idx="2">
+            <a:schemeClr val="accent1"/>
+          </a:effectRef>
+          <a:fontRef idx="minor">
+            <a:schemeClr val="lt1"/>
+          </a:fontRef>
+        </p:style>
+        <p:txBody>
+          <a:bodyPr rtlCol="0" anchor="ctr"/>
+          <a:lstStyle/>
+          <a:p>
+            <a:pPr algn="ctr"/>
+          </a:p>
+        </p:txBody>
+      </p:sp>
+      <p:sp>
+        <p:nvSpPr>
+          <p:cNvPr id="23" name="TextBox 22"/>
+          <p:cNvSpPr txBox="1"/>
+          <p:nvPr/>
+        </p:nvSpPr>
+        <p:spPr>
+          <a:xfrm>
+            <a:off x="5623560" y="2743200"/>
+            <a:ext cx="914400" cy="457200"/>
+          </a:xfrm>
+          <a:prstGeom prst="rect">
+            <a:avLst/>
+          </a:prstGeom>
+          <a:noFill/>
+        </p:spPr>
+        <p:txBody>
+          <a:bodyPr wrap="square" anchor="t"/>
+          <a:lstStyle/>
+          <a:p>
+            <a:pPr algn="ctr">
+              <a:defRPr sz="2000" b="1">
+                <a:solidFill>
+                  <a:srgbClr val="1B2A4A"/>
+                </a:solidFill>
+                <a:latin typeface="Calibri"/>
+              </a:defRPr>
+            </a:pPr>
+            <a:r>
+              <a:t>▼</a:t>
+            </a:r>
+          </a:p>
+        </p:txBody>
+      </p:sp>
+      <p:sp>
+        <p:nvSpPr>
+          <p:cNvPr id="24" name="Rounded Rectangle 23"/>
+          <p:cNvSpPr/>
+          <p:nvPr/>
+        </p:nvSpPr>
+        <p:spPr>
+          <a:xfrm>
+            <a:off x="3200400" y="3108960"/>
+            <a:ext cx="5760720" cy="1097280"/>
+          </a:xfrm>
+          <a:prstGeom prst="roundRect">
+            <a:avLst/>
+          </a:prstGeom>
+          <a:solidFill>
+            <a:srgbClr val="1B2A4A"/>
+          </a:solidFill>
+          <a:ln>
+            <a:noFill/>
+          </a:ln>
+        </p:spPr>
+        <p:style>
+          <a:lnRef idx="1">
+            <a:schemeClr val="accent1"/>
+          </a:lnRef>
+          <a:fillRef idx="3">
+            <a:schemeClr val="accent1"/>
+          </a:fillRef>
+          <a:effectRef idx="2">
+            <a:schemeClr val="accent1"/>
+          </a:effectRef>
+          <a:fontRef idx="minor">
+            <a:schemeClr val="lt1"/>
+          </a:fontRef>
+        </p:style>
+        <p:txBody>
+          <a:bodyPr rtlCol="0" anchor="ctr" wrap="square"/>
+          <a:lstStyle/>
+          <a:p>
+            <a:pPr algn="ctr">
+              <a:defRPr sz="1400" b="1">
+                <a:solidFill>
+                  <a:srgbClr val="FFFFFF"/>
+                </a:solidFill>
+                <a:latin typeface="Calibri"/>
+              </a:defRPr>
+            </a:pPr>
+            <a:r>
+              <a:t>PAHD: Pathogen-Adaptive Hotspot Detection</a:t>
+            </a:r>
+          </a:p>
+          <a:p>
+            <a:pPr algn="ctr">
+              <a:defRPr sz="1400" b="1">
+                <a:solidFill>
+                  <a:srgbClr val="FFFFFF"/>
+                </a:solidFill>
+                <a:latin typeface="Calibri"/>
+              </a:defRPr>
+            </a:pPr>
+            <a:r>
+              <a:t>Adaptive method selection based on pathogen profile</a:t>
+            </a:r>
+          </a:p>
+        </p:txBody>
+      </p:sp>
+      <p:sp>
+        <p:nvSpPr>
+          <p:cNvPr id="25" name="Rounded Rectangle 24"/>
+          <p:cNvSpPr/>
+          <p:nvPr/>
+        </p:nvSpPr>
+        <p:spPr>
+          <a:xfrm>
+            <a:off x="365760" y="4572000"/>
+            <a:ext cx="2148840" cy="1463040"/>
           </a:xfrm>
           <a:prstGeom prst="roundRect">
             <a:avLst/>
@@ -36724,13 +36418,13 @@
       </p:sp>
       <p:sp>
         <p:nvSpPr>
-          <p:cNvPr id="10" name="TextBox 9"/>
-          <p:cNvSpPr txBox="1"/>
-          <p:nvPr/>
-        </p:nvSpPr>
-        <p:spPr>
-          <a:xfrm>
-            <a:off x="365760" y="4663440"/>
+          <p:cNvPr id="26" name="TextBox 25"/>
+          <p:cNvSpPr txBox="1"/>
+          <p:nvPr/>
+        </p:nvSpPr>
+        <p:spPr>
+          <a:xfrm>
+            <a:off x="365760" y="4709160"/>
             <a:ext cx="2148840" cy="640080"/>
           </a:xfrm>
           <a:prstGeom prst="rect">
@@ -36743,7 +36437,7 @@
           <a:lstStyle/>
           <a:p>
             <a:pPr algn="ctr">
-              <a:defRPr sz="3000" b="1">
+              <a:defRPr sz="2800" b="1">
                 <a:solidFill>
                   <a:srgbClr val="0D7377"/>
                 </a:solidFill>
@@ -36758,14 +36452,14 @@
       </p:sp>
       <p:sp>
         <p:nvSpPr>
-          <p:cNvPr id="11" name="TextBox 10"/>
+          <p:cNvPr id="27" name="TextBox 26"/>
           <p:cNvSpPr txBox="1"/>
           <p:nvPr/>
         </p:nvSpPr>
         <p:spPr>
           <a:xfrm>
             <a:off x="365760" y="5394960"/>
-            <a:ext cx="2148840" cy="548640"/>
+            <a:ext cx="2148840" cy="457200"/>
           </a:xfrm>
           <a:prstGeom prst="rect">
             <a:avLst/>
@@ -36792,14 +36486,14 @@
       </p:sp>
       <p:sp>
         <p:nvSpPr>
-          <p:cNvPr id="12" name="Rounded Rectangle 11"/>
+          <p:cNvPr id="28" name="Rounded Rectangle 27"/>
           <p:cNvSpPr/>
           <p:nvPr/>
         </p:nvSpPr>
         <p:spPr>
           <a:xfrm>
-            <a:off x="2706624" y="4480560"/>
-            <a:ext cx="2148840" cy="1645920"/>
+            <a:off x="2706624" y="4572000"/>
+            <a:ext cx="2148840" cy="1463040"/>
           </a:xfrm>
           <a:prstGeom prst="roundRect">
             <a:avLst/>
@@ -36837,13 +36531,13 @@
       </p:sp>
       <p:sp>
         <p:nvSpPr>
-          <p:cNvPr id="13" name="TextBox 12"/>
-          <p:cNvSpPr txBox="1"/>
-          <p:nvPr/>
-        </p:nvSpPr>
-        <p:spPr>
-          <a:xfrm>
-            <a:off x="2706624" y="4663440"/>
+          <p:cNvPr id="29" name="TextBox 28"/>
+          <p:cNvSpPr txBox="1"/>
+          <p:nvPr/>
+        </p:nvSpPr>
+        <p:spPr>
+          <a:xfrm>
+            <a:off x="2706624" y="4709160"/>
             <a:ext cx="2148840" cy="640080"/>
           </a:xfrm>
           <a:prstGeom prst="rect">
@@ -36856,7 +36550,7 @@
           <a:lstStyle/>
           <a:p>
             <a:pPr algn="ctr">
-              <a:defRPr sz="3000" b="1">
+              <a:defRPr sz="2800" b="1">
                 <a:solidFill>
                   <a:srgbClr val="E65100"/>
                 </a:solidFill>
@@ -36871,14 +36565,14 @@
       </p:sp>
       <p:sp>
         <p:nvSpPr>
-          <p:cNvPr id="14" name="TextBox 13"/>
+          <p:cNvPr id="30" name="TextBox 29"/>
           <p:cNvSpPr txBox="1"/>
           <p:nvPr/>
         </p:nvSpPr>
         <p:spPr>
           <a:xfrm>
             <a:off x="2706624" y="5394960"/>
-            <a:ext cx="2148840" cy="548640"/>
+            <a:ext cx="2148840" cy="457200"/>
           </a:xfrm>
           <a:prstGeom prst="rect">
             <a:avLst/>
@@ -36905,14 +36599,14 @@
       </p:sp>
       <p:sp>
         <p:nvSpPr>
-          <p:cNvPr id="15" name="Rounded Rectangle 14"/>
+          <p:cNvPr id="31" name="Rounded Rectangle 30"/>
           <p:cNvSpPr/>
           <p:nvPr/>
         </p:nvSpPr>
         <p:spPr>
           <a:xfrm>
-            <a:off x="5047488" y="4480560"/>
-            <a:ext cx="2148840" cy="1645920"/>
+            <a:off x="5047488" y="4572000"/>
+            <a:ext cx="2148840" cy="1463040"/>
           </a:xfrm>
           <a:prstGeom prst="roundRect">
             <a:avLst/>
@@ -36950,13 +36644,13 @@
       </p:sp>
       <p:sp>
         <p:nvSpPr>
-          <p:cNvPr id="16" name="TextBox 15"/>
-          <p:cNvSpPr txBox="1"/>
-          <p:nvPr/>
-        </p:nvSpPr>
-        <p:spPr>
-          <a:xfrm>
-            <a:off x="5047488" y="4663440"/>
+          <p:cNvPr id="32" name="TextBox 31"/>
+          <p:cNvSpPr txBox="1"/>
+          <p:nvPr/>
+        </p:nvSpPr>
+        <p:spPr>
+          <a:xfrm>
+            <a:off x="5047488" y="4709160"/>
             <a:ext cx="2148840" cy="640080"/>
           </a:xfrm>
           <a:prstGeom prst="rect">
@@ -36969,7 +36663,7 @@
           <a:lstStyle/>
           <a:p>
             <a:pPr algn="ctr">
-              <a:defRPr sz="3000" b="1">
+              <a:defRPr sz="2800" b="1">
                 <a:solidFill>
                   <a:srgbClr val="2E7D32"/>
                 </a:solidFill>
@@ -36984,14 +36678,14 @@
       </p:sp>
       <p:sp>
         <p:nvSpPr>
-          <p:cNvPr id="17" name="TextBox 16"/>
+          <p:cNvPr id="33" name="TextBox 32"/>
           <p:cNvSpPr txBox="1"/>
           <p:nvPr/>
         </p:nvSpPr>
         <p:spPr>
           <a:xfrm>
             <a:off x="5047488" y="5394960"/>
-            <a:ext cx="2148840" cy="548640"/>
+            <a:ext cx="2148840" cy="457200"/>
           </a:xfrm>
           <a:prstGeom prst="rect">
             <a:avLst/>
@@ -37018,14 +36712,14 @@
       </p:sp>
       <p:sp>
         <p:nvSpPr>
-          <p:cNvPr id="18" name="Rounded Rectangle 17"/>
+          <p:cNvPr id="34" name="Rounded Rectangle 33"/>
           <p:cNvSpPr/>
           <p:nvPr/>
         </p:nvSpPr>
         <p:spPr>
           <a:xfrm>
-            <a:off x="7388352" y="4480560"/>
-            <a:ext cx="2148840" cy="1645920"/>
+            <a:off x="7388352" y="4572000"/>
+            <a:ext cx="2148840" cy="1463040"/>
           </a:xfrm>
           <a:prstGeom prst="roundRect">
             <a:avLst/>
@@ -37063,13 +36757,13 @@
       </p:sp>
       <p:sp>
         <p:nvSpPr>
-          <p:cNvPr id="19" name="TextBox 18"/>
-          <p:cNvSpPr txBox="1"/>
-          <p:nvPr/>
-        </p:nvSpPr>
-        <p:spPr>
-          <a:xfrm>
-            <a:off x="7388352" y="4663440"/>
+          <p:cNvPr id="35" name="TextBox 34"/>
+          <p:cNvSpPr txBox="1"/>
+          <p:nvPr/>
+        </p:nvSpPr>
+        <p:spPr>
+          <a:xfrm>
+            <a:off x="7388352" y="4709160"/>
             <a:ext cx="2148840" cy="640080"/>
           </a:xfrm>
           <a:prstGeom prst="rect">
@@ -37082,7 +36776,7 @@
           <a:lstStyle/>
           <a:p>
             <a:pPr algn="ctr">
-              <a:defRPr sz="3000" b="1">
+              <a:defRPr sz="2800" b="1">
                 <a:solidFill>
                   <a:srgbClr val="6A1B9A"/>
                 </a:solidFill>
@@ -37097,14 +36791,14 @@
       </p:sp>
       <p:sp>
         <p:nvSpPr>
-          <p:cNvPr id="20" name="TextBox 19"/>
+          <p:cNvPr id="36" name="TextBox 35"/>
           <p:cNvSpPr txBox="1"/>
           <p:nvPr/>
         </p:nvSpPr>
         <p:spPr>
           <a:xfrm>
             <a:off x="7388352" y="5394960"/>
-            <a:ext cx="2148840" cy="548640"/>
+            <a:ext cx="2148840" cy="457200"/>
           </a:xfrm>
           <a:prstGeom prst="rect">
             <a:avLst/>
@@ -37124,21 +36818,21 @@
               </a:defRPr>
             </a:pPr>
             <a:r>
-              <a:t>Ground Truth Layers</a:t>
-            </a:r>
-          </a:p>
-        </p:txBody>
-      </p:sp>
-      <p:sp>
-        <p:nvSpPr>
-          <p:cNvPr id="21" name="Rounded Rectangle 20"/>
+              <a:t>GT Layers</a:t>
+            </a:r>
+          </a:p>
+        </p:txBody>
+      </p:sp>
+      <p:sp>
+        <p:nvSpPr>
+          <p:cNvPr id="37" name="Rounded Rectangle 36"/>
           <p:cNvSpPr/>
           <p:nvPr/>
         </p:nvSpPr>
         <p:spPr>
           <a:xfrm>
-            <a:off x="9729216" y="4480560"/>
-            <a:ext cx="2148840" cy="1645920"/>
+            <a:off x="9729216" y="4572000"/>
+            <a:ext cx="2148840" cy="1463040"/>
           </a:xfrm>
           <a:prstGeom prst="roundRect">
             <a:avLst/>
@@ -37176,13 +36870,13 @@
       </p:sp>
       <p:sp>
         <p:nvSpPr>
-          <p:cNvPr id="22" name="TextBox 21"/>
-          <p:cNvSpPr txBox="1"/>
-          <p:nvPr/>
-        </p:nvSpPr>
-        <p:spPr>
-          <a:xfrm>
-            <a:off x="9729216" y="4663440"/>
+          <p:cNvPr id="38" name="TextBox 37"/>
+          <p:cNvSpPr txBox="1"/>
+          <p:nvPr/>
+        </p:nvSpPr>
+        <p:spPr>
+          <a:xfrm>
+            <a:off x="9729216" y="4709160"/>
             <a:ext cx="2148840" cy="640080"/>
           </a:xfrm>
           <a:prstGeom prst="rect">
@@ -37195,7 +36889,7 @@
           <a:lstStyle/>
           <a:p>
             <a:pPr algn="ctr">
-              <a:defRPr sz="3000" b="1">
+              <a:defRPr sz="2800" b="1">
                 <a:solidFill>
                   <a:srgbClr val="C62828"/>
                 </a:solidFill>
@@ -37210,14 +36904,14 @@
       </p:sp>
       <p:sp>
         <p:nvSpPr>
-          <p:cNvPr id="23" name="TextBox 22"/>
+          <p:cNvPr id="39" name="TextBox 38"/>
           <p:cNvSpPr txBox="1"/>
           <p:nvPr/>
         </p:nvSpPr>
         <p:spPr>
           <a:xfrm>
             <a:off x="9729216" y="5394960"/>
-            <a:ext cx="2148840" cy="548640"/>
+            <a:ext cx="2148840" cy="457200"/>
           </a:xfrm>
           <a:prstGeom prst="rect">
             <a:avLst/>
@@ -37237,7 +36931,7 @@
               </a:defRPr>
             </a:pPr>
             <a:r>
-              <a:t>Interaction omega-sq</a:t>
+              <a:t>Interaction ω²</a:t>
             </a:r>
           </a:p>
         </p:txBody>
@@ -37339,7 +37033,7 @@
       </p:sp>
       <p:pic>
         <p:nvPicPr>
-          <p:cNvPr id="4" name="Picture 3" descr="knu_symbol_white.png"/>
+          <p:cNvPr id="4" name="Picture 3" descr="knu_emblem_official.jpg"/>
           <p:cNvPicPr>
             <a:picLocks noChangeAspect="1"/>
           </p:cNvPicPr>
@@ -37446,8 +37140,8 @@
         </p:nvSpPr>
         <p:spPr>
           <a:xfrm>
-            <a:off x="11430000" y="6528816"/>
-            <a:ext cx="640080" cy="310896"/>
+            <a:off x="10789920" y="6528816"/>
+            <a:ext cx="1280160" cy="310896"/>
           </a:xfrm>
           <a:prstGeom prst="rect">
             <a:avLst/>
@@ -37467,7 +37161,7 @@
               </a:defRPr>
             </a:pPr>
             <a:r>
-              <a:t>8</a:t>
+              <a:t>—— 8</a:t>
             </a:r>
           </a:p>
         </p:txBody>
@@ -38203,7 +37897,7 @@
       </p:sp>
       <p:pic>
         <p:nvPicPr>
-          <p:cNvPr id="4" name="Picture 3" descr="knu_symbol_white.png"/>
+          <p:cNvPr id="4" name="Picture 3" descr="knu_emblem_official.jpg"/>
           <p:cNvPicPr>
             <a:picLocks noChangeAspect="1"/>
           </p:cNvPicPr>
@@ -38310,8 +38004,8 @@
         </p:nvSpPr>
         <p:spPr>
           <a:xfrm>
-            <a:off x="11430000" y="6528816"/>
-            <a:ext cx="640080" cy="310896"/>
+            <a:off x="10789920" y="6528816"/>
+            <a:ext cx="1280160" cy="310896"/>
           </a:xfrm>
           <a:prstGeom prst="rect">
             <a:avLst/>
@@ -38331,7 +38025,7 @@
               </a:defRPr>
             </a:pPr>
             <a:r>
-              <a:t>9</a:t>
+              <a:t>—— 9</a:t>
             </a:r>
           </a:p>
         </p:txBody>

--- a/paper/ppt/MutBench_Defense_v4.pptx
+++ b/paper/ppt/MutBench_Defense_v4.pptx
@@ -3165,7 +3165,7 @@
       </p:sp>
       <p:pic>
         <p:nvPicPr>
-          <p:cNvPr id="3" name="Picture 2" descr="knu_emblem_official.jpg"/>
+          <p:cNvPr id="3" name="Picture 2" descr="knu_symbol_t.png"/>
           <p:cNvPicPr>
             <a:picLocks noChangeAspect="1"/>
           </p:cNvPicPr>
@@ -3476,7 +3476,7 @@
       </p:sp>
       <p:pic>
         <p:nvPicPr>
-          <p:cNvPr id="4" name="Picture 3" descr="knu_emblem_official.jpg"/>
+          <p:cNvPr id="4" name="Picture 3" descr="knu_symbol_t.png"/>
           <p:cNvPicPr>
             <a:picLocks noChangeAspect="1"/>
           </p:cNvPicPr>
@@ -5420,7 +5420,7 @@
           <a:lstStyle/>
           <a:p>
             <a:pPr algn="ctr">
-              <a:defRPr sz="900" b="0">
+              <a:defRPr sz="1000" b="0">
                 <a:solidFill>
                   <a:srgbClr val="888888"/>
                 </a:solidFill>
@@ -5530,7 +5530,7 @@
       </p:sp>
       <p:pic>
         <p:nvPicPr>
-          <p:cNvPr id="4" name="Picture 3" descr="knu_emblem_official.jpg"/>
+          <p:cNvPr id="4" name="Picture 3" descr="knu_symbol_t.png"/>
           <p:cNvPicPr>
             <a:picLocks noChangeAspect="1"/>
           </p:cNvPicPr>
@@ -6327,7 +6327,7 @@
           <a:lstStyle/>
           <a:p>
             <a:pPr algn="l">
-              <a:defRPr sz="900" b="1">
+              <a:defRPr sz="1000" b="1">
                 <a:solidFill>
                   <a:srgbClr val="0D7377"/>
                 </a:solidFill>
@@ -6361,7 +6361,7 @@
           <a:lstStyle/>
           <a:p>
             <a:pPr algn="l">
-              <a:defRPr sz="800" b="0">
+              <a:defRPr sz="1000" b="0">
                 <a:solidFill>
                   <a:srgbClr val="888888"/>
                 </a:solidFill>
@@ -6395,7 +6395,7 @@
           <a:lstStyle/>
           <a:p>
             <a:pPr algn="l">
-              <a:defRPr sz="900" b="1">
+              <a:defRPr sz="1000" b="1">
                 <a:solidFill>
                   <a:srgbClr val="0D7377"/>
                 </a:solidFill>
@@ -6429,7 +6429,7 @@
           <a:lstStyle/>
           <a:p>
             <a:pPr algn="l">
-              <a:defRPr sz="800" b="0">
+              <a:defRPr sz="1000" b="0">
                 <a:solidFill>
                   <a:srgbClr val="888888"/>
                 </a:solidFill>
@@ -6463,7 +6463,7 @@
           <a:lstStyle/>
           <a:p>
             <a:pPr algn="l">
-              <a:defRPr sz="900" b="1">
+              <a:defRPr sz="1000" b="1">
                 <a:solidFill>
                   <a:srgbClr val="0D7377"/>
                 </a:solidFill>
@@ -6497,7 +6497,7 @@
           <a:lstStyle/>
           <a:p>
             <a:pPr algn="l">
-              <a:defRPr sz="800" b="0">
+              <a:defRPr sz="1000" b="0">
                 <a:solidFill>
                   <a:srgbClr val="888888"/>
                 </a:solidFill>
@@ -6531,7 +6531,7 @@
           <a:lstStyle/>
           <a:p>
             <a:pPr algn="l">
-              <a:defRPr sz="900" b="1">
+              <a:defRPr sz="1000" b="1">
                 <a:solidFill>
                   <a:srgbClr val="0D7377"/>
                 </a:solidFill>
@@ -6565,7 +6565,7 @@
           <a:lstStyle/>
           <a:p>
             <a:pPr algn="l">
-              <a:defRPr sz="800" b="0">
+              <a:defRPr sz="1000" b="0">
                 <a:solidFill>
                   <a:srgbClr val="888888"/>
                 </a:solidFill>
@@ -6599,7 +6599,7 @@
           <a:lstStyle/>
           <a:p>
             <a:pPr algn="l">
-              <a:defRPr sz="900" b="1">
+              <a:defRPr sz="1000" b="1">
                 <a:solidFill>
                   <a:srgbClr val="0D7377"/>
                 </a:solidFill>
@@ -6633,7 +6633,7 @@
           <a:lstStyle/>
           <a:p>
             <a:pPr algn="l">
-              <a:defRPr sz="800" b="0">
+              <a:defRPr sz="1000" b="0">
                 <a:solidFill>
                   <a:srgbClr val="888888"/>
                 </a:solidFill>
@@ -6667,7 +6667,7 @@
           <a:lstStyle/>
           <a:p>
             <a:pPr algn="l">
-              <a:defRPr sz="900" b="1">
+              <a:defRPr sz="1000" b="1">
                 <a:solidFill>
                   <a:srgbClr val="0D7377"/>
                 </a:solidFill>
@@ -6701,7 +6701,7 @@
           <a:lstStyle/>
           <a:p>
             <a:pPr algn="l">
-              <a:defRPr sz="800" b="0">
+              <a:defRPr sz="1000" b="0">
                 <a:solidFill>
                   <a:srgbClr val="888888"/>
                 </a:solidFill>
@@ -6735,7 +6735,7 @@
           <a:lstStyle/>
           <a:p>
             <a:pPr algn="l">
-              <a:defRPr sz="900" b="1">
+              <a:defRPr sz="1000" b="1">
                 <a:solidFill>
                   <a:srgbClr val="0D7377"/>
                 </a:solidFill>
@@ -6769,7 +6769,7 @@
           <a:lstStyle/>
           <a:p>
             <a:pPr algn="l">
-              <a:defRPr sz="800" b="0">
+              <a:defRPr sz="1000" b="0">
                 <a:solidFill>
                   <a:srgbClr val="888888"/>
                 </a:solidFill>
@@ -6803,7 +6803,7 @@
           <a:lstStyle/>
           <a:p>
             <a:pPr algn="l">
-              <a:defRPr sz="900" b="1">
+              <a:defRPr sz="1000" b="1">
                 <a:solidFill>
                   <a:srgbClr val="0D7377"/>
                 </a:solidFill>
@@ -6837,7 +6837,7 @@
           <a:lstStyle/>
           <a:p>
             <a:pPr algn="l">
-              <a:defRPr sz="800" b="0">
+              <a:defRPr sz="1000" b="0">
                 <a:solidFill>
                   <a:srgbClr val="888888"/>
                 </a:solidFill>
@@ -6871,7 +6871,7 @@
           <a:lstStyle/>
           <a:p>
             <a:pPr algn="l">
-              <a:defRPr sz="900" b="1">
+              <a:defRPr sz="1000" b="1">
                 <a:solidFill>
                   <a:srgbClr val="0D7377"/>
                 </a:solidFill>
@@ -6905,7 +6905,7 @@
           <a:lstStyle/>
           <a:p>
             <a:pPr algn="l">
-              <a:defRPr sz="800" b="0">
+              <a:defRPr sz="1000" b="0">
                 <a:solidFill>
                   <a:srgbClr val="888888"/>
                 </a:solidFill>
@@ -7016,7 +7016,7 @@
           <a:lstStyle/>
           <a:p>
             <a:pPr algn="l">
-              <a:defRPr sz="900" b="1">
+              <a:defRPr sz="1000" b="1">
                 <a:solidFill>
                   <a:srgbClr val="2E7D32"/>
                 </a:solidFill>
@@ -7050,7 +7050,7 @@
           <a:lstStyle/>
           <a:p>
             <a:pPr algn="l">
-              <a:defRPr sz="800" b="0">
+              <a:defRPr sz="1000" b="0">
                 <a:solidFill>
                   <a:srgbClr val="888888"/>
                 </a:solidFill>
@@ -7084,7 +7084,7 @@
           <a:lstStyle/>
           <a:p>
             <a:pPr algn="l">
-              <a:defRPr sz="900" b="1">
+              <a:defRPr sz="1000" b="1">
                 <a:solidFill>
                   <a:srgbClr val="2E7D32"/>
                 </a:solidFill>
@@ -7118,7 +7118,7 @@
           <a:lstStyle/>
           <a:p>
             <a:pPr algn="l">
-              <a:defRPr sz="800" b="0">
+              <a:defRPr sz="1000" b="0">
                 <a:solidFill>
                   <a:srgbClr val="888888"/>
                 </a:solidFill>
@@ -7152,7 +7152,7 @@
           <a:lstStyle/>
           <a:p>
             <a:pPr algn="l">
-              <a:defRPr sz="900" b="1">
+              <a:defRPr sz="1000" b="1">
                 <a:solidFill>
                   <a:srgbClr val="2E7D32"/>
                 </a:solidFill>
@@ -7186,7 +7186,7 @@
           <a:lstStyle/>
           <a:p>
             <a:pPr algn="l">
-              <a:defRPr sz="800" b="0">
+              <a:defRPr sz="1000" b="0">
                 <a:solidFill>
                   <a:srgbClr val="888888"/>
                 </a:solidFill>
@@ -7220,7 +7220,7 @@
           <a:lstStyle/>
           <a:p>
             <a:pPr algn="l">
-              <a:defRPr sz="900" b="1">
+              <a:defRPr sz="1000" b="1">
                 <a:solidFill>
                   <a:srgbClr val="2E7D32"/>
                 </a:solidFill>
@@ -7254,7 +7254,7 @@
           <a:lstStyle/>
           <a:p>
             <a:pPr algn="l">
-              <a:defRPr sz="800" b="0">
+              <a:defRPr sz="1000" b="0">
                 <a:solidFill>
                   <a:srgbClr val="888888"/>
                 </a:solidFill>
@@ -7288,7 +7288,7 @@
           <a:lstStyle/>
           <a:p>
             <a:pPr algn="l">
-              <a:defRPr sz="900" b="1">
+              <a:defRPr sz="1000" b="1">
                 <a:solidFill>
                   <a:srgbClr val="2E7D32"/>
                 </a:solidFill>
@@ -7322,7 +7322,7 @@
           <a:lstStyle/>
           <a:p>
             <a:pPr algn="l">
-              <a:defRPr sz="800" b="0">
+              <a:defRPr sz="1000" b="0">
                 <a:solidFill>
                   <a:srgbClr val="888888"/>
                 </a:solidFill>
@@ -7356,7 +7356,7 @@
           <a:lstStyle/>
           <a:p>
             <a:pPr algn="l">
-              <a:defRPr sz="900" b="1">
+              <a:defRPr sz="1000" b="1">
                 <a:solidFill>
                   <a:srgbClr val="2E7D32"/>
                 </a:solidFill>
@@ -7390,7 +7390,7 @@
           <a:lstStyle/>
           <a:p>
             <a:pPr algn="l">
-              <a:defRPr sz="800" b="0">
+              <a:defRPr sz="1000" b="0">
                 <a:solidFill>
                   <a:srgbClr val="888888"/>
                 </a:solidFill>
@@ -7424,7 +7424,7 @@
           <a:lstStyle/>
           <a:p>
             <a:pPr algn="l">
-              <a:defRPr sz="900" b="1">
+              <a:defRPr sz="1000" b="1">
                 <a:solidFill>
                   <a:srgbClr val="2E7D32"/>
                 </a:solidFill>
@@ -7458,7 +7458,7 @@
           <a:lstStyle/>
           <a:p>
             <a:pPr algn="l">
-              <a:defRPr sz="800" b="0">
+              <a:defRPr sz="1000" b="0">
                 <a:solidFill>
                   <a:srgbClr val="888888"/>
                 </a:solidFill>
@@ -7492,7 +7492,7 @@
           <a:lstStyle/>
           <a:p>
             <a:pPr algn="l">
-              <a:defRPr sz="900" b="1">
+              <a:defRPr sz="1000" b="1">
                 <a:solidFill>
                   <a:srgbClr val="2E7D32"/>
                 </a:solidFill>
@@ -7526,7 +7526,7 @@
           <a:lstStyle/>
           <a:p>
             <a:pPr algn="l">
-              <a:defRPr sz="800" b="0">
+              <a:defRPr sz="1000" b="0">
                 <a:solidFill>
                   <a:srgbClr val="888888"/>
                 </a:solidFill>
@@ -7560,7 +7560,7 @@
           <a:lstStyle/>
           <a:p>
             <a:pPr algn="l">
-              <a:defRPr sz="900" b="1">
+              <a:defRPr sz="1000" b="1">
                 <a:solidFill>
                   <a:srgbClr val="2E7D32"/>
                 </a:solidFill>
@@ -7594,7 +7594,7 @@
           <a:lstStyle/>
           <a:p>
             <a:pPr algn="l">
-              <a:defRPr sz="800" b="0">
+              <a:defRPr sz="1000" b="0">
                 <a:solidFill>
                   <a:srgbClr val="888888"/>
                 </a:solidFill>
@@ -7628,7 +7628,7 @@
           <a:lstStyle/>
           <a:p>
             <a:pPr algn="l">
-              <a:defRPr sz="900" b="1">
+              <a:defRPr sz="1000" b="1">
                 <a:solidFill>
                   <a:srgbClr val="2E7D32"/>
                 </a:solidFill>
@@ -7662,7 +7662,7 @@
           <a:lstStyle/>
           <a:p>
             <a:pPr algn="l">
-              <a:defRPr sz="800" b="0">
+              <a:defRPr sz="1000" b="0">
                 <a:solidFill>
                   <a:srgbClr val="888888"/>
                 </a:solidFill>
@@ -7696,7 +7696,7 @@
           <a:lstStyle/>
           <a:p>
             <a:pPr algn="l">
-              <a:defRPr sz="900" b="1">
+              <a:defRPr sz="1000" b="1">
                 <a:solidFill>
                   <a:srgbClr val="2E7D32"/>
                 </a:solidFill>
@@ -7730,7 +7730,7 @@
           <a:lstStyle/>
           <a:p>
             <a:pPr algn="l">
-              <a:defRPr sz="800" b="0">
+              <a:defRPr sz="1000" b="0">
                 <a:solidFill>
                   <a:srgbClr val="888888"/>
                 </a:solidFill>
@@ -7764,7 +7764,7 @@
           <a:lstStyle/>
           <a:p>
             <a:pPr algn="l">
-              <a:defRPr sz="900" b="1">
+              <a:defRPr sz="1000" b="1">
                 <a:solidFill>
                   <a:srgbClr val="2E7D32"/>
                 </a:solidFill>
@@ -7798,7 +7798,7 @@
           <a:lstStyle/>
           <a:p>
             <a:pPr algn="l">
-              <a:defRPr sz="800" b="0">
+              <a:defRPr sz="1000" b="0">
                 <a:solidFill>
                   <a:srgbClr val="888888"/>
                 </a:solidFill>
@@ -7819,7 +7819,7 @@
         </p:nvSpPr>
         <p:spPr>
           <a:xfrm>
-            <a:off x="3200400" y="5029200"/>
+            <a:off x="3200400" y="5303520"/>
             <a:ext cx="5760720" cy="365760"/>
           </a:xfrm>
           <a:prstGeom prst="rect">
@@ -7942,7 +7942,7 @@
       </p:sp>
       <p:pic>
         <p:nvPicPr>
-          <p:cNvPr id="4" name="Picture 3" descr="knu_emblem_official.jpg"/>
+          <p:cNvPr id="4" name="Picture 3" descr="knu_symbol_t.png"/>
           <p:cNvPicPr>
             <a:picLocks noChangeAspect="1"/>
           </p:cNvPicPr>
@@ -8239,7 +8239,7 @@
           <a:lstStyle/>
           <a:p>
             <a:pPr algn="ctr">
-              <a:defRPr sz="900" b="0">
+              <a:defRPr sz="1000" b="0">
                 <a:solidFill>
                   <a:srgbClr val="1B2A4A"/>
                 </a:solidFill>
@@ -8273,7 +8273,7 @@
           <a:lstStyle/>
           <a:p>
             <a:pPr algn="l">
-              <a:defRPr sz="900" b="0">
+              <a:defRPr sz="1000" b="0">
                 <a:solidFill>
                   <a:srgbClr val="333333"/>
                 </a:solidFill>
@@ -8286,7 +8286,7 @@
           </a:p>
           <a:p>
             <a:pPr algn="l">
-              <a:defRPr sz="900" b="0">
+              <a:defRPr sz="1000" b="0">
                 <a:solidFill>
                   <a:srgbClr val="333333"/>
                 </a:solidFill>
@@ -8463,7 +8463,7 @@
           <a:lstStyle/>
           <a:p>
             <a:pPr algn="ctr">
-              <a:defRPr sz="900" b="0">
+              <a:defRPr sz="1000" b="0">
                 <a:solidFill>
                   <a:srgbClr val="1B2A4A"/>
                 </a:solidFill>
@@ -8497,7 +8497,7 @@
           <a:lstStyle/>
           <a:p>
             <a:pPr algn="l">
-              <a:defRPr sz="900" b="0">
+              <a:defRPr sz="1000" b="0">
                 <a:solidFill>
                   <a:srgbClr val="333333"/>
                 </a:solidFill>
@@ -8510,7 +8510,7 @@
           </a:p>
           <a:p>
             <a:pPr algn="l">
-              <a:defRPr sz="900" b="0">
+              <a:defRPr sz="1000" b="0">
                 <a:solidFill>
                   <a:srgbClr val="333333"/>
                 </a:solidFill>
@@ -8687,7 +8687,7 @@
           <a:lstStyle/>
           <a:p>
             <a:pPr algn="ctr">
-              <a:defRPr sz="900" b="0">
+              <a:defRPr sz="1000" b="0">
                 <a:solidFill>
                   <a:srgbClr val="1B2A4A"/>
                 </a:solidFill>
@@ -8721,7 +8721,7 @@
           <a:lstStyle/>
           <a:p>
             <a:pPr algn="l">
-              <a:defRPr sz="900" b="0">
+              <a:defRPr sz="1000" b="0">
                 <a:solidFill>
                   <a:srgbClr val="333333"/>
                 </a:solidFill>
@@ -8734,7 +8734,7 @@
           </a:p>
           <a:p>
             <a:pPr algn="l">
-              <a:defRPr sz="900" b="0">
+              <a:defRPr sz="1000" b="0">
                 <a:solidFill>
                   <a:srgbClr val="333333"/>
                 </a:solidFill>
@@ -8911,7 +8911,7 @@
           <a:lstStyle/>
           <a:p>
             <a:pPr algn="ctr">
-              <a:defRPr sz="900" b="0">
+              <a:defRPr sz="1000" b="0">
                 <a:solidFill>
                   <a:srgbClr val="1B2A4A"/>
                 </a:solidFill>
@@ -8945,7 +8945,7 @@
           <a:lstStyle/>
           <a:p>
             <a:pPr algn="l">
-              <a:defRPr sz="900" b="0">
+              <a:defRPr sz="1000" b="0">
                 <a:solidFill>
                   <a:srgbClr val="333333"/>
                 </a:solidFill>
@@ -8958,7 +8958,7 @@
           </a:p>
           <a:p>
             <a:pPr algn="l">
-              <a:defRPr sz="900" b="0">
+              <a:defRPr sz="1000" b="0">
                 <a:solidFill>
                   <a:srgbClr val="333333"/>
                 </a:solidFill>
@@ -9135,7 +9135,7 @@
           <a:lstStyle/>
           <a:p>
             <a:pPr algn="ctr">
-              <a:defRPr sz="900" b="0">
+              <a:defRPr sz="1000" b="0">
                 <a:solidFill>
                   <a:srgbClr val="1B2A4A"/>
                 </a:solidFill>
@@ -9169,7 +9169,7 @@
           <a:lstStyle/>
           <a:p>
             <a:pPr algn="l">
-              <a:defRPr sz="900" b="0">
+              <a:defRPr sz="1000" b="0">
                 <a:solidFill>
                   <a:srgbClr val="333333"/>
                 </a:solidFill>
@@ -9182,7 +9182,7 @@
           </a:p>
           <a:p>
             <a:pPr algn="l">
-              <a:defRPr sz="900" b="0">
+              <a:defRPr sz="1000" b="0">
                 <a:solidFill>
                   <a:srgbClr val="333333"/>
                 </a:solidFill>
@@ -9359,7 +9359,7 @@
           <a:lstStyle/>
           <a:p>
             <a:pPr algn="ctr">
-              <a:defRPr sz="900" b="0">
+              <a:defRPr sz="1000" b="0">
                 <a:solidFill>
                   <a:srgbClr val="1B2A4A"/>
                 </a:solidFill>
@@ -9393,7 +9393,7 @@
           <a:lstStyle/>
           <a:p>
             <a:pPr algn="l">
-              <a:defRPr sz="900" b="0">
+              <a:defRPr sz="1000" b="0">
                 <a:solidFill>
                   <a:srgbClr val="333333"/>
                 </a:solidFill>
@@ -9406,7 +9406,7 @@
           </a:p>
           <a:p>
             <a:pPr algn="l">
-              <a:defRPr sz="900" b="0">
+              <a:defRPr sz="1000" b="0">
                 <a:solidFill>
                   <a:srgbClr val="333333"/>
                 </a:solidFill>
@@ -9583,7 +9583,7 @@
           <a:lstStyle/>
           <a:p>
             <a:pPr algn="ctr">
-              <a:defRPr sz="900" b="0">
+              <a:defRPr sz="1000" b="0">
                 <a:solidFill>
                   <a:srgbClr val="1B2A4A"/>
                 </a:solidFill>
@@ -9617,7 +9617,7 @@
           <a:lstStyle/>
           <a:p>
             <a:pPr algn="l">
-              <a:defRPr sz="900" b="0">
+              <a:defRPr sz="1000" b="0">
                 <a:solidFill>
                   <a:srgbClr val="333333"/>
                 </a:solidFill>
@@ -9630,7 +9630,7 @@
           </a:p>
           <a:p>
             <a:pPr algn="l">
-              <a:defRPr sz="900" b="0">
+              <a:defRPr sz="1000" b="0">
                 <a:solidFill>
                   <a:srgbClr val="333333"/>
                 </a:solidFill>
@@ -9807,7 +9807,7 @@
           <a:lstStyle/>
           <a:p>
             <a:pPr algn="ctr">
-              <a:defRPr sz="900" b="0">
+              <a:defRPr sz="1000" b="0">
                 <a:solidFill>
                   <a:srgbClr val="1B2A4A"/>
                 </a:solidFill>
@@ -9841,7 +9841,7 @@
           <a:lstStyle/>
           <a:p>
             <a:pPr algn="l">
-              <a:defRPr sz="900" b="0">
+              <a:defRPr sz="1000" b="0">
                 <a:solidFill>
                   <a:srgbClr val="333333"/>
                 </a:solidFill>
@@ -9854,7 +9854,7 @@
           </a:p>
           <a:p>
             <a:pPr algn="l">
-              <a:defRPr sz="900" b="0">
+              <a:defRPr sz="1000" b="0">
                 <a:solidFill>
                   <a:srgbClr val="333333"/>
                 </a:solidFill>
@@ -10031,7 +10031,7 @@
           <a:lstStyle/>
           <a:p>
             <a:pPr algn="ctr">
-              <a:defRPr sz="900" b="0">
+              <a:defRPr sz="1000" b="0">
                 <a:solidFill>
                   <a:srgbClr val="1B2A4A"/>
                 </a:solidFill>
@@ -10065,7 +10065,7 @@
           <a:lstStyle/>
           <a:p>
             <a:pPr algn="l">
-              <a:defRPr sz="900" b="0">
+              <a:defRPr sz="1000" b="0">
                 <a:solidFill>
                   <a:srgbClr val="333333"/>
                 </a:solidFill>
@@ -10078,7 +10078,7 @@
           </a:p>
           <a:p>
             <a:pPr algn="l">
-              <a:defRPr sz="900" b="0">
+              <a:defRPr sz="1000" b="0">
                 <a:solidFill>
                   <a:srgbClr val="333333"/>
                 </a:solidFill>
@@ -10188,7 +10188,7 @@
       </p:sp>
       <p:pic>
         <p:nvPicPr>
-          <p:cNvPr id="4" name="Picture 3" descr="knu_emblem_official.jpg"/>
+          <p:cNvPr id="4" name="Picture 3" descr="knu_symbol_t.png"/>
           <p:cNvPicPr>
             <a:picLocks noChangeAspect="1"/>
           </p:cNvPicPr>
@@ -10360,7 +10360,7 @@
             <a:avLst/>
           </a:prstGeom>
           <a:solidFill>
-            <a:srgbClr val="FFFFFF"/>
+            <a:srgbClr val="E8F5E9"/>
           </a:solidFill>
           <a:ln w="12700">
             <a:solidFill>
@@ -10499,7 +10499,7 @@
             <a:avLst/>
           </a:prstGeom>
           <a:solidFill>
-            <a:srgbClr val="FFFFFF"/>
+            <a:srgbClr val="E3F2FD"/>
           </a:solidFill>
           <a:ln w="12700">
             <a:solidFill>
@@ -10638,7 +10638,7 @@
             <a:avLst/>
           </a:prstGeom>
           <a:solidFill>
-            <a:srgbClr val="FFFFFF"/>
+            <a:srgbClr val="FFF3E0"/>
           </a:solidFill>
           <a:ln w="12700">
             <a:solidFill>
@@ -10859,7 +10859,7 @@
       </p:sp>
       <p:pic>
         <p:nvPicPr>
-          <p:cNvPr id="4" name="Picture 3" descr="knu_emblem_official.jpg"/>
+          <p:cNvPr id="4" name="Picture 3" descr="knu_symbol_t.png"/>
           <p:cNvPicPr>
             <a:picLocks noChangeAspect="1"/>
           </p:cNvPicPr>
@@ -11485,7 +11485,7 @@
           <a:lstStyle/>
           <a:p>
             <a:pPr algn="l">
-              <a:defRPr sz="900" b="0">
+              <a:defRPr sz="1000" b="0">
                 <a:solidFill>
                   <a:srgbClr val="333333"/>
                 </a:solidFill>
@@ -11498,7 +11498,7 @@
           </a:p>
           <a:p>
             <a:pPr algn="l">
-              <a:defRPr sz="900" b="0">
+              <a:defRPr sz="1000" b="0">
                 <a:solidFill>
                   <a:srgbClr val="333333"/>
                 </a:solidFill>
@@ -11577,7 +11577,7 @@
           <a:lstStyle/>
           <a:p>
             <a:pPr algn="l">
-              <a:defRPr sz="900" b="0">
+              <a:defRPr sz="1000" b="0">
                 <a:solidFill>
                   <a:srgbClr val="333333"/>
                 </a:solidFill>
@@ -11590,7 +11590,7 @@
           </a:p>
           <a:p>
             <a:pPr algn="l">
-              <a:defRPr sz="900" b="0">
+              <a:defRPr sz="1000" b="0">
                 <a:solidFill>
                   <a:srgbClr val="333333"/>
                 </a:solidFill>
@@ -11669,7 +11669,7 @@
           <a:lstStyle/>
           <a:p>
             <a:pPr algn="l">
-              <a:defRPr sz="900" b="0">
+              <a:defRPr sz="1000" b="0">
                 <a:solidFill>
                   <a:srgbClr val="333333"/>
                 </a:solidFill>
@@ -11682,7 +11682,7 @@
           </a:p>
           <a:p>
             <a:pPr algn="l">
-              <a:defRPr sz="900" b="0">
+              <a:defRPr sz="1000" b="0">
                 <a:solidFill>
                   <a:srgbClr val="333333"/>
                 </a:solidFill>
@@ -11816,7 +11816,7 @@
       </p:sp>
       <p:pic>
         <p:nvPicPr>
-          <p:cNvPr id="4" name="Picture 3" descr="knu_emblem_official.jpg"/>
+          <p:cNvPr id="4" name="Picture 3" descr="knu_symbol_t.png"/>
           <p:cNvPicPr>
             <a:picLocks noChangeAspect="1"/>
           </p:cNvPicPr>
@@ -12661,7 +12661,7 @@
       </p:sp>
       <p:pic>
         <p:nvPicPr>
-          <p:cNvPr id="4" name="Picture 3" descr="knu_emblem_official.jpg"/>
+          <p:cNvPr id="4" name="Picture 3" descr="knu_symbol_t.png"/>
           <p:cNvPicPr>
             <a:picLocks noChangeAspect="1"/>
           </p:cNvPicPr>
@@ -13489,7 +13489,7 @@
       </p:sp>
       <p:pic>
         <p:nvPicPr>
-          <p:cNvPr id="4" name="Picture 3" descr="knu_emblem_official.jpg"/>
+          <p:cNvPr id="4" name="Picture 3" descr="knu_symbol_t.png"/>
           <p:cNvPicPr>
             <a:picLocks noChangeAspect="1"/>
           </p:cNvPicPr>
@@ -14619,7 +14619,7 @@
       </p:sp>
       <p:pic>
         <p:nvPicPr>
-          <p:cNvPr id="4" name="Picture 3" descr="knu_emblem_official.jpg"/>
+          <p:cNvPr id="4" name="Picture 3" descr="knu_symbol_t.png"/>
           <p:cNvPicPr>
             <a:picLocks noChangeAspect="1"/>
           </p:cNvPicPr>
@@ -14927,7 +14927,7 @@
           <a:lstStyle/>
           <a:p>
             <a:pPr algn="l">
-              <a:defRPr sz="1100" b="1">
+              <a:defRPr sz="1200" b="1">
                 <a:solidFill>
                   <a:srgbClr val="1B2A4A"/>
                 </a:solidFill>
@@ -14982,7 +14982,7 @@
           <a:lstStyle/>
           <a:p>
             <a:pPr algn="ctr">
-              <a:defRPr sz="1100" b="0">
+              <a:defRPr sz="1200" b="0">
                 <a:solidFill>
                   <a:srgbClr val="333333"/>
                 </a:solidFill>
@@ -15071,7 +15071,7 @@
           <a:lstStyle/>
           <a:p>
             <a:pPr algn="ctr">
-              <a:defRPr sz="1100" b="1">
+              <a:defRPr sz="1200" b="1">
                 <a:solidFill>
                   <a:srgbClr val="333333"/>
                 </a:solidFill>
@@ -15105,7 +15105,7 @@
           <a:lstStyle/>
           <a:p>
             <a:pPr algn="l">
-              <a:defRPr sz="1100" b="1">
+              <a:defRPr sz="1200" b="1">
                 <a:solidFill>
                   <a:srgbClr val="1B2A4A"/>
                 </a:solidFill>
@@ -15160,7 +15160,7 @@
           <a:lstStyle/>
           <a:p>
             <a:pPr algn="ctr">
-              <a:defRPr sz="1100" b="0">
+              <a:defRPr sz="1200" b="0">
                 <a:solidFill>
                   <a:srgbClr val="333333"/>
                 </a:solidFill>
@@ -15249,7 +15249,7 @@
           <a:lstStyle/>
           <a:p>
             <a:pPr algn="ctr">
-              <a:defRPr sz="1100" b="1">
+              <a:defRPr sz="1200" b="1">
                 <a:solidFill>
                   <a:srgbClr val="333333"/>
                 </a:solidFill>
@@ -15283,7 +15283,7 @@
           <a:lstStyle/>
           <a:p>
             <a:pPr algn="l">
-              <a:defRPr sz="1100" b="1">
+              <a:defRPr sz="1200" b="1">
                 <a:solidFill>
                   <a:srgbClr val="1B2A4A"/>
                 </a:solidFill>
@@ -15338,7 +15338,7 @@
           <a:lstStyle/>
           <a:p>
             <a:pPr algn="ctr">
-              <a:defRPr sz="1100" b="0">
+              <a:defRPr sz="1200" b="0">
                 <a:solidFill>
                   <a:srgbClr val="333333"/>
                 </a:solidFill>
@@ -15427,7 +15427,7 @@
           <a:lstStyle/>
           <a:p>
             <a:pPr algn="ctr">
-              <a:defRPr sz="1100" b="1">
+              <a:defRPr sz="1200" b="1">
                 <a:solidFill>
                   <a:srgbClr val="333333"/>
                 </a:solidFill>
@@ -15461,7 +15461,7 @@
           <a:lstStyle/>
           <a:p>
             <a:pPr algn="l">
-              <a:defRPr sz="1100" b="1">
+              <a:defRPr sz="1200" b="1">
                 <a:solidFill>
                   <a:srgbClr val="1B2A4A"/>
                 </a:solidFill>
@@ -15516,7 +15516,7 @@
           <a:lstStyle/>
           <a:p>
             <a:pPr algn="ctr">
-              <a:defRPr sz="1100" b="0">
+              <a:defRPr sz="1200" b="0">
                 <a:solidFill>
                   <a:srgbClr val="333333"/>
                 </a:solidFill>
@@ -15605,7 +15605,7 @@
           <a:lstStyle/>
           <a:p>
             <a:pPr algn="ctr">
-              <a:defRPr sz="1100" b="1">
+              <a:defRPr sz="1200" b="1">
                 <a:solidFill>
                   <a:srgbClr val="333333"/>
                 </a:solidFill>
@@ -15639,7 +15639,7 @@
           <a:lstStyle/>
           <a:p>
             <a:pPr algn="l">
-              <a:defRPr sz="1100" b="1">
+              <a:defRPr sz="1200" b="1">
                 <a:solidFill>
                   <a:srgbClr val="1B2A4A"/>
                 </a:solidFill>
@@ -15694,7 +15694,7 @@
           <a:lstStyle/>
           <a:p>
             <a:pPr algn="ctr">
-              <a:defRPr sz="1100" b="0">
+              <a:defRPr sz="1200" b="0">
                 <a:solidFill>
                   <a:srgbClr val="333333"/>
                 </a:solidFill>
@@ -15783,7 +15783,7 @@
           <a:lstStyle/>
           <a:p>
             <a:pPr algn="ctr">
-              <a:defRPr sz="1100" b="1">
+              <a:defRPr sz="1200" b="1">
                 <a:solidFill>
                   <a:srgbClr val="333333"/>
                 </a:solidFill>
@@ -15804,7 +15804,7 @@
         </p:nvSpPr>
         <p:spPr>
           <a:xfrm>
-            <a:off x="1371600" y="6035040"/>
+            <a:off x="1371600" y="5760720"/>
             <a:ext cx="9418320" cy="548640"/>
           </a:xfrm>
           <a:prstGeom prst="roundRect">
@@ -15948,7 +15948,7 @@
       </p:sp>
       <p:pic>
         <p:nvPicPr>
-          <p:cNvPr id="4" name="Picture 3" descr="knu_emblem_official.jpg"/>
+          <p:cNvPr id="4" name="Picture 3" descr="knu_symbol_t.png"/>
           <p:cNvPicPr>
             <a:picLocks noChangeAspect="1"/>
           </p:cNvPicPr>
@@ -16447,7 +16447,7 @@
       </p:sp>
       <p:pic>
         <p:nvPicPr>
-          <p:cNvPr id="4" name="Picture 3" descr="knu_emblem_official.jpg"/>
+          <p:cNvPr id="4" name="Picture 3" descr="knu_symbol_t.png"/>
           <p:cNvPicPr>
             <a:picLocks noChangeAspect="1"/>
           </p:cNvPicPr>
@@ -16688,7 +16688,7 @@
           <a:lstStyle/>
           <a:p>
             <a:pPr algn="l">
-              <a:defRPr sz="1100" b="0">
+              <a:defRPr sz="1300" b="0">
                 <a:solidFill>
                   <a:srgbClr val="333333"/>
                 </a:solidFill>
@@ -16809,7 +16809,7 @@
           <a:lstStyle/>
           <a:p>
             <a:pPr algn="l">
-              <a:defRPr sz="1100" b="0">
+              <a:defRPr sz="1300" b="0">
                 <a:solidFill>
                   <a:srgbClr val="333333"/>
                 </a:solidFill>
@@ -16930,7 +16930,7 @@
           <a:lstStyle/>
           <a:p>
             <a:pPr algn="l">
-              <a:defRPr sz="1100" b="0">
+              <a:defRPr sz="1300" b="0">
                 <a:solidFill>
                   <a:srgbClr val="333333"/>
                 </a:solidFill>
@@ -17051,7 +17051,7 @@
           <a:lstStyle/>
           <a:p>
             <a:pPr algn="l">
-              <a:defRPr sz="1100" b="0">
+              <a:defRPr sz="1300" b="0">
                 <a:solidFill>
                   <a:srgbClr val="333333"/>
                 </a:solidFill>
@@ -17172,7 +17172,7 @@
           <a:lstStyle/>
           <a:p>
             <a:pPr algn="l">
-              <a:defRPr sz="1100" b="0">
+              <a:defRPr sz="1300" b="0">
                 <a:solidFill>
                   <a:srgbClr val="333333"/>
                 </a:solidFill>
@@ -17293,7 +17293,7 @@
           <a:lstStyle/>
           <a:p>
             <a:pPr algn="l">
-              <a:defRPr sz="1100" b="0">
+              <a:defRPr sz="1300" b="0">
                 <a:solidFill>
                   <a:srgbClr val="333333"/>
                 </a:solidFill>
@@ -17403,7 +17403,7 @@
       </p:sp>
       <p:pic>
         <p:nvPicPr>
-          <p:cNvPr id="4" name="Picture 3" descr="knu_emblem_official.jpg"/>
+          <p:cNvPr id="4" name="Picture 3" descr="knu_symbol_t.png"/>
           <p:cNvPicPr>
             <a:picLocks noChangeAspect="1"/>
           </p:cNvPicPr>
@@ -17544,7 +17544,7 @@
         </p:nvSpPr>
         <p:spPr>
           <a:xfrm>
-            <a:off x="548640" y="1371600"/>
+            <a:off x="425196" y="1371600"/>
             <a:ext cx="3566160" cy="4389120"/>
           </a:xfrm>
           <a:prstGeom prst="roundRect">
@@ -17589,7 +17589,7 @@
         </p:nvSpPr>
         <p:spPr>
           <a:xfrm>
-            <a:off x="548640" y="1645920"/>
+            <a:off x="425196" y="1645920"/>
             <a:ext cx="3566160" cy="1097280"/>
           </a:xfrm>
           <a:prstGeom prst="rect">
@@ -17623,7 +17623,7 @@
         </p:nvSpPr>
         <p:spPr>
           <a:xfrm>
-            <a:off x="548640" y="2743200"/>
+            <a:off x="425196" y="2743200"/>
             <a:ext cx="3566160" cy="457200"/>
           </a:xfrm>
           <a:prstGeom prst="rect">
@@ -17657,7 +17657,7 @@
         </p:nvSpPr>
         <p:spPr>
           <a:xfrm>
-            <a:off x="822960" y="3383280"/>
+            <a:off x="699516" y="3383280"/>
             <a:ext cx="3017520" cy="2194560"/>
           </a:xfrm>
           <a:prstGeom prst="rect">
@@ -17717,7 +17717,7 @@
         </p:nvSpPr>
         <p:spPr>
           <a:xfrm>
-            <a:off x="4389120" y="1371600"/>
+            <a:off x="4311396" y="1371600"/>
             <a:ext cx="3566160" cy="4389120"/>
           </a:xfrm>
           <a:prstGeom prst="roundRect">
@@ -17762,7 +17762,7 @@
         </p:nvSpPr>
         <p:spPr>
           <a:xfrm>
-            <a:off x="4389120" y="1645920"/>
+            <a:off x="4311396" y="1645920"/>
             <a:ext cx="3566160" cy="1097280"/>
           </a:xfrm>
           <a:prstGeom prst="rect">
@@ -17796,7 +17796,7 @@
         </p:nvSpPr>
         <p:spPr>
           <a:xfrm>
-            <a:off x="4389120" y="2743200"/>
+            <a:off x="4311396" y="2743200"/>
             <a:ext cx="3566160" cy="457200"/>
           </a:xfrm>
           <a:prstGeom prst="rect">
@@ -17830,7 +17830,7 @@
         </p:nvSpPr>
         <p:spPr>
           <a:xfrm>
-            <a:off x="4663440" y="3383280"/>
+            <a:off x="4585716" y="3383280"/>
             <a:ext cx="3017520" cy="2194560"/>
           </a:xfrm>
           <a:prstGeom prst="rect">
@@ -17890,7 +17890,7 @@
         </p:nvSpPr>
         <p:spPr>
           <a:xfrm>
-            <a:off x="8229600" y="1371600"/>
+            <a:off x="8197596" y="1371600"/>
             <a:ext cx="3566160" cy="4389120"/>
           </a:xfrm>
           <a:prstGeom prst="roundRect">
@@ -17935,7 +17935,7 @@
         </p:nvSpPr>
         <p:spPr>
           <a:xfrm>
-            <a:off x="8229600" y="1645920"/>
+            <a:off x="8197596" y="1645920"/>
             <a:ext cx="3566160" cy="1097280"/>
           </a:xfrm>
           <a:prstGeom prst="rect">
@@ -17969,7 +17969,7 @@
         </p:nvSpPr>
         <p:spPr>
           <a:xfrm>
-            <a:off x="8229600" y="2743200"/>
+            <a:off x="8197596" y="2743200"/>
             <a:ext cx="3566160" cy="457200"/>
           </a:xfrm>
           <a:prstGeom prst="rect">
@@ -18003,7 +18003,7 @@
         </p:nvSpPr>
         <p:spPr>
           <a:xfrm>
-            <a:off x="8503920" y="3383280"/>
+            <a:off x="8471916" y="3383280"/>
             <a:ext cx="3017520" cy="2194560"/>
           </a:xfrm>
           <a:prstGeom prst="rect">
@@ -18165,7 +18165,7 @@
       </p:sp>
       <p:pic>
         <p:nvPicPr>
-          <p:cNvPr id="4" name="Picture 3" descr="knu_emblem_official.jpg"/>
+          <p:cNvPr id="4" name="Picture 3" descr="knu_symbol_t.png"/>
           <p:cNvPicPr>
             <a:picLocks noChangeAspect="1"/>
           </p:cNvPicPr>
@@ -18499,7 +18499,7 @@
           <a:lstStyle/>
           <a:p>
             <a:pPr algn="l">
-              <a:defRPr sz="1100" b="0">
+              <a:defRPr sz="1200" b="0">
                 <a:solidFill>
                   <a:srgbClr val="333333"/>
                 </a:solidFill>
@@ -18512,7 +18512,7 @@
           </a:p>
           <a:p>
             <a:pPr algn="l">
-              <a:defRPr sz="1100" b="0">
+              <a:defRPr sz="1200" b="0">
                 <a:solidFill>
                   <a:srgbClr val="333333"/>
                 </a:solidFill>
@@ -18525,7 +18525,7 @@
           </a:p>
           <a:p>
             <a:pPr algn="l">
-              <a:defRPr sz="1100" b="0">
+              <a:defRPr sz="1200" b="0">
                 <a:solidFill>
                   <a:srgbClr val="333333"/>
                 </a:solidFill>
@@ -18715,7 +18715,7 @@
           <a:lstStyle/>
           <a:p>
             <a:pPr algn="l">
-              <a:defRPr sz="1100" b="0">
+              <a:defRPr sz="1200" b="0">
                 <a:solidFill>
                   <a:srgbClr val="333333"/>
                 </a:solidFill>
@@ -18723,12 +18723,12 @@
               </a:defRPr>
             </a:pPr>
             <a:r>
-              <a:t>Scoring x Pathogen</a:t>
-            </a:r>
-          </a:p>
-          <a:p>
-            <a:pPr algn="l">
-              <a:defRPr sz="1100" b="0">
+              <a:t>Detection Family × Pathogen</a:t>
+            </a:r>
+          </a:p>
+          <a:p>
+            <a:pPr algn="l">
+              <a:defRPr sz="1200" b="0">
                 <a:solidFill>
                   <a:srgbClr val="333333"/>
                 </a:solidFill>
@@ -18741,7 +18741,7 @@
           </a:p>
           <a:p>
             <a:pPr algn="l">
-              <a:defRPr sz="1100" b="0">
+              <a:defRPr sz="1200" b="0">
                 <a:solidFill>
                   <a:srgbClr val="333333"/>
                 </a:solidFill>
@@ -18931,7 +18931,7 @@
           <a:lstStyle/>
           <a:p>
             <a:pPr algn="l">
-              <a:defRPr sz="1100" b="0">
+              <a:defRPr sz="1200" b="0">
                 <a:solidFill>
                   <a:srgbClr val="333333"/>
                 </a:solidFill>
@@ -18944,7 +18944,7 @@
           </a:p>
           <a:p>
             <a:pPr algn="l">
-              <a:defRPr sz="1100" b="0">
+              <a:defRPr sz="1200" b="0">
                 <a:solidFill>
                   <a:srgbClr val="333333"/>
                 </a:solidFill>
@@ -18957,7 +18957,7 @@
           </a:p>
           <a:p>
             <a:pPr algn="l">
-              <a:defRPr sz="1100" b="0">
+              <a:defRPr sz="1200" b="0">
                 <a:solidFill>
                   <a:srgbClr val="333333"/>
                 </a:solidFill>
@@ -19067,7 +19067,7 @@
       </p:sp>
       <p:pic>
         <p:nvPicPr>
-          <p:cNvPr id="4" name="Picture 3" descr="knu_emblem_official.jpg"/>
+          <p:cNvPr id="4" name="Picture 3" descr="knu_symbol_t.png"/>
           <p:cNvPicPr>
             <a:picLocks noChangeAspect="1"/>
           </p:cNvPicPr>
@@ -19371,7 +19371,7 @@
           <a:lstStyle/>
           <a:p>
             <a:pPr algn="l">
-              <a:defRPr sz="1100" b="0">
+              <a:defRPr sz="1200" b="0">
                 <a:solidFill>
                   <a:srgbClr val="333333"/>
                 </a:solidFill>
@@ -19384,7 +19384,7 @@
           </a:p>
           <a:p>
             <a:pPr algn="l">
-              <a:defRPr sz="1100" b="0">
+              <a:defRPr sz="1200" b="0">
                 <a:solidFill>
                   <a:srgbClr val="333333"/>
                 </a:solidFill>
@@ -19397,7 +19397,7 @@
           </a:p>
           <a:p>
             <a:pPr algn="l">
-              <a:defRPr sz="1100" b="0">
+              <a:defRPr sz="1200" b="0">
                 <a:solidFill>
                   <a:srgbClr val="333333"/>
                 </a:solidFill>
@@ -19410,7 +19410,7 @@
           </a:p>
           <a:p>
             <a:pPr algn="l">
-              <a:defRPr sz="1100" b="0">
+              <a:defRPr sz="1200" b="0">
                 <a:solidFill>
                   <a:srgbClr val="333333"/>
                 </a:solidFill>
@@ -19420,7 +19420,7 @@
           </a:p>
           <a:p>
             <a:pPr algn="l">
-              <a:defRPr sz="1100" b="0">
+              <a:defRPr sz="1200" b="0">
                 <a:solidFill>
                   <a:srgbClr val="333333"/>
                 </a:solidFill>
@@ -19433,7 +19433,7 @@
           </a:p>
           <a:p>
             <a:pPr algn="l">
-              <a:defRPr sz="1100" b="0">
+              <a:defRPr sz="1200" b="0">
                 <a:solidFill>
                   <a:srgbClr val="333333"/>
                 </a:solidFill>
@@ -19446,7 +19446,7 @@
           </a:p>
           <a:p>
             <a:pPr algn="l">
-              <a:defRPr sz="1100" b="0">
+              <a:defRPr sz="1200" b="0">
                 <a:solidFill>
                   <a:srgbClr val="333333"/>
                 </a:solidFill>
@@ -19456,7 +19456,7 @@
           </a:p>
           <a:p>
             <a:pPr algn="l">
-              <a:defRPr sz="1100" b="0">
+              <a:defRPr sz="1200" b="0">
                 <a:solidFill>
                   <a:srgbClr val="333333"/>
                 </a:solidFill>
@@ -19469,7 +19469,7 @@
           </a:p>
           <a:p>
             <a:pPr algn="l">
-              <a:defRPr sz="1100" b="0">
+              <a:defRPr sz="1200" b="0">
                 <a:solidFill>
                   <a:srgbClr val="333333"/>
                 </a:solidFill>
@@ -19579,7 +19579,7 @@
       </p:sp>
       <p:pic>
         <p:nvPicPr>
-          <p:cNvPr id="4" name="Picture 3" descr="knu_emblem_official.jpg"/>
+          <p:cNvPr id="4" name="Picture 3" descr="knu_symbol_t.png"/>
           <p:cNvPicPr>
             <a:picLocks noChangeAspect="1"/>
           </p:cNvPicPr>
@@ -20420,7 +20420,7 @@
       </p:sp>
       <p:pic>
         <p:nvPicPr>
-          <p:cNvPr id="4" name="Picture 3" descr="knu_emblem_official.jpg"/>
+          <p:cNvPr id="4" name="Picture 3" descr="knu_symbol_t.png"/>
           <p:cNvPicPr>
             <a:picLocks noChangeAspect="1"/>
           </p:cNvPicPr>
@@ -21860,7 +21860,7 @@
       </p:sp>
       <p:pic>
         <p:nvPicPr>
-          <p:cNvPr id="4" name="Picture 3" descr="knu_emblem_official.jpg"/>
+          <p:cNvPr id="4" name="Picture 3" descr="knu_symbol_t.png"/>
           <p:cNvPicPr>
             <a:picLocks noChangeAspect="1"/>
           </p:cNvPicPr>
@@ -22225,7 +22225,7 @@
           <a:lstStyle/>
           <a:p>
             <a:pPr algn="l">
-              <a:defRPr sz="1100" b="0">
+              <a:defRPr sz="1200" b="0">
                 <a:solidFill>
                   <a:srgbClr val="333333"/>
                 </a:solidFill>
@@ -22233,12 +22233,12 @@
               </a:defRPr>
             </a:pPr>
             <a:r>
-              <a:t>Scoring x Pathogen interaction</a:t>
-            </a:r>
-          </a:p>
-          <a:p>
-            <a:pPr algn="l">
-              <a:defRPr sz="1100" b="0">
+              <a:t>Detection Family × Pathogen</a:t>
+            </a:r>
+          </a:p>
+          <a:p>
+            <a:pPr algn="l">
+              <a:defRPr sz="1200" b="0">
                 <a:solidFill>
                   <a:srgbClr val="333333"/>
                 </a:solidFill>
@@ -22246,7 +22246,7 @@
               </a:defRPr>
             </a:pPr>
             <a:r>
-              <a:t>explains 28.5% of variance</a:t>
+              <a:t>interaction explains 28.5% of variance</a:t>
             </a:r>
           </a:p>
         </p:txBody>
@@ -22428,7 +22428,7 @@
           <a:lstStyle/>
           <a:p>
             <a:pPr algn="l">
-              <a:defRPr sz="1100" b="0">
+              <a:defRPr sz="1200" b="0">
                 <a:solidFill>
                   <a:srgbClr val="333333"/>
                 </a:solidFill>
@@ -22441,7 +22441,7 @@
           </a:p>
           <a:p>
             <a:pPr algn="l">
-              <a:defRPr sz="1100" b="0">
+              <a:defRPr sz="1200" b="0">
                 <a:solidFill>
                   <a:srgbClr val="333333"/>
                 </a:solidFill>
@@ -22631,7 +22631,7 @@
           <a:lstStyle/>
           <a:p>
             <a:pPr algn="l">
-              <a:defRPr sz="1100" b="0">
+              <a:defRPr sz="1200" b="0">
                 <a:solidFill>
                   <a:srgbClr val="333333"/>
                 </a:solidFill>
@@ -22644,7 +22644,7 @@
           </a:p>
           <a:p>
             <a:pPr algn="l">
-              <a:defRPr sz="1100" b="0">
+              <a:defRPr sz="1200" b="0">
                 <a:solidFill>
                   <a:srgbClr val="333333"/>
                 </a:solidFill>
@@ -22834,7 +22834,7 @@
           <a:lstStyle/>
           <a:p>
             <a:pPr algn="l">
-              <a:defRPr sz="1100" b="0">
+              <a:defRPr sz="1200" b="0">
                 <a:solidFill>
                   <a:srgbClr val="333333"/>
                 </a:solidFill>
@@ -22847,7 +22847,7 @@
           </a:p>
           <a:p>
             <a:pPr algn="l">
-              <a:defRPr sz="1100" b="0">
+              <a:defRPr sz="1200" b="0">
                 <a:solidFill>
                   <a:srgbClr val="333333"/>
                 </a:solidFill>
@@ -22957,7 +22957,7 @@
       </p:sp>
       <p:pic>
         <p:nvPicPr>
-          <p:cNvPr id="4" name="Picture 3" descr="knu_emblem_official.jpg"/>
+          <p:cNvPr id="4" name="Picture 3" descr="knu_symbol_t.png"/>
           <p:cNvPicPr>
             <a:picLocks noChangeAspect="1"/>
           </p:cNvPicPr>
@@ -23805,7 +23805,7 @@
         <p:spPr>
           <a:xfrm>
             <a:off x="8321040" y="3840480"/>
-            <a:ext cx="4011930" cy="228600"/>
+            <a:ext cx="3120390" cy="228600"/>
           </a:xfrm>
           <a:prstGeom prst="rect">
             <a:avLst/>
@@ -23847,8 +23847,8 @@
         </p:nvSpPr>
         <p:spPr>
           <a:xfrm>
-            <a:off x="12424410" y="3840480"/>
-            <a:ext cx="731520" cy="228600"/>
+            <a:off x="10801350" y="3840480"/>
+            <a:ext cx="594360" cy="228600"/>
           </a:xfrm>
           <a:prstGeom prst="rect">
             <a:avLst/>
@@ -23859,10 +23859,10 @@
           <a:bodyPr wrap="square" anchor="ctr"/>
           <a:lstStyle/>
           <a:p>
-            <a:pPr algn="l">
-              <a:defRPr sz="900" b="1">
-                <a:solidFill>
-                  <a:srgbClr val="2E7D32"/>
+            <a:pPr algn="r">
+              <a:defRPr sz="1100" b="1">
+                <a:solidFill>
+                  <a:srgbClr val="FFFFFF"/>
                 </a:solidFill>
                 <a:latin typeface="Calibri"/>
               </a:defRPr>
@@ -23916,7 +23916,7 @@
         <p:spPr>
           <a:xfrm>
             <a:off x="8321040" y="4270248"/>
-            <a:ext cx="2551176" cy="228600"/>
+            <a:ext cx="1984248" cy="228600"/>
           </a:xfrm>
           <a:prstGeom prst="rect">
             <a:avLst/>
@@ -23958,8 +23958,8 @@
         </p:nvSpPr>
         <p:spPr>
           <a:xfrm>
-            <a:off x="10963656" y="4270248"/>
-            <a:ext cx="731520" cy="228600"/>
+            <a:off x="9665208" y="4270248"/>
+            <a:ext cx="594360" cy="228600"/>
           </a:xfrm>
           <a:prstGeom prst="rect">
             <a:avLst/>
@@ -23970,10 +23970,10 @@
           <a:bodyPr wrap="square" anchor="ctr"/>
           <a:lstStyle/>
           <a:p>
-            <a:pPr algn="l">
-              <a:defRPr sz="900" b="1">
-                <a:solidFill>
-                  <a:srgbClr val="1565C0"/>
+            <a:pPr algn="r">
+              <a:defRPr sz="1100" b="1">
+                <a:solidFill>
+                  <a:srgbClr val="FFFFFF"/>
                 </a:solidFill>
                 <a:latin typeface="Calibri"/>
               </a:defRPr>
@@ -24027,7 +24027,7 @@
         <p:spPr>
           <a:xfrm>
             <a:off x="8321040" y="4700016"/>
-            <a:ext cx="1985391" cy="228600"/>
+            <a:ext cx="1544193" cy="228600"/>
           </a:xfrm>
           <a:prstGeom prst="rect">
             <a:avLst/>
@@ -24069,8 +24069,8 @@
         </p:nvSpPr>
         <p:spPr>
           <a:xfrm>
-            <a:off x="10397871" y="4700016"/>
-            <a:ext cx="731520" cy="228600"/>
+            <a:off x="9225153" y="4700016"/>
+            <a:ext cx="594360" cy="228600"/>
           </a:xfrm>
           <a:prstGeom prst="rect">
             <a:avLst/>
@@ -24081,10 +24081,10 @@
           <a:bodyPr wrap="square" anchor="ctr"/>
           <a:lstStyle/>
           <a:p>
-            <a:pPr algn="l">
-              <a:defRPr sz="900" b="1">
-                <a:solidFill>
-                  <a:srgbClr val="E65100"/>
+            <a:pPr algn="r">
+              <a:defRPr sz="1100" b="1">
+                <a:solidFill>
+                  <a:srgbClr val="FFFFFF"/>
                 </a:solidFill>
                 <a:latin typeface="Calibri"/>
               </a:defRPr>
@@ -24138,7 +24138,7 @@
         <p:spPr>
           <a:xfrm>
             <a:off x="8321040" y="5129784"/>
-            <a:ext cx="1419606" cy="228600"/>
+            <a:ext cx="1104138" cy="228600"/>
           </a:xfrm>
           <a:prstGeom prst="rect">
             <a:avLst/>
@@ -24180,8 +24180,8 @@
         </p:nvSpPr>
         <p:spPr>
           <a:xfrm>
-            <a:off x="9832086" y="5129784"/>
-            <a:ext cx="731520" cy="228600"/>
+            <a:off x="8785098" y="5129784"/>
+            <a:ext cx="594360" cy="228600"/>
           </a:xfrm>
           <a:prstGeom prst="rect">
             <a:avLst/>
@@ -24192,10 +24192,10 @@
           <a:bodyPr wrap="square" anchor="ctr"/>
           <a:lstStyle/>
           <a:p>
-            <a:pPr algn="l">
-              <a:defRPr sz="900" b="1">
-                <a:solidFill>
-                  <a:srgbClr val="C62828"/>
+            <a:pPr algn="r">
+              <a:defRPr sz="1100" b="1">
+                <a:solidFill>
+                  <a:srgbClr val="FFFFFF"/>
                 </a:solidFill>
                 <a:latin typeface="Calibri"/>
               </a:defRPr>
@@ -24249,7 +24249,7 @@
         <p:spPr>
           <a:xfrm>
             <a:off x="8321040" y="5559552"/>
-            <a:ext cx="10287" cy="228600"/>
+            <a:ext cx="8001" cy="228600"/>
           </a:xfrm>
           <a:prstGeom prst="rect">
             <a:avLst/>
@@ -24291,8 +24291,8 @@
         </p:nvSpPr>
         <p:spPr>
           <a:xfrm>
-            <a:off x="8422767" y="5559552"/>
-            <a:ext cx="731520" cy="228600"/>
+            <a:off x="8374761" y="5559552"/>
+            <a:ext cx="594360" cy="228600"/>
           </a:xfrm>
           <a:prstGeom prst="rect">
             <a:avLst/>
@@ -24304,7 +24304,7 @@
           <a:lstStyle/>
           <a:p>
             <a:pPr algn="l">
-              <a:defRPr sz="900" b="1">
+              <a:defRPr sz="1100" b="1">
                 <a:solidFill>
                   <a:srgbClr val="888888"/>
                 </a:solidFill>
@@ -24414,7 +24414,7 @@
       </p:sp>
       <p:pic>
         <p:nvPicPr>
-          <p:cNvPr id="4" name="Picture 3" descr="knu_emblem_official.jpg"/>
+          <p:cNvPr id="4" name="Picture 3" descr="knu_symbol_t.png"/>
           <p:cNvPicPr>
             <a:picLocks noChangeAspect="1"/>
           </p:cNvPicPr>
@@ -25237,7 +25237,7 @@
       </p:sp>
       <p:pic>
         <p:nvPicPr>
-          <p:cNvPr id="4" name="Picture 3" descr="knu_emblem_official.jpg"/>
+          <p:cNvPr id="4" name="Picture 3" descr="knu_symbol_t.png"/>
           <p:cNvPicPr>
             <a:picLocks noChangeAspect="1"/>
           </p:cNvPicPr>
@@ -25471,7 +25471,7 @@
         <p:spPr>
           <a:xfrm>
             <a:off x="7772400" y="1993392"/>
-            <a:ext cx="3566160" cy="320040"/>
+            <a:ext cx="3120390" cy="320040"/>
           </a:xfrm>
           <a:prstGeom prst="rect">
             <a:avLst/>
@@ -25513,8 +25513,8 @@
         </p:nvSpPr>
         <p:spPr>
           <a:xfrm>
-            <a:off x="11430000" y="1993392"/>
-            <a:ext cx="914400" cy="320040"/>
+            <a:off x="10252710" y="1993392"/>
+            <a:ext cx="594360" cy="320040"/>
           </a:xfrm>
           <a:prstGeom prst="rect">
             <a:avLst/>
@@ -25525,10 +25525,10 @@
           <a:bodyPr wrap="square" anchor="ctr"/>
           <a:lstStyle/>
           <a:p>
-            <a:pPr algn="l">
+            <a:pPr algn="r">
               <a:defRPr sz="1100" b="1">
                 <a:solidFill>
-                  <a:srgbClr val="2E7D32"/>
+                  <a:srgbClr val="FFFFFF"/>
                 </a:solidFill>
                 <a:latin typeface="Calibri"/>
               </a:defRPr>
@@ -25582,7 +25582,7 @@
         <p:spPr>
           <a:xfrm>
             <a:off x="7772400" y="2907792"/>
-            <a:ext cx="2267712" cy="320040"/>
+            <a:ext cx="1984248" cy="320040"/>
           </a:xfrm>
           <a:prstGeom prst="rect">
             <a:avLst/>
@@ -25624,8 +25624,8 @@
         </p:nvSpPr>
         <p:spPr>
           <a:xfrm>
-            <a:off x="10131552" y="2907792"/>
-            <a:ext cx="914400" cy="320040"/>
+            <a:off x="9116568" y="2907792"/>
+            <a:ext cx="594360" cy="320040"/>
           </a:xfrm>
           <a:prstGeom prst="rect">
             <a:avLst/>
@@ -25636,10 +25636,10 @@
           <a:bodyPr wrap="square" anchor="ctr"/>
           <a:lstStyle/>
           <a:p>
-            <a:pPr algn="l">
+            <a:pPr algn="r">
               <a:defRPr sz="1100" b="1">
                 <a:solidFill>
-                  <a:srgbClr val="1565C0"/>
+                  <a:srgbClr val="FFFFFF"/>
                 </a:solidFill>
                 <a:latin typeface="Calibri"/>
               </a:defRPr>
@@ -25693,7 +25693,7 @@
         <p:spPr>
           <a:xfrm>
             <a:off x="7772400" y="3822192"/>
-            <a:ext cx="1764792" cy="320040"/>
+            <a:ext cx="1544193" cy="320040"/>
           </a:xfrm>
           <a:prstGeom prst="rect">
             <a:avLst/>
@@ -25735,8 +25735,8 @@
         </p:nvSpPr>
         <p:spPr>
           <a:xfrm>
-            <a:off x="9628632" y="3822192"/>
-            <a:ext cx="914400" cy="320040"/>
+            <a:off x="8676513" y="3822192"/>
+            <a:ext cx="594360" cy="320040"/>
           </a:xfrm>
           <a:prstGeom prst="rect">
             <a:avLst/>
@@ -25747,10 +25747,10 @@
           <a:bodyPr wrap="square" anchor="ctr"/>
           <a:lstStyle/>
           <a:p>
-            <a:pPr algn="l">
+            <a:pPr algn="r">
               <a:defRPr sz="1100" b="1">
                 <a:solidFill>
-                  <a:srgbClr val="E65100"/>
+                  <a:srgbClr val="FFFFFF"/>
                 </a:solidFill>
                 <a:latin typeface="Calibri"/>
               </a:defRPr>
@@ -25804,7 +25804,7 @@
         <p:spPr>
           <a:xfrm>
             <a:off x="7772400" y="4736592"/>
-            <a:ext cx="1261872" cy="320040"/>
+            <a:ext cx="1104138" cy="320040"/>
           </a:xfrm>
           <a:prstGeom prst="rect">
             <a:avLst/>
@@ -25846,8 +25846,8 @@
         </p:nvSpPr>
         <p:spPr>
           <a:xfrm>
-            <a:off x="9125712" y="4736592"/>
-            <a:ext cx="914400" cy="320040"/>
+            <a:off x="8236458" y="4736592"/>
+            <a:ext cx="594360" cy="320040"/>
           </a:xfrm>
           <a:prstGeom prst="rect">
             <a:avLst/>
@@ -25858,10 +25858,10 @@
           <a:bodyPr wrap="square" anchor="ctr"/>
           <a:lstStyle/>
           <a:p>
-            <a:pPr algn="l">
+            <a:pPr algn="r">
               <a:defRPr sz="1100" b="1">
                 <a:solidFill>
-                  <a:srgbClr val="C62828"/>
+                  <a:srgbClr val="FFFFFF"/>
                 </a:solidFill>
                 <a:latin typeface="Calibri"/>
               </a:defRPr>
@@ -25915,7 +25915,7 @@
         <p:spPr>
           <a:xfrm>
             <a:off x="7772400" y="5650992"/>
-            <a:ext cx="9144" cy="320040"/>
+            <a:ext cx="8001" cy="320040"/>
           </a:xfrm>
           <a:prstGeom prst="rect">
             <a:avLst/>
@@ -25957,8 +25957,8 @@
         </p:nvSpPr>
         <p:spPr>
           <a:xfrm>
-            <a:off x="7872984" y="5650992"/>
-            <a:ext cx="914400" cy="320040"/>
+            <a:off x="7826121" y="5650992"/>
+            <a:ext cx="594360" cy="320040"/>
           </a:xfrm>
           <a:prstGeom prst="rect">
             <a:avLst/>
@@ -26080,7 +26080,7 @@
       </p:sp>
       <p:pic>
         <p:nvPicPr>
-          <p:cNvPr id="4" name="Picture 3" descr="knu_emblem_official.jpg"/>
+          <p:cNvPr id="4" name="Picture 3" descr="knu_symbol_t.png"/>
           <p:cNvPicPr>
             <a:picLocks noChangeAspect="1"/>
           </p:cNvPicPr>
@@ -26416,7 +26416,7 @@
           <a:lstStyle/>
           <a:p>
             <a:pPr algn="l">
-              <a:defRPr sz="900" b="0">
+              <a:defRPr sz="1000" b="0">
                 <a:solidFill>
                   <a:srgbClr val="888888"/>
                 </a:solidFill>
@@ -26632,7 +26632,7 @@
           <a:lstStyle/>
           <a:p>
             <a:pPr algn="l">
-              <a:defRPr sz="900" b="0">
+              <a:defRPr sz="1000" b="0">
                 <a:solidFill>
                   <a:srgbClr val="888888"/>
                 </a:solidFill>
@@ -26848,7 +26848,7 @@
           <a:lstStyle/>
           <a:p>
             <a:pPr algn="l">
-              <a:defRPr sz="900" b="0">
+              <a:defRPr sz="1000" b="0">
                 <a:solidFill>
                   <a:srgbClr val="888888"/>
                 </a:solidFill>
@@ -27064,7 +27064,7 @@
           <a:lstStyle/>
           <a:p>
             <a:pPr algn="l">
-              <a:defRPr sz="900" b="0">
+              <a:defRPr sz="1000" b="0">
                 <a:solidFill>
                   <a:srgbClr val="888888"/>
                 </a:solidFill>
@@ -27174,7 +27174,7 @@
       </p:sp>
       <p:pic>
         <p:nvPicPr>
-          <p:cNvPr id="4" name="Picture 3" descr="knu_emblem_official.jpg"/>
+          <p:cNvPr id="4" name="Picture 3" descr="knu_symbol_t.png"/>
           <p:cNvPicPr>
             <a:picLocks noChangeAspect="1"/>
           </p:cNvPicPr>
@@ -27484,7 +27484,7 @@
           <a:lstStyle/>
           <a:p>
             <a:pPr algn="l">
-              <a:defRPr sz="1100" b="0">
+              <a:defRPr sz="1300" b="0">
                 <a:solidFill>
                   <a:srgbClr val="333333"/>
                 </a:solidFill>
@@ -27497,7 +27497,7 @@
           </a:p>
           <a:p>
             <a:pPr algn="l">
-              <a:defRPr sz="1100" b="0">
+              <a:defRPr sz="1300" b="0">
                 <a:solidFill>
                   <a:srgbClr val="333333"/>
                 </a:solidFill>
@@ -27510,7 +27510,7 @@
           </a:p>
           <a:p>
             <a:pPr algn="l">
-              <a:defRPr sz="1100" b="0">
+              <a:defRPr sz="1300" b="0">
                 <a:solidFill>
                   <a:srgbClr val="333333"/>
                 </a:solidFill>
@@ -27520,7 +27520,7 @@
           </a:p>
           <a:p>
             <a:pPr algn="l">
-              <a:defRPr sz="1100" b="0">
+              <a:defRPr sz="1300" b="0">
                 <a:solidFill>
                   <a:srgbClr val="333333"/>
                 </a:solidFill>
@@ -27533,7 +27533,7 @@
           </a:p>
           <a:p>
             <a:pPr algn="l">
-              <a:defRPr sz="1100" b="0">
+              <a:defRPr sz="1300" b="0">
                 <a:solidFill>
                   <a:srgbClr val="333333"/>
                 </a:solidFill>
@@ -27747,7 +27747,7 @@
           <a:lstStyle/>
           <a:p>
             <a:pPr algn="l">
-              <a:defRPr sz="1100" b="0">
+              <a:defRPr sz="1300" b="0">
                 <a:solidFill>
                   <a:srgbClr val="333333"/>
                 </a:solidFill>
@@ -27760,7 +27760,7 @@
           </a:p>
           <a:p>
             <a:pPr algn="l">
-              <a:defRPr sz="1100" b="0">
+              <a:defRPr sz="1300" b="0">
                 <a:solidFill>
                   <a:srgbClr val="333333"/>
                 </a:solidFill>
@@ -27773,7 +27773,7 @@
           </a:p>
           <a:p>
             <a:pPr algn="l">
-              <a:defRPr sz="1100" b="0">
+              <a:defRPr sz="1300" b="0">
                 <a:solidFill>
                   <a:srgbClr val="333333"/>
                 </a:solidFill>
@@ -27783,7 +27783,7 @@
           </a:p>
           <a:p>
             <a:pPr algn="l">
-              <a:defRPr sz="1100" b="0">
+              <a:defRPr sz="1300" b="0">
                 <a:solidFill>
                   <a:srgbClr val="333333"/>
                 </a:solidFill>
@@ -27796,7 +27796,7 @@
           </a:p>
           <a:p>
             <a:pPr algn="l">
-              <a:defRPr sz="1100" b="0">
+              <a:defRPr sz="1300" b="0">
                 <a:solidFill>
                   <a:srgbClr val="333333"/>
                 </a:solidFill>
@@ -27930,7 +27930,7 @@
       </p:sp>
       <p:pic>
         <p:nvPicPr>
-          <p:cNvPr id="4" name="Picture 3" descr="knu_emblem_official.jpg"/>
+          <p:cNvPr id="4" name="Picture 3" descr="knu_symbol_t.png"/>
           <p:cNvPicPr>
             <a:picLocks noChangeAspect="1"/>
           </p:cNvPicPr>
@@ -28628,7 +28628,7 @@
       </p:sp>
       <p:pic>
         <p:nvPicPr>
-          <p:cNvPr id="4" name="Picture 3" descr="knu_emblem_official.jpg"/>
+          <p:cNvPr id="4" name="Picture 3" descr="knu_symbol_t.png"/>
           <p:cNvPicPr>
             <a:picLocks noChangeAspect="1"/>
           </p:cNvPicPr>
@@ -28947,7 +28947,7 @@
           <a:lstStyle/>
           <a:p>
             <a:pPr algn="l">
-              <a:defRPr sz="1100" b="0">
+              <a:defRPr sz="1200" b="0">
                 <a:solidFill>
                   <a:srgbClr val="333333"/>
                 </a:solidFill>
@@ -28960,7 +28960,7 @@
           </a:p>
           <a:p>
             <a:pPr algn="l">
-              <a:defRPr sz="1100" b="0">
+              <a:defRPr sz="1200" b="0">
                 <a:solidFill>
                   <a:srgbClr val="333333"/>
                 </a:solidFill>
@@ -29082,7 +29082,7 @@
           <a:lstStyle/>
           <a:p>
             <a:pPr algn="l">
-              <a:defRPr sz="1100" b="0">
+              <a:defRPr sz="1200" b="0">
                 <a:solidFill>
                   <a:srgbClr val="333333"/>
                 </a:solidFill>
@@ -29095,7 +29095,7 @@
           </a:p>
           <a:p>
             <a:pPr algn="l">
-              <a:defRPr sz="1100" b="0">
+              <a:defRPr sz="1200" b="0">
                 <a:solidFill>
                   <a:srgbClr val="333333"/>
                 </a:solidFill>
@@ -29217,7 +29217,7 @@
           <a:lstStyle/>
           <a:p>
             <a:pPr algn="l">
-              <a:defRPr sz="1100" b="0">
+              <a:defRPr sz="1200" b="0">
                 <a:solidFill>
                   <a:srgbClr val="333333"/>
                 </a:solidFill>
@@ -29230,7 +29230,7 @@
           </a:p>
           <a:p>
             <a:pPr algn="l">
-              <a:defRPr sz="1100" b="0">
+              <a:defRPr sz="1200" b="0">
                 <a:solidFill>
                   <a:srgbClr val="333333"/>
                 </a:solidFill>
@@ -29352,7 +29352,7 @@
           <a:lstStyle/>
           <a:p>
             <a:pPr algn="l">
-              <a:defRPr sz="1100" b="0">
+              <a:defRPr sz="1200" b="0">
                 <a:solidFill>
                   <a:srgbClr val="333333"/>
                 </a:solidFill>
@@ -29365,7 +29365,7 @@
           </a:p>
           <a:p>
             <a:pPr algn="l">
-              <a:defRPr sz="1100" b="0">
+              <a:defRPr sz="1200" b="0">
                 <a:solidFill>
                   <a:srgbClr val="333333"/>
                 </a:solidFill>
@@ -29564,7 +29564,7 @@
           <a:lstStyle/>
           <a:p>
             <a:pPr algn="l">
-              <a:defRPr sz="1100" b="0">
+              <a:defRPr sz="1200" b="0">
                 <a:solidFill>
                   <a:srgbClr val="333333"/>
                 </a:solidFill>
@@ -29577,7 +29577,7 @@
           </a:p>
           <a:p>
             <a:pPr algn="l">
-              <a:defRPr sz="1100" b="0">
+              <a:defRPr sz="1200" b="0">
                 <a:solidFill>
                   <a:srgbClr val="333333"/>
                 </a:solidFill>
@@ -29699,7 +29699,7 @@
           <a:lstStyle/>
           <a:p>
             <a:pPr algn="l">
-              <a:defRPr sz="1100" b="0">
+              <a:defRPr sz="1200" b="0">
                 <a:solidFill>
                   <a:srgbClr val="333333"/>
                 </a:solidFill>
@@ -29712,7 +29712,7 @@
           </a:p>
           <a:p>
             <a:pPr algn="l">
-              <a:defRPr sz="1100" b="0">
+              <a:defRPr sz="1200" b="0">
                 <a:solidFill>
                   <a:srgbClr val="333333"/>
                 </a:solidFill>
@@ -29834,7 +29834,7 @@
           <a:lstStyle/>
           <a:p>
             <a:pPr algn="l">
-              <a:defRPr sz="1100" b="0">
+              <a:defRPr sz="1200" b="0">
                 <a:solidFill>
                   <a:srgbClr val="333333"/>
                 </a:solidFill>
@@ -29847,7 +29847,7 @@
           </a:p>
           <a:p>
             <a:pPr algn="l">
-              <a:defRPr sz="1100" b="0">
+              <a:defRPr sz="1200" b="0">
                 <a:solidFill>
                   <a:srgbClr val="333333"/>
                 </a:solidFill>
@@ -29969,7 +29969,7 @@
           <a:lstStyle/>
           <a:p>
             <a:pPr algn="l">
-              <a:defRPr sz="1100" b="0">
+              <a:defRPr sz="1200" b="0">
                 <a:solidFill>
                   <a:srgbClr val="333333"/>
                 </a:solidFill>
@@ -29982,7 +29982,7 @@
           </a:p>
           <a:p>
             <a:pPr algn="l">
-              <a:defRPr sz="1100" b="0">
+              <a:defRPr sz="1200" b="0">
                 <a:solidFill>
                   <a:srgbClr val="333333"/>
                 </a:solidFill>
@@ -30092,7 +30092,7 @@
       </p:sp>
       <p:pic>
         <p:nvPicPr>
-          <p:cNvPr id="4" name="Picture 3" descr="knu_emblem_official.jpg"/>
+          <p:cNvPr id="4" name="Picture 3" descr="knu_symbol_t.png"/>
           <p:cNvPicPr>
             <a:picLocks noChangeAspect="1"/>
           </p:cNvPicPr>
@@ -31084,7 +31084,7 @@
       </p:sp>
       <p:pic>
         <p:nvPicPr>
-          <p:cNvPr id="3" name="Picture 2" descr="knu_emblem_official.jpg"/>
+          <p:cNvPr id="3" name="Picture 2" descr="knu_symbol_t.png"/>
           <p:cNvPicPr>
             <a:picLocks noChangeAspect="1"/>
           </p:cNvPicPr>
@@ -31539,7 +31539,7 @@
       </p:sp>
       <p:pic>
         <p:nvPicPr>
-          <p:cNvPr id="4" name="Picture 3" descr="knu_emblem_official.jpg"/>
+          <p:cNvPr id="4" name="Picture 3" descr="knu_symbol_t.png"/>
           <p:cNvPicPr>
             <a:picLocks noChangeAspect="1"/>
           </p:cNvPicPr>
@@ -31782,8 +31782,8 @@
         </p:nvSpPr>
         <p:spPr>
           <a:xfrm>
-            <a:off x="548640" y="3383280"/>
-            <a:ext cx="4754880" cy="731520"/>
+            <a:off x="548640" y="3291840"/>
+            <a:ext cx="4754880" cy="685800"/>
           </a:xfrm>
           <a:prstGeom prst="roundRect">
             <a:avLst/>
@@ -31827,7 +31827,7 @@
         </p:nvSpPr>
         <p:spPr>
           <a:xfrm>
-            <a:off x="731520" y="3429000"/>
+            <a:off x="731520" y="3319272"/>
             <a:ext cx="1280160" cy="274320"/>
           </a:xfrm>
           <a:prstGeom prst="rect">
@@ -31861,7 +31861,7 @@
         </p:nvSpPr>
         <p:spPr>
           <a:xfrm>
-            <a:off x="731520" y="3703320"/>
+            <a:off x="731520" y="3575304"/>
             <a:ext cx="3474720" cy="365760"/>
           </a:xfrm>
           <a:prstGeom prst="rect">
@@ -31874,7 +31874,7 @@
           <a:lstStyle/>
           <a:p>
             <a:pPr algn="l">
-              <a:defRPr sz="900" b="0">
+              <a:defRPr sz="1100" b="0">
                 <a:solidFill>
                   <a:srgbClr val="333333"/>
                 </a:solidFill>
@@ -31887,7 +31887,7 @@
           </a:p>
           <a:p>
             <a:pPr algn="l">
-              <a:defRPr sz="900" b="0">
+              <a:defRPr sz="1100" b="0">
                 <a:solidFill>
                   <a:srgbClr val="333333"/>
                 </a:solidFill>
@@ -31908,8 +31908,8 @@
         </p:nvSpPr>
         <p:spPr>
           <a:xfrm>
-            <a:off x="4297680" y="3429000"/>
-            <a:ext cx="914400" cy="640080"/>
+            <a:off x="4297680" y="3319272"/>
+            <a:ext cx="914400" cy="621792"/>
           </a:xfrm>
           <a:prstGeom prst="roundRect">
             <a:avLst/>
@@ -31963,8 +31963,8 @@
         </p:nvSpPr>
         <p:spPr>
           <a:xfrm>
-            <a:off x="548640" y="4206240"/>
-            <a:ext cx="4754880" cy="731520"/>
+            <a:off x="548640" y="4023360"/>
+            <a:ext cx="4754880" cy="685800"/>
           </a:xfrm>
           <a:prstGeom prst="roundRect">
             <a:avLst/>
@@ -32008,7 +32008,7 @@
         </p:nvSpPr>
         <p:spPr>
           <a:xfrm>
-            <a:off x="731520" y="4251960"/>
+            <a:off x="731520" y="4050792"/>
             <a:ext cx="1280160" cy="274320"/>
           </a:xfrm>
           <a:prstGeom prst="rect">
@@ -32042,7 +32042,7 @@
         </p:nvSpPr>
         <p:spPr>
           <a:xfrm>
-            <a:off x="731520" y="4526280"/>
+            <a:off x="731520" y="4306824"/>
             <a:ext cx="3474720" cy="365760"/>
           </a:xfrm>
           <a:prstGeom prst="rect">
@@ -32055,7 +32055,7 @@
           <a:lstStyle/>
           <a:p>
             <a:pPr algn="l">
-              <a:defRPr sz="900" b="0">
+              <a:defRPr sz="1100" b="0">
                 <a:solidFill>
                   <a:srgbClr val="333333"/>
                 </a:solidFill>
@@ -32068,7 +32068,7 @@
           </a:p>
           <a:p>
             <a:pPr algn="l">
-              <a:defRPr sz="900" b="0">
+              <a:defRPr sz="1100" b="0">
                 <a:solidFill>
                   <a:srgbClr val="333333"/>
                 </a:solidFill>
@@ -32089,8 +32089,8 @@
         </p:nvSpPr>
         <p:spPr>
           <a:xfrm>
-            <a:off x="4297680" y="4251960"/>
-            <a:ext cx="914400" cy="640080"/>
+            <a:off x="4297680" y="4050792"/>
+            <a:ext cx="914400" cy="621792"/>
           </a:xfrm>
           <a:prstGeom prst="roundRect">
             <a:avLst/>
@@ -32144,8 +32144,8 @@
         </p:nvSpPr>
         <p:spPr>
           <a:xfrm>
-            <a:off x="548640" y="5029200"/>
-            <a:ext cx="4754880" cy="731520"/>
+            <a:off x="548640" y="4754880"/>
+            <a:ext cx="4754880" cy="685800"/>
           </a:xfrm>
           <a:prstGeom prst="roundRect">
             <a:avLst/>
@@ -32189,7 +32189,7 @@
         </p:nvSpPr>
         <p:spPr>
           <a:xfrm>
-            <a:off x="731520" y="5074920"/>
+            <a:off x="731520" y="4782312"/>
             <a:ext cx="1280160" cy="274320"/>
           </a:xfrm>
           <a:prstGeom prst="rect">
@@ -32223,7 +32223,7 @@
         </p:nvSpPr>
         <p:spPr>
           <a:xfrm>
-            <a:off x="731520" y="5349240"/>
+            <a:off x="731520" y="5038344"/>
             <a:ext cx="3474720" cy="365760"/>
           </a:xfrm>
           <a:prstGeom prst="rect">
@@ -32236,7 +32236,7 @@
           <a:lstStyle/>
           <a:p>
             <a:pPr algn="l">
-              <a:defRPr sz="900" b="0">
+              <a:defRPr sz="1100" b="0">
                 <a:solidFill>
                   <a:srgbClr val="333333"/>
                 </a:solidFill>
@@ -32257,8 +32257,8 @@
         </p:nvSpPr>
         <p:spPr>
           <a:xfrm>
-            <a:off x="4297680" y="5074920"/>
-            <a:ext cx="914400" cy="640080"/>
+            <a:off x="4297680" y="4782312"/>
+            <a:ext cx="914400" cy="621792"/>
           </a:xfrm>
           <a:prstGeom prst="roundRect">
             <a:avLst/>
@@ -32312,8 +32312,8 @@
         </p:nvSpPr>
         <p:spPr>
           <a:xfrm>
-            <a:off x="548640" y="5852160"/>
-            <a:ext cx="4754880" cy="731520"/>
+            <a:off x="548640" y="5486400"/>
+            <a:ext cx="4754880" cy="685800"/>
           </a:xfrm>
           <a:prstGeom prst="roundRect">
             <a:avLst/>
@@ -32357,7 +32357,7 @@
         </p:nvSpPr>
         <p:spPr>
           <a:xfrm>
-            <a:off x="731520" y="5897880"/>
+            <a:off x="731520" y="5513832"/>
             <a:ext cx="1280160" cy="274320"/>
           </a:xfrm>
           <a:prstGeom prst="rect">
@@ -32391,7 +32391,7 @@
         </p:nvSpPr>
         <p:spPr>
           <a:xfrm>
-            <a:off x="731520" y="6172200"/>
+            <a:off x="731520" y="5769864"/>
             <a:ext cx="3474720" cy="365760"/>
           </a:xfrm>
           <a:prstGeom prst="rect">
@@ -32404,7 +32404,7 @@
           <a:lstStyle/>
           <a:p>
             <a:pPr algn="l">
-              <a:defRPr sz="900" b="0">
+              <a:defRPr sz="1100" b="0">
                 <a:solidFill>
                   <a:srgbClr val="333333"/>
                 </a:solidFill>
@@ -32417,7 +32417,7 @@
           </a:p>
           <a:p>
             <a:pPr algn="l">
-              <a:defRPr sz="900" b="0">
+              <a:defRPr sz="1100" b="0">
                 <a:solidFill>
                   <a:srgbClr val="333333"/>
                 </a:solidFill>
@@ -32438,8 +32438,8 @@
         </p:nvSpPr>
         <p:spPr>
           <a:xfrm>
-            <a:off x="4297680" y="5897880"/>
-            <a:ext cx="914400" cy="640080"/>
+            <a:off x="4297680" y="5513832"/>
+            <a:ext cx="914400" cy="621792"/>
           </a:xfrm>
           <a:prstGeom prst="roundRect">
             <a:avLst/>
@@ -32493,7 +32493,7 @@
         </p:nvSpPr>
         <p:spPr>
           <a:xfrm>
-            <a:off x="5669280" y="3383280"/>
+            <a:off x="5669280" y="3291840"/>
             <a:ext cx="1920240" cy="502920"/>
           </a:xfrm>
           <a:prstGeom prst="roundRect">
@@ -32546,7 +32546,7 @@
         </p:nvSpPr>
         <p:spPr>
           <a:xfrm>
-            <a:off x="5760720" y="3977640"/>
+            <a:off x="5760720" y="3886200"/>
             <a:ext cx="1737360" cy="1371600"/>
           </a:xfrm>
           <a:prstGeom prst="roundRect">
@@ -32601,7 +32601,7 @@
         </p:nvSpPr>
         <p:spPr>
           <a:xfrm>
-            <a:off x="7589520" y="3429000"/>
+            <a:off x="7589520" y="3337560"/>
             <a:ext cx="274320" cy="411480"/>
           </a:xfrm>
           <a:prstGeom prst="rect">
@@ -32635,7 +32635,7 @@
         </p:nvSpPr>
         <p:spPr>
           <a:xfrm>
-            <a:off x="7863840" y="3383280"/>
+            <a:off x="7863840" y="3291840"/>
             <a:ext cx="1920240" cy="502920"/>
           </a:xfrm>
           <a:prstGeom prst="roundRect">
@@ -32688,7 +32688,7 @@
         </p:nvSpPr>
         <p:spPr>
           <a:xfrm>
-            <a:off x="7955280" y="3977640"/>
+            <a:off x="7955280" y="3886200"/>
             <a:ext cx="1737360" cy="1371600"/>
           </a:xfrm>
           <a:prstGeom prst="roundRect">
@@ -32743,7 +32743,7 @@
         </p:nvSpPr>
         <p:spPr>
           <a:xfrm>
-            <a:off x="9784080" y="3429000"/>
+            <a:off x="9784080" y="3337560"/>
             <a:ext cx="274320" cy="411480"/>
           </a:xfrm>
           <a:prstGeom prst="rect">
@@ -32777,7 +32777,7 @@
         </p:nvSpPr>
         <p:spPr>
           <a:xfrm>
-            <a:off x="10058400" y="3383280"/>
+            <a:off x="10058400" y="3291840"/>
             <a:ext cx="1920240" cy="502920"/>
           </a:xfrm>
           <a:prstGeom prst="roundRect">
@@ -32830,7 +32830,7 @@
         </p:nvSpPr>
         <p:spPr>
           <a:xfrm>
-            <a:off x="10149840" y="3977640"/>
+            <a:off x="10149840" y="3886200"/>
             <a:ext cx="1737360" cy="1371600"/>
           </a:xfrm>
           <a:prstGeom prst="roundRect">
@@ -32885,7 +32885,7 @@
         </p:nvSpPr>
         <p:spPr>
           <a:xfrm>
-            <a:off x="5669280" y="5577840"/>
+            <a:off x="5669280" y="5394960"/>
             <a:ext cx="5760720" cy="640080"/>
           </a:xfrm>
           <a:prstGeom prst="roundRect">
@@ -33042,7 +33042,7 @@
       </p:sp>
       <p:pic>
         <p:nvPicPr>
-          <p:cNvPr id="4" name="Picture 3" descr="knu_emblem_official.jpg"/>
+          <p:cNvPr id="4" name="Picture 3" descr="knu_symbol_t.png"/>
           <p:cNvPicPr>
             <a:picLocks noChangeAspect="1"/>
           </p:cNvPicPr>
@@ -33328,7 +33328,7 @@
           <a:lstStyle/>
           <a:p>
             <a:pPr algn="l">
-              <a:defRPr sz="900" b="0">
+              <a:defRPr sz="1100" b="0">
                 <a:solidFill>
                   <a:srgbClr val="333333"/>
                 </a:solidFill>
@@ -33439,7 +33439,7 @@
           <a:lstStyle/>
           <a:p>
             <a:pPr algn="l">
-              <a:defRPr sz="900" b="0">
+              <a:defRPr sz="1100" b="0">
                 <a:solidFill>
                   <a:srgbClr val="333333"/>
                 </a:solidFill>
@@ -33550,7 +33550,7 @@
           <a:lstStyle/>
           <a:p>
             <a:pPr algn="l">
-              <a:defRPr sz="900" b="0">
+              <a:defRPr sz="1100" b="0">
                 <a:solidFill>
                   <a:srgbClr val="333333"/>
                 </a:solidFill>
@@ -33740,7 +33740,7 @@
           <a:lstStyle/>
           <a:p>
             <a:pPr algn="l">
-              <a:defRPr sz="900" b="0">
+              <a:defRPr sz="1100" b="0">
                 <a:solidFill>
                   <a:srgbClr val="333333"/>
                 </a:solidFill>
@@ -33896,7 +33896,7 @@
           <a:lstStyle/>
           <a:p>
             <a:pPr algn="l">
-              <a:defRPr sz="900" b="0">
+              <a:defRPr sz="1100" b="0">
                 <a:solidFill>
                   <a:srgbClr val="333333"/>
                 </a:solidFill>
@@ -34052,7 +34052,7 @@
           <a:lstStyle/>
           <a:p>
             <a:pPr algn="l">
-              <a:defRPr sz="900" b="0">
+              <a:defRPr sz="1100" b="0">
                 <a:solidFill>
                   <a:srgbClr val="333333"/>
                 </a:solidFill>
@@ -34243,7 +34243,7 @@
       </p:sp>
       <p:pic>
         <p:nvPicPr>
-          <p:cNvPr id="4" name="Picture 3" descr="knu_emblem_official.jpg"/>
+          <p:cNvPr id="4" name="Picture 3" descr="knu_symbol_t.png"/>
           <p:cNvPicPr>
             <a:picLocks noChangeAspect="1"/>
           </p:cNvPicPr>
@@ -35331,7 +35331,7 @@
       </p:sp>
       <p:pic>
         <p:nvPicPr>
-          <p:cNvPr id="4" name="Picture 3" descr="knu_emblem_official.jpg"/>
+          <p:cNvPr id="4" name="Picture 3" descr="knu_symbol_t.png"/>
           <p:cNvPicPr>
             <a:picLocks noChangeAspect="1"/>
           </p:cNvPicPr>
@@ -35503,51 +35503,48 @@
           <a:bodyPr rtlCol="0" anchor="ctr" wrap="square"/>
           <a:lstStyle/>
           <a:p>
+            <a:pPr algn="ctr"/>
+            <a:r>
+              <a:rPr sz="1300" b="1">
+                <a:solidFill>
+                  <a:srgbClr val="FFFFFF"/>
+                </a:solidFill>
+                <a:latin typeface="Calibri"/>
+              </a:rPr>
+              <a:t>Problem</a:t>
+            </a:r>
+          </a:p>
+          <a:p>
             <a:pPr algn="ctr">
-              <a:defRPr sz="1100" b="0">
+              <a:spcBef>
+                <a:spcPts val="200"/>
+              </a:spcBef>
+              <a:spcAft>
+                <a:spcPts val="0"/>
+              </a:spcAft>
+            </a:pPr>
+          </a:p>
+          <a:p>
+            <a:pPr algn="ctr"/>
+            <a:r>
+              <a:rPr sz="1100" b="0">
                 <a:solidFill>
                   <a:srgbClr val="FFFFFF"/>
                 </a:solidFill>
                 <a:latin typeface="Calibri"/>
-              </a:defRPr>
-            </a:pPr>
-            <a:r>
-              <a:t>Problem</a:t>
-            </a:r>
-          </a:p>
-          <a:p>
-            <a:pPr algn="ctr">
-              <a:defRPr sz="1100" b="0">
+              </a:rPr>
+              <a:t>No benchmark for</a:t>
+            </a:r>
+          </a:p>
+          <a:p>
+            <a:pPr algn="ctr"/>
+            <a:r>
+              <a:rPr sz="1100" b="0">
                 <a:solidFill>
                   <a:srgbClr val="FFFFFF"/>
                 </a:solidFill>
                 <a:latin typeface="Calibri"/>
-              </a:defRPr>
-            </a:pPr>
-          </a:p>
-          <a:p>
-            <a:pPr algn="ctr">
-              <a:defRPr sz="1100" b="0">
-                <a:solidFill>
-                  <a:srgbClr val="FFFFFF"/>
-                </a:solidFill>
-                <a:latin typeface="Calibri"/>
-              </a:defRPr>
-            </a:pPr>
-            <a:r>
-              <a:t>No benchmark for</a:t>
-            </a:r>
-          </a:p>
-          <a:p>
-            <a:pPr algn="ctr">
-              <a:defRPr sz="1100" b="0">
-                <a:solidFill>
-                  <a:srgbClr val="FFFFFF"/>
-                </a:solidFill>
-                <a:latin typeface="Calibri"/>
-              </a:defRPr>
-            </a:pPr>
-            <a:r>
+              </a:rPr>
               <a:t>hotspot detection</a:t>
             </a:r>
           </a:p>
@@ -35556,40 +35553,6 @@
       <p:sp>
         <p:nvSpPr>
           <p:cNvPr id="9" name="TextBox 8"/>
-          <p:cNvSpPr txBox="1"/>
-          <p:nvPr/>
-        </p:nvSpPr>
-        <p:spPr>
-          <a:xfrm>
-            <a:off x="365760" y="1280160"/>
-            <a:ext cx="2011680" cy="320040"/>
-          </a:xfrm>
-          <a:prstGeom prst="rect">
-            <a:avLst/>
-          </a:prstGeom>
-          <a:noFill/>
-        </p:spPr>
-        <p:txBody>
-          <a:bodyPr wrap="square" anchor="t"/>
-          <a:lstStyle/>
-          <a:p>
-            <a:pPr algn="ctr">
-              <a:defRPr sz="1300" b="1">
-                <a:solidFill>
-                  <a:srgbClr val="FFFFFF"/>
-                </a:solidFill>
-                <a:latin typeface="Calibri"/>
-              </a:defRPr>
-            </a:pPr>
-            <a:r>
-              <a:t>Problem</a:t>
-            </a:r>
-          </a:p>
-        </p:txBody>
-      </p:sp>
-      <p:sp>
-        <p:nvSpPr>
-          <p:cNvPr id="10" name="TextBox 9"/>
           <p:cNvSpPr txBox="1"/>
           <p:nvPr/>
         </p:nvSpPr>
@@ -35608,7 +35571,7 @@
           <a:lstStyle/>
           <a:p>
             <a:pPr algn="ctr">
-              <a:defRPr sz="2400" b="1">
+              <a:defRPr sz="1800" b="1">
                 <a:solidFill>
                   <a:srgbClr val="333333"/>
                 </a:solidFill>
@@ -35623,7 +35586,7 @@
       </p:sp>
       <p:sp>
         <p:nvSpPr>
-          <p:cNvPr id="11" name="Rounded Rectangle 10"/>
+          <p:cNvPr id="10" name="Rounded Rectangle 9"/>
           <p:cNvSpPr/>
           <p:nvPr/>
         </p:nvSpPr>
@@ -35660,64 +35623,60 @@
           <a:bodyPr rtlCol="0" anchor="ctr" wrap="square"/>
           <a:lstStyle/>
           <a:p>
+            <a:pPr algn="ctr"/>
+            <a:r>
+              <a:rPr sz="1300" b="1">
+                <a:solidFill>
+                  <a:srgbClr val="FFFFFF"/>
+                </a:solidFill>
+                <a:latin typeface="Calibri"/>
+              </a:rPr>
+              <a:t>MutBench</a:t>
+            </a:r>
+          </a:p>
+          <a:p>
             <a:pPr algn="ctr">
-              <a:defRPr sz="1100" b="0">
+              <a:spcBef>
+                <a:spcPts val="200"/>
+              </a:spcBef>
+              <a:spcAft>
+                <a:spcPts val="0"/>
+              </a:spcAft>
+            </a:pPr>
+          </a:p>
+          <a:p>
+            <a:pPr algn="ctr"/>
+            <a:r>
+              <a:rPr sz="1100" b="0">
                 <a:solidFill>
                   <a:srgbClr val="FFFFFF"/>
                 </a:solidFill>
                 <a:latin typeface="Calibri"/>
-              </a:defRPr>
-            </a:pPr>
-            <a:r>
-              <a:t>MutBench</a:t>
-            </a:r>
-          </a:p>
-          <a:p>
-            <a:pPr algn="ctr">
-              <a:defRPr sz="1100" b="0">
+              </a:rPr>
+              <a:t>3-Layer GT</a:t>
+            </a:r>
+          </a:p>
+          <a:p>
+            <a:pPr algn="ctr"/>
+            <a:r>
+              <a:rPr sz="1100" b="0">
                 <a:solidFill>
                   <a:srgbClr val="FFFFFF"/>
                 </a:solidFill>
                 <a:latin typeface="Calibri"/>
-              </a:defRPr>
-            </a:pPr>
-          </a:p>
-          <a:p>
-            <a:pPr algn="ctr">
-              <a:defRPr sz="1100" b="0">
+              </a:rPr>
+              <a:t>9 Scoring</a:t>
+            </a:r>
+          </a:p>
+          <a:p>
+            <a:pPr algn="ctr"/>
+            <a:r>
+              <a:rPr sz="1100" b="0">
                 <a:solidFill>
                   <a:srgbClr val="FFFFFF"/>
                 </a:solidFill>
                 <a:latin typeface="Calibri"/>
-              </a:defRPr>
-            </a:pPr>
-            <a:r>
-              <a:t>3-Layer GT</a:t>
-            </a:r>
-          </a:p>
-          <a:p>
-            <a:pPr algn="ctr">
-              <a:defRPr sz="1100" b="0">
-                <a:solidFill>
-                  <a:srgbClr val="FFFFFF"/>
-                </a:solidFill>
-                <a:latin typeface="Calibri"/>
-              </a:defRPr>
-            </a:pPr>
-            <a:r>
-              <a:t>9 Scoring</a:t>
-            </a:r>
-          </a:p>
-          <a:p>
-            <a:pPr algn="ctr">
-              <a:defRPr sz="1100" b="0">
-                <a:solidFill>
-                  <a:srgbClr val="FFFFFF"/>
-                </a:solidFill>
-                <a:latin typeface="Calibri"/>
-              </a:defRPr>
-            </a:pPr>
-            <a:r>
+              </a:rPr>
               <a:t>39 Detection</a:t>
             </a:r>
           </a:p>
@@ -35725,41 +35684,7 @@
       </p:sp>
       <p:sp>
         <p:nvSpPr>
-          <p:cNvPr id="12" name="TextBox 11"/>
-          <p:cNvSpPr txBox="1"/>
-          <p:nvPr/>
-        </p:nvSpPr>
-        <p:spPr>
-          <a:xfrm>
-            <a:off x="2743200" y="1280160"/>
-            <a:ext cx="2011680" cy="320040"/>
-          </a:xfrm>
-          <a:prstGeom prst="rect">
-            <a:avLst/>
-          </a:prstGeom>
-          <a:noFill/>
-        </p:spPr>
-        <p:txBody>
-          <a:bodyPr wrap="square" anchor="t"/>
-          <a:lstStyle/>
-          <a:p>
-            <a:pPr algn="ctr">
-              <a:defRPr sz="1300" b="1">
-                <a:solidFill>
-                  <a:srgbClr val="FFFFFF"/>
-                </a:solidFill>
-                <a:latin typeface="Calibri"/>
-              </a:defRPr>
-            </a:pPr>
-            <a:r>
-              <a:t>MutBench</a:t>
-            </a:r>
-          </a:p>
-        </p:txBody>
-      </p:sp>
-      <p:sp>
-        <p:nvSpPr>
-          <p:cNvPr id="13" name="TextBox 12"/>
+          <p:cNvPr id="11" name="TextBox 10"/>
           <p:cNvSpPr txBox="1"/>
           <p:nvPr/>
         </p:nvSpPr>
@@ -35778,7 +35703,7 @@
           <a:lstStyle/>
           <a:p>
             <a:pPr algn="ctr">
-              <a:defRPr sz="2400" b="1">
+              <a:defRPr sz="1800" b="1">
                 <a:solidFill>
                   <a:srgbClr val="333333"/>
                 </a:solidFill>
@@ -35793,7 +35718,7 @@
       </p:sp>
       <p:sp>
         <p:nvSpPr>
-          <p:cNvPr id="14" name="Rounded Rectangle 13"/>
+          <p:cNvPr id="12" name="Rounded Rectangle 11"/>
           <p:cNvSpPr/>
           <p:nvPr/>
         </p:nvSpPr>
@@ -35830,51 +35755,48 @@
           <a:bodyPr rtlCol="0" anchor="ctr" wrap="square"/>
           <a:lstStyle/>
           <a:p>
+            <a:pPr algn="ctr"/>
+            <a:r>
+              <a:rPr sz="1300" b="1">
+                <a:solidFill>
+                  <a:srgbClr val="FFFFFF"/>
+                </a:solidFill>
+                <a:latin typeface="Calibri"/>
+              </a:rPr>
+              <a:t>Stage 1</a:t>
+            </a:r>
+          </a:p>
+          <a:p>
             <a:pPr algn="ctr">
-              <a:defRPr sz="1100" b="0">
+              <a:spcBef>
+                <a:spcPts val="200"/>
+              </a:spcBef>
+              <a:spcAft>
+                <a:spcPts val="0"/>
+              </a:spcAft>
+            </a:pPr>
+          </a:p>
+          <a:p>
+            <a:pPr algn="ctr"/>
+            <a:r>
+              <a:rPr sz="1100" b="0">
                 <a:solidFill>
                   <a:srgbClr val="FFFFFF"/>
                 </a:solidFill>
                 <a:latin typeface="Calibri"/>
-              </a:defRPr>
-            </a:pPr>
-            <a:r>
-              <a:t>Stage 1</a:t>
-            </a:r>
-          </a:p>
-          <a:p>
-            <a:pPr algn="ctr">
-              <a:defRPr sz="1100" b="0">
+              </a:rPr>
+              <a:t>SARS-CoV-2</a:t>
+            </a:r>
+          </a:p>
+          <a:p>
+            <a:pPr algn="ctr"/>
+            <a:r>
+              <a:rPr sz="1100" b="0">
                 <a:solidFill>
                   <a:srgbClr val="FFFFFF"/>
                 </a:solidFill>
                 <a:latin typeface="Calibri"/>
-              </a:defRPr>
-            </a:pPr>
-          </a:p>
-          <a:p>
-            <a:pPr algn="ctr">
-              <a:defRPr sz="1100" b="0">
-                <a:solidFill>
-                  <a:srgbClr val="FFFFFF"/>
-                </a:solidFill>
-                <a:latin typeface="Calibri"/>
-              </a:defRPr>
-            </a:pPr>
-            <a:r>
-              <a:t>SARS-CoV-2</a:t>
-            </a:r>
-          </a:p>
-          <a:p>
-            <a:pPr algn="ctr">
-              <a:defRPr sz="1100" b="0">
-                <a:solidFill>
-                  <a:srgbClr val="FFFFFF"/>
-                </a:solidFill>
-                <a:latin typeface="Calibri"/>
-              </a:defRPr>
-            </a:pPr>
-            <a:r>
+              </a:rPr>
               <a:t>depth analysis</a:t>
             </a:r>
           </a:p>
@@ -35882,41 +35804,7 @@
       </p:sp>
       <p:sp>
         <p:nvSpPr>
-          <p:cNvPr id="15" name="TextBox 14"/>
-          <p:cNvSpPr txBox="1"/>
-          <p:nvPr/>
-        </p:nvSpPr>
-        <p:spPr>
-          <a:xfrm>
-            <a:off x="5120640" y="1280160"/>
-            <a:ext cx="2011680" cy="320040"/>
-          </a:xfrm>
-          <a:prstGeom prst="rect">
-            <a:avLst/>
-          </a:prstGeom>
-          <a:noFill/>
-        </p:spPr>
-        <p:txBody>
-          <a:bodyPr wrap="square" anchor="t"/>
-          <a:lstStyle/>
-          <a:p>
-            <a:pPr algn="ctr">
-              <a:defRPr sz="1300" b="1">
-                <a:solidFill>
-                  <a:srgbClr val="FFFFFF"/>
-                </a:solidFill>
-                <a:latin typeface="Calibri"/>
-              </a:defRPr>
-            </a:pPr>
-            <a:r>
-              <a:t>Stage 1</a:t>
-            </a:r>
-          </a:p>
-        </p:txBody>
-      </p:sp>
-      <p:sp>
-        <p:nvSpPr>
-          <p:cNvPr id="16" name="TextBox 15"/>
+          <p:cNvPr id="13" name="TextBox 12"/>
           <p:cNvSpPr txBox="1"/>
           <p:nvPr/>
         </p:nvSpPr>
@@ -35935,7 +35823,7 @@
           <a:lstStyle/>
           <a:p>
             <a:pPr algn="ctr">
-              <a:defRPr sz="2400" b="1">
+              <a:defRPr sz="1800" b="1">
                 <a:solidFill>
                   <a:srgbClr val="333333"/>
                 </a:solidFill>
@@ -35950,7 +35838,7 @@
       </p:sp>
       <p:sp>
         <p:nvSpPr>
-          <p:cNvPr id="17" name="Rounded Rectangle 16"/>
+          <p:cNvPr id="14" name="Rounded Rectangle 13"/>
           <p:cNvSpPr/>
           <p:nvPr/>
         </p:nvSpPr>
@@ -35987,51 +35875,48 @@
           <a:bodyPr rtlCol="0" anchor="ctr" wrap="square"/>
           <a:lstStyle/>
           <a:p>
+            <a:pPr algn="ctr"/>
+            <a:r>
+              <a:rPr sz="1300" b="1">
+                <a:solidFill>
+                  <a:srgbClr val="FFFFFF"/>
+                </a:solidFill>
+                <a:latin typeface="Calibri"/>
+              </a:rPr>
+              <a:t>Stage 2</a:t>
+            </a:r>
+          </a:p>
+          <a:p>
             <a:pPr algn="ctr">
-              <a:defRPr sz="1100" b="0">
+              <a:spcBef>
+                <a:spcPts val="200"/>
+              </a:spcBef>
+              <a:spcAft>
+                <a:spcPts val="0"/>
+              </a:spcAft>
+            </a:pPr>
+          </a:p>
+          <a:p>
+            <a:pPr algn="ctr"/>
+            <a:r>
+              <a:rPr sz="1100" b="0">
                 <a:solidFill>
                   <a:srgbClr val="FFFFFF"/>
                 </a:solidFill>
                 <a:latin typeface="Calibri"/>
-              </a:defRPr>
-            </a:pPr>
-            <a:r>
-              <a:t>Stage 2</a:t>
-            </a:r>
-          </a:p>
-          <a:p>
-            <a:pPr algn="ctr">
-              <a:defRPr sz="1100" b="0">
+              </a:rPr>
+              <a:t>9 pathogens</a:t>
+            </a:r>
+          </a:p>
+          <a:p>
+            <a:pPr algn="ctr"/>
+            <a:r>
+              <a:rPr sz="1100" b="0">
                 <a:solidFill>
                   <a:srgbClr val="FFFFFF"/>
                 </a:solidFill>
                 <a:latin typeface="Calibri"/>
-              </a:defRPr>
-            </a:pPr>
-          </a:p>
-          <a:p>
-            <a:pPr algn="ctr">
-              <a:defRPr sz="1100" b="0">
-                <a:solidFill>
-                  <a:srgbClr val="FFFFFF"/>
-                </a:solidFill>
-                <a:latin typeface="Calibri"/>
-              </a:defRPr>
-            </a:pPr>
-            <a:r>
-              <a:t>9 pathogens</a:t>
-            </a:r>
-          </a:p>
-          <a:p>
-            <a:pPr algn="ctr">
-              <a:defRPr sz="1100" b="0">
-                <a:solidFill>
-                  <a:srgbClr val="FFFFFF"/>
-                </a:solidFill>
-                <a:latin typeface="Calibri"/>
-              </a:defRPr>
-            </a:pPr>
-            <a:r>
+              </a:rPr>
               <a:t>2,544 evaluations</a:t>
             </a:r>
           </a:p>
@@ -36039,41 +35924,7 @@
       </p:sp>
       <p:sp>
         <p:nvSpPr>
-          <p:cNvPr id="18" name="TextBox 17"/>
-          <p:cNvSpPr txBox="1"/>
-          <p:nvPr/>
-        </p:nvSpPr>
-        <p:spPr>
-          <a:xfrm>
-            <a:off x="7498080" y="1280160"/>
-            <a:ext cx="2011680" cy="320040"/>
-          </a:xfrm>
-          <a:prstGeom prst="rect">
-            <a:avLst/>
-          </a:prstGeom>
-          <a:noFill/>
-        </p:spPr>
-        <p:txBody>
-          <a:bodyPr wrap="square" anchor="t"/>
-          <a:lstStyle/>
-          <a:p>
-            <a:pPr algn="ctr">
-              <a:defRPr sz="1300" b="1">
-                <a:solidFill>
-                  <a:srgbClr val="FFFFFF"/>
-                </a:solidFill>
-                <a:latin typeface="Calibri"/>
-              </a:defRPr>
-            </a:pPr>
-            <a:r>
-              <a:t>Stage 2</a:t>
-            </a:r>
-          </a:p>
-        </p:txBody>
-      </p:sp>
-      <p:sp>
-        <p:nvSpPr>
-          <p:cNvPr id="19" name="TextBox 18"/>
+          <p:cNvPr id="15" name="TextBox 14"/>
           <p:cNvSpPr txBox="1"/>
           <p:nvPr/>
         </p:nvSpPr>
@@ -36092,7 +35943,7 @@
           <a:lstStyle/>
           <a:p>
             <a:pPr algn="ctr">
-              <a:defRPr sz="2400" b="1">
+              <a:defRPr sz="1800" b="1">
                 <a:solidFill>
                   <a:srgbClr val="333333"/>
                 </a:solidFill>
@@ -36107,7 +35958,7 @@
       </p:sp>
       <p:sp>
         <p:nvSpPr>
-          <p:cNvPr id="20" name="Rounded Rectangle 19"/>
+          <p:cNvPr id="16" name="Rounded Rectangle 15"/>
           <p:cNvSpPr/>
           <p:nvPr/>
         </p:nvSpPr>
@@ -36144,51 +35995,48 @@
           <a:bodyPr rtlCol="0" anchor="ctr" wrap="square"/>
           <a:lstStyle/>
           <a:p>
+            <a:pPr algn="ctr"/>
+            <a:r>
+              <a:rPr sz="1300" b="1">
+                <a:solidFill>
+                  <a:srgbClr val="FFFFFF"/>
+                </a:solidFill>
+                <a:latin typeface="Calibri"/>
+              </a:rPr>
+              <a:t>Finding</a:t>
+            </a:r>
+          </a:p>
+          <a:p>
             <a:pPr algn="ctr">
-              <a:defRPr sz="1100" b="0">
+              <a:spcBef>
+                <a:spcPts val="200"/>
+              </a:spcBef>
+              <a:spcAft>
+                <a:spcPts val="0"/>
+              </a:spcAft>
+            </a:pPr>
+          </a:p>
+          <a:p>
+            <a:pPr algn="ctr"/>
+            <a:r>
+              <a:rPr sz="1100" b="0">
                 <a:solidFill>
                   <a:srgbClr val="FFFFFF"/>
                 </a:solidFill>
                 <a:latin typeface="Calibri"/>
-              </a:defRPr>
-            </a:pPr>
-            <a:r>
-              <a:t>Finding</a:t>
-            </a:r>
-          </a:p>
-          <a:p>
-            <a:pPr algn="ctr">
-              <a:defRPr sz="1100" b="0">
+              </a:rPr>
+              <a:t>No universal best</a:t>
+            </a:r>
+          </a:p>
+          <a:p>
+            <a:pPr algn="ctr"/>
+            <a:r>
+              <a:rPr sz="1100" b="0">
                 <a:solidFill>
                   <a:srgbClr val="FFFFFF"/>
                 </a:solidFill>
                 <a:latin typeface="Calibri"/>
-              </a:defRPr>
-            </a:pPr>
-          </a:p>
-          <a:p>
-            <a:pPr algn="ctr">
-              <a:defRPr sz="1100" b="0">
-                <a:solidFill>
-                  <a:srgbClr val="FFFFFF"/>
-                </a:solidFill>
-                <a:latin typeface="Calibri"/>
-              </a:defRPr>
-            </a:pPr>
-            <a:r>
-              <a:t>No universal best</a:t>
-            </a:r>
-          </a:p>
-          <a:p>
-            <a:pPr algn="ctr">
-              <a:defRPr sz="1100" b="0">
-                <a:solidFill>
-                  <a:srgbClr val="FFFFFF"/>
-                </a:solidFill>
-                <a:latin typeface="Calibri"/>
-              </a:defRPr>
-            </a:pPr>
-            <a:r>
+              </a:rPr>
               <a:t>ω² = 0.285</a:t>
             </a:r>
           </a:p>
@@ -36196,41 +36044,7 @@
       </p:sp>
       <p:sp>
         <p:nvSpPr>
-          <p:cNvPr id="21" name="TextBox 20"/>
-          <p:cNvSpPr txBox="1"/>
-          <p:nvPr/>
-        </p:nvSpPr>
-        <p:spPr>
-          <a:xfrm>
-            <a:off x="9875520" y="1280160"/>
-            <a:ext cx="2011680" cy="320040"/>
-          </a:xfrm>
-          <a:prstGeom prst="rect">
-            <a:avLst/>
-          </a:prstGeom>
-          <a:noFill/>
-        </p:spPr>
-        <p:txBody>
-          <a:bodyPr wrap="square" anchor="t"/>
-          <a:lstStyle/>
-          <a:p>
-            <a:pPr algn="ctr">
-              <a:defRPr sz="1300" b="1">
-                <a:solidFill>
-                  <a:srgbClr val="FFFFFF"/>
-                </a:solidFill>
-                <a:latin typeface="Calibri"/>
-              </a:defRPr>
-            </a:pPr>
-            <a:r>
-              <a:t>Finding</a:t>
-            </a:r>
-          </a:p>
-        </p:txBody>
-      </p:sp>
-      <p:sp>
-        <p:nvSpPr>
-          <p:cNvPr id="22" name="Rectangle 21"/>
+          <p:cNvPr id="17" name="Rectangle 16"/>
           <p:cNvSpPr/>
           <p:nvPr/>
         </p:nvSpPr>
@@ -36273,7 +36087,7 @@
       </p:sp>
       <p:sp>
         <p:nvSpPr>
-          <p:cNvPr id="23" name="TextBox 22"/>
+          <p:cNvPr id="18" name="TextBox 17"/>
           <p:cNvSpPr txBox="1"/>
           <p:nvPr/>
         </p:nvSpPr>
@@ -36307,7 +36121,7 @@
       </p:sp>
       <p:sp>
         <p:nvSpPr>
-          <p:cNvPr id="24" name="Rounded Rectangle 23"/>
+          <p:cNvPr id="19" name="Rounded Rectangle 18"/>
           <p:cNvSpPr/>
           <p:nvPr/>
         </p:nvSpPr>
@@ -36373,7 +36187,7 @@
       </p:sp>
       <p:sp>
         <p:nvSpPr>
-          <p:cNvPr id="25" name="Rounded Rectangle 24"/>
+          <p:cNvPr id="20" name="Rounded Rectangle 19"/>
           <p:cNvSpPr/>
           <p:nvPr/>
         </p:nvSpPr>
@@ -36418,7 +36232,7 @@
       </p:sp>
       <p:sp>
         <p:nvSpPr>
-          <p:cNvPr id="26" name="TextBox 25"/>
+          <p:cNvPr id="21" name="TextBox 20"/>
           <p:cNvSpPr txBox="1"/>
           <p:nvPr/>
         </p:nvSpPr>
@@ -36452,7 +36266,7 @@
       </p:sp>
       <p:sp>
         <p:nvSpPr>
-          <p:cNvPr id="27" name="TextBox 26"/>
+          <p:cNvPr id="22" name="TextBox 21"/>
           <p:cNvSpPr txBox="1"/>
           <p:nvPr/>
         </p:nvSpPr>
@@ -36486,7 +36300,7 @@
       </p:sp>
       <p:sp>
         <p:nvSpPr>
-          <p:cNvPr id="28" name="Rounded Rectangle 27"/>
+          <p:cNvPr id="23" name="Rounded Rectangle 22"/>
           <p:cNvSpPr/>
           <p:nvPr/>
         </p:nvSpPr>
@@ -36531,7 +36345,7 @@
       </p:sp>
       <p:sp>
         <p:nvSpPr>
-          <p:cNvPr id="29" name="TextBox 28"/>
+          <p:cNvPr id="24" name="TextBox 23"/>
           <p:cNvSpPr txBox="1"/>
           <p:nvPr/>
         </p:nvSpPr>
@@ -36565,7 +36379,7 @@
       </p:sp>
       <p:sp>
         <p:nvSpPr>
-          <p:cNvPr id="30" name="TextBox 29"/>
+          <p:cNvPr id="25" name="TextBox 24"/>
           <p:cNvSpPr txBox="1"/>
           <p:nvPr/>
         </p:nvSpPr>
@@ -36599,7 +36413,7 @@
       </p:sp>
       <p:sp>
         <p:nvSpPr>
-          <p:cNvPr id="31" name="Rounded Rectangle 30"/>
+          <p:cNvPr id="26" name="Rounded Rectangle 25"/>
           <p:cNvSpPr/>
           <p:nvPr/>
         </p:nvSpPr>
@@ -36644,7 +36458,7 @@
       </p:sp>
       <p:sp>
         <p:nvSpPr>
-          <p:cNvPr id="32" name="TextBox 31"/>
+          <p:cNvPr id="27" name="TextBox 26"/>
           <p:cNvSpPr txBox="1"/>
           <p:nvPr/>
         </p:nvSpPr>
@@ -36678,7 +36492,7 @@
       </p:sp>
       <p:sp>
         <p:nvSpPr>
-          <p:cNvPr id="33" name="TextBox 32"/>
+          <p:cNvPr id="28" name="TextBox 27"/>
           <p:cNvSpPr txBox="1"/>
           <p:nvPr/>
         </p:nvSpPr>
@@ -36712,7 +36526,7 @@
       </p:sp>
       <p:sp>
         <p:nvSpPr>
-          <p:cNvPr id="34" name="Rounded Rectangle 33"/>
+          <p:cNvPr id="29" name="Rounded Rectangle 28"/>
           <p:cNvSpPr/>
           <p:nvPr/>
         </p:nvSpPr>
@@ -36757,7 +36571,7 @@
       </p:sp>
       <p:sp>
         <p:nvSpPr>
-          <p:cNvPr id="35" name="TextBox 34"/>
+          <p:cNvPr id="30" name="TextBox 29"/>
           <p:cNvSpPr txBox="1"/>
           <p:nvPr/>
         </p:nvSpPr>
@@ -36791,7 +36605,7 @@
       </p:sp>
       <p:sp>
         <p:nvSpPr>
-          <p:cNvPr id="36" name="TextBox 35"/>
+          <p:cNvPr id="31" name="TextBox 30"/>
           <p:cNvSpPr txBox="1"/>
           <p:nvPr/>
         </p:nvSpPr>
@@ -36825,7 +36639,7 @@
       </p:sp>
       <p:sp>
         <p:nvSpPr>
-          <p:cNvPr id="37" name="Rounded Rectangle 36"/>
+          <p:cNvPr id="32" name="Rounded Rectangle 31"/>
           <p:cNvSpPr/>
           <p:nvPr/>
         </p:nvSpPr>
@@ -36870,7 +36684,7 @@
       </p:sp>
       <p:sp>
         <p:nvSpPr>
-          <p:cNvPr id="38" name="TextBox 37"/>
+          <p:cNvPr id="33" name="TextBox 32"/>
           <p:cNvSpPr txBox="1"/>
           <p:nvPr/>
         </p:nvSpPr>
@@ -36904,7 +36718,7 @@
       </p:sp>
       <p:sp>
         <p:nvSpPr>
-          <p:cNvPr id="39" name="TextBox 38"/>
+          <p:cNvPr id="34" name="TextBox 33"/>
           <p:cNvSpPr txBox="1"/>
           <p:nvPr/>
         </p:nvSpPr>
@@ -37033,7 +36847,7 @@
       </p:sp>
       <p:pic>
         <p:nvPicPr>
-          <p:cNvPr id="4" name="Picture 3" descr="knu_emblem_official.jpg"/>
+          <p:cNvPr id="4" name="Picture 3" descr="knu_symbol_t.png"/>
           <p:cNvPicPr>
             <a:picLocks noChangeAspect="1"/>
           </p:cNvPicPr>
@@ -37428,7 +37242,7 @@
           <a:lstStyle/>
           <a:p>
             <a:pPr algn="l">
-              <a:defRPr sz="900" b="0">
+              <a:defRPr sz="1100" b="0">
                 <a:solidFill>
                   <a:srgbClr val="333333"/>
                 </a:solidFill>
@@ -37441,7 +37255,7 @@
           </a:p>
           <a:p>
             <a:pPr algn="l">
-              <a:defRPr sz="900" b="0">
+              <a:defRPr sz="1100" b="0">
                 <a:solidFill>
                   <a:srgbClr val="333333"/>
                 </a:solidFill>
@@ -37454,7 +37268,7 @@
           </a:p>
           <a:p>
             <a:pPr algn="l">
-              <a:defRPr sz="900" b="0">
+              <a:defRPr sz="1100" b="0">
                 <a:solidFill>
                   <a:srgbClr val="333333"/>
                 </a:solidFill>
@@ -37567,7 +37381,7 @@
           <a:lstStyle/>
           <a:p>
             <a:pPr algn="l">
-              <a:defRPr sz="900" b="0">
+              <a:defRPr sz="1100" b="0">
                 <a:solidFill>
                   <a:srgbClr val="333333"/>
                 </a:solidFill>
@@ -37580,7 +37394,7 @@
           </a:p>
           <a:p>
             <a:pPr algn="l">
-              <a:defRPr sz="900" b="0">
+              <a:defRPr sz="1100" b="0">
                 <a:solidFill>
                   <a:srgbClr val="333333"/>
                 </a:solidFill>
@@ -37593,7 +37407,7 @@
           </a:p>
           <a:p>
             <a:pPr algn="l">
-              <a:defRPr sz="900" b="0">
+              <a:defRPr sz="1100" b="0">
                 <a:solidFill>
                   <a:srgbClr val="333333"/>
                 </a:solidFill>
@@ -37706,7 +37520,7 @@
           <a:lstStyle/>
           <a:p>
             <a:pPr algn="l">
-              <a:defRPr sz="900" b="0">
+              <a:defRPr sz="1100" b="0">
                 <a:solidFill>
                   <a:srgbClr val="333333"/>
                 </a:solidFill>
@@ -37719,7 +37533,7 @@
           </a:p>
           <a:p>
             <a:pPr algn="l">
-              <a:defRPr sz="900" b="0">
+              <a:defRPr sz="1100" b="0">
                 <a:solidFill>
                   <a:srgbClr val="333333"/>
                 </a:solidFill>
@@ -37732,7 +37546,7 @@
           </a:p>
           <a:p>
             <a:pPr algn="l">
-              <a:defRPr sz="900" b="0">
+              <a:defRPr sz="1100" b="0">
                 <a:solidFill>
                   <a:srgbClr val="333333"/>
                 </a:solidFill>
@@ -37897,7 +37711,7 @@
       </p:sp>
       <p:pic>
         <p:nvPicPr>
-          <p:cNvPr id="4" name="Picture 3" descr="knu_emblem_official.jpg"/>
+          <p:cNvPr id="4" name="Picture 3" descr="knu_symbol_t.png"/>
           <p:cNvPicPr>
             <a:picLocks noChangeAspect="1"/>
           </p:cNvPicPr>
